--- a/大四專題口試簡報.pptx
+++ b/大四專題口試簡報.pptx
@@ -2,24 +2,24 @@
 <file path=ppt/presentation.xml><?xml version="1.0" encoding="utf-8"?>
 <p:presentation xmlns:p="http://schemas.openxmlformats.org/presentationml/2006/main">
   <p:sldMasterIdLst>
-    <p:sldMasterId xmlns:r="http://schemas.openxmlformats.org/officeDocument/2006/relationships" id="2147483648" r:id="Ra9d9b91cade04aa2"/>
+    <p:sldMasterId xmlns:r="http://schemas.openxmlformats.org/officeDocument/2006/relationships" id="2147483648" r:id="R4b3994b312254d68"/>
   </p:sldMasterIdLst>
   <p:notesMasterIdLst>
-    <p:notesMasterId xmlns:r="http://schemas.openxmlformats.org/officeDocument/2006/relationships" r:id="R28bfb1e1438f4cae"/>
+    <p:notesMasterId xmlns:r="http://schemas.openxmlformats.org/officeDocument/2006/relationships" r:id="R412fb8ba438449b0"/>
   </p:notesMasterIdLst>
   <p:sldIdLst>
-    <p:sldId xmlns:r="http://schemas.openxmlformats.org/officeDocument/2006/relationships" id="256" r:id="R7e75db30277744a9"/>
-    <p:sldId xmlns:r="http://schemas.openxmlformats.org/officeDocument/2006/relationships" id="257" r:id="Rc1fc6114900b4a32"/>
-    <p:sldId xmlns:r="http://schemas.openxmlformats.org/officeDocument/2006/relationships" id="258" r:id="R245c106b3d854efb"/>
-    <p:sldId xmlns:r="http://schemas.openxmlformats.org/officeDocument/2006/relationships" id="259" r:id="R9576511aa5f04c7e"/>
-    <p:sldId xmlns:r="http://schemas.openxmlformats.org/officeDocument/2006/relationships" id="260" r:id="Ree56bf376f7a4a81"/>
-    <p:sldId xmlns:r="http://schemas.openxmlformats.org/officeDocument/2006/relationships" id="261" r:id="Rb8a22347e0264b6d"/>
-    <p:sldId xmlns:r="http://schemas.openxmlformats.org/officeDocument/2006/relationships" id="262" r:id="R0be654afef9c4c38"/>
-    <p:sldId xmlns:r="http://schemas.openxmlformats.org/officeDocument/2006/relationships" id="263" r:id="R931484edafdc4ed0"/>
-    <p:sldId xmlns:r="http://schemas.openxmlformats.org/officeDocument/2006/relationships" id="264" r:id="R2723839beb7b4a5f"/>
-    <p:sldId xmlns:r="http://schemas.openxmlformats.org/officeDocument/2006/relationships" id="265" r:id="R7d4b280715f8417a"/>
-    <p:sldId xmlns:r="http://schemas.openxmlformats.org/officeDocument/2006/relationships" id="266" r:id="R3faba5cb6dfd438c"/>
-    <p:sldId xmlns:r="http://schemas.openxmlformats.org/officeDocument/2006/relationships" id="267" r:id="R2bea90dcfbb746b2"/>
+    <p:sldId xmlns:r="http://schemas.openxmlformats.org/officeDocument/2006/relationships" id="256" r:id="R3cb4d549de3f49e4"/>
+    <p:sldId xmlns:r="http://schemas.openxmlformats.org/officeDocument/2006/relationships" id="257" r:id="R595fde09f79644f1"/>
+    <p:sldId xmlns:r="http://schemas.openxmlformats.org/officeDocument/2006/relationships" id="258" r:id="Rd00e074ee1594d39"/>
+    <p:sldId xmlns:r="http://schemas.openxmlformats.org/officeDocument/2006/relationships" id="259" r:id="R5f807c93fc614ce9"/>
+    <p:sldId xmlns:r="http://schemas.openxmlformats.org/officeDocument/2006/relationships" id="260" r:id="R5830d256f5c148d3"/>
+    <p:sldId xmlns:r="http://schemas.openxmlformats.org/officeDocument/2006/relationships" id="261" r:id="Rbbe919931528431a"/>
+    <p:sldId xmlns:r="http://schemas.openxmlformats.org/officeDocument/2006/relationships" id="262" r:id="R0e796cf06fe14c9f"/>
+    <p:sldId xmlns:r="http://schemas.openxmlformats.org/officeDocument/2006/relationships" id="263" r:id="Rd2a70292dc814117"/>
+    <p:sldId xmlns:r="http://schemas.openxmlformats.org/officeDocument/2006/relationships" id="264" r:id="R3e8d4d1bff554d84"/>
+    <p:sldId xmlns:r="http://schemas.openxmlformats.org/officeDocument/2006/relationships" id="265" r:id="Rcd7c9b079ca5434f"/>
+    <p:sldId xmlns:r="http://schemas.openxmlformats.org/officeDocument/2006/relationships" id="266" r:id="R75e1a9dc3c814265"/>
+    <p:sldId xmlns:r="http://schemas.openxmlformats.org/officeDocument/2006/relationships" id="267" r:id="R9a51c78737874956"/>
   </p:sldIdLst>
   <p:sldSz cx="12192000" cy="6858000"/>
   <p:notesSz cx="6858000" cy="9144000"/>
@@ -558,7 +558,7 @@
           </a:p>
           <a:p xmlns:a="http://schemas.openxmlformats.org/drawingml/2006/main">
             <a:r>
-              <a:t>- outputs/專題報告初稿.docx，第 7 章與第 8 章</a:t>
+              <a:t>- outputs/大四專題報告.docx，第 7 章與第 8 章</a:t>
             </a:r>
           </a:p>
           <a:p xmlns:a="http://schemas.openxmlformats.org/drawingml/2006/main">
@@ -653,7 +653,7 @@
           </a:p>
           <a:p xmlns:a="http://schemas.openxmlformats.org/drawingml/2006/main">
             <a:r>
-              <a:t>- outputs/專題報告初稿.docx，第 8.2 節未來工作</a:t>
+              <a:t>- outputs/大四專題報告.docx，第 8.2 節未來工作</a:t>
             </a:r>
           </a:p>
         </p:txBody>
@@ -738,7 +738,7 @@
           </a:p>
           <a:p xmlns:a="http://schemas.openxmlformats.org/drawingml/2006/main">
             <a:r>
-              <a:t>- outputs/專題報告初稿.docx，第 8.1 節結論</a:t>
+              <a:t>- outputs/大四專題報告.docx，第 8.1 節結論</a:t>
             </a:r>
           </a:p>
           <a:p xmlns:a="http://schemas.openxmlformats.org/drawingml/2006/main">
@@ -828,7 +828,7 @@
           </a:p>
           <a:p xmlns:a="http://schemas.openxmlformats.org/drawingml/2006/main">
             <a:r>
-              <a:t>- outputs/專題報告初稿.docx，第 1 章與第 3 章</a:t>
+              <a:t>- outputs/大四專題報告.docx，第 1 章與第 3 章</a:t>
             </a:r>
           </a:p>
           <a:p xmlns:a="http://schemas.openxmlformats.org/drawingml/2006/main">
@@ -918,7 +918,7 @@
           </a:p>
           <a:p xmlns:a="http://schemas.openxmlformats.org/drawingml/2006/main">
             <a:r>
-              <a:t>- outputs/專題報告初稿.docx，第 1.3 節研究問題</a:t>
+              <a:t>- outputs/大四專題報告.docx，第 1.3 節研究問題</a:t>
             </a:r>
           </a:p>
         </p:txBody>
@@ -1541,7 +1541,7 @@
   </p:cSld>
   <p:clrMap bg1="lt1" tx1="dk1" bg2="lt2" tx2="dk2" accent1="accent1" accent2="accent2" accent3="accent3" accent4="accent4" accent5="accent5" accent6="accent6" hlink="hlink" folHlink="folHlink"/>
   <p:sldLayoutIdLst>
-    <p:sldLayoutId xmlns:r="http://schemas.openxmlformats.org/officeDocument/2006/relationships" id="2147483649" r:id="R733cd58200ff4c84"/>
+    <p:sldLayoutId xmlns:r="http://schemas.openxmlformats.org/officeDocument/2006/relationships" id="2147483649" r:id="R64a99e7dc33549e9"/>
   </p:sldLayoutIdLst>
   <p:txStyles>
     <p:titleStyle>
@@ -2916,7 +2916,7 @@
           <p:cNvPr id="5" name="cover-eyebrow">
             <a:extLst xmlns:a="http://schemas.openxmlformats.org/drawingml/2006/main">
               <a:ext uri="{FF2B5EF4-FFF2-40B4-BE49-F238E27FC236}">
-                <a16:creationId xmlns:a16="http://schemas.microsoft.com/office/drawing/2014/main" id="{67729BC5-D36D-47D0-999B-F29D6BBF05FC}"/>
+                <a16:creationId xmlns:a16="http://schemas.microsoft.com/office/drawing/2014/main" id="{F03ACB04-CBE8-44D9-B29D-EC645056450A}"/>
               </a:ext>
             </a:extLst>
           </p:cNvPr>
@@ -2974,7 +2974,7 @@
           <p:cNvPr id="2" name="cover-year">
             <a:extLst xmlns:a="http://schemas.openxmlformats.org/drawingml/2006/main">
               <a:ext uri="{FF2B5EF4-FFF2-40B4-BE49-F238E27FC236}">
-                <a16:creationId xmlns:a16="http://schemas.microsoft.com/office/drawing/2014/main" id="{CF299D7F-276D-43F8-83A8-5B2DE1FE5420}"/>
+                <a16:creationId xmlns:a16="http://schemas.microsoft.com/office/drawing/2014/main" id="{018E47E3-B0A5-498E-AC06-43CC4DD51619}"/>
               </a:ext>
             </a:extLst>
           </p:cNvPr>
@@ -3032,7 +3032,7 @@
           <p:cNvPr id="3" name="cover-title">
             <a:extLst xmlns:a="http://schemas.openxmlformats.org/drawingml/2006/main">
               <a:ext uri="{FF2B5EF4-FFF2-40B4-BE49-F238E27FC236}">
-                <a16:creationId xmlns:a16="http://schemas.microsoft.com/office/drawing/2014/main" id="{F46B892E-CBF4-4806-9D06-0350F2989FA0}"/>
+                <a16:creationId xmlns:a16="http://schemas.microsoft.com/office/drawing/2014/main" id="{BD0CD481-A7F3-4ECE-9647-93D6919E3242}"/>
               </a:ext>
             </a:extLst>
           </p:cNvPr>
@@ -3113,7 +3113,7 @@
           <p:cNvPr id="4" name="cover-meta">
             <a:extLst xmlns:a="http://schemas.openxmlformats.org/drawingml/2006/main">
               <a:ext uri="{FF2B5EF4-FFF2-40B4-BE49-F238E27FC236}">
-                <a16:creationId xmlns:a16="http://schemas.microsoft.com/office/drawing/2014/main" id="{E8E5E6BA-464A-4D0F-B05D-3F3CDAF28CAE}"/>
+                <a16:creationId xmlns:a16="http://schemas.microsoft.com/office/drawing/2014/main" id="{C78BA342-D793-4F9C-80B9-46E230956B62}"/>
               </a:ext>
             </a:extLst>
           </p:cNvPr>
@@ -3169,7 +3169,7 @@
     </p:spTree>
     <p:extLst>
       <p:ext uri="{BB962C8B-B14F-4D97-AF65-F5344CB8AC3E}">
-        <p14:creationId xmlns:p14="http://schemas.microsoft.com/office/powerpoint/2010/main" val="1978994472"/>
+        <p14:creationId xmlns:p14="http://schemas.microsoft.com/office/powerpoint/2010/main" val="1767639932"/>
       </p:ext>
     </p:extLst>
   </p:cSld>
@@ -3200,7 +3200,7 @@
           <p:cNvPr id="9" name="slide-10-title">
             <a:extLst xmlns:a="http://schemas.openxmlformats.org/drawingml/2006/main">
               <a:ext uri="{FF2B5EF4-FFF2-40B4-BE49-F238E27FC236}">
-                <a16:creationId xmlns:a16="http://schemas.microsoft.com/office/drawing/2014/main" id="{487A3663-D709-4DC2-A4D9-60730C3FA10F}"/>
+                <a16:creationId xmlns:a16="http://schemas.microsoft.com/office/drawing/2014/main" id="{202C08DB-FA06-471D-AB46-61F6B9F4B4BF}"/>
               </a:ext>
             </a:extLst>
           </p:cNvPr>
@@ -3258,7 +3258,7 @@
           <p:cNvPr id="2" name="slide-10-number">
             <a:extLst xmlns:a="http://schemas.openxmlformats.org/drawingml/2006/main">
               <a:ext uri="{FF2B5EF4-FFF2-40B4-BE49-F238E27FC236}">
-                <a16:creationId xmlns:a16="http://schemas.microsoft.com/office/drawing/2014/main" id="{4E70C0E4-F559-4FF9-A383-8EA6FA135C98}"/>
+                <a16:creationId xmlns:a16="http://schemas.microsoft.com/office/drawing/2014/main" id="{CBECD501-2003-45CE-92EC-21ED809A30F5}"/>
               </a:ext>
             </a:extLst>
           </p:cNvPr>
@@ -3338,7 +3338,7 @@
           <p:cNvPr id="4" name="integrity-left-title">
             <a:extLst xmlns:a="http://schemas.openxmlformats.org/drawingml/2006/main">
               <a:ext uri="{FF2B5EF4-FFF2-40B4-BE49-F238E27FC236}">
-                <a16:creationId xmlns:a16="http://schemas.microsoft.com/office/drawing/2014/main" id="{C17D0927-A98E-4D24-8B12-E8C7B269113A}"/>
+                <a16:creationId xmlns:a16="http://schemas.microsoft.com/office/drawing/2014/main" id="{CA4F5558-D000-46E9-9CA4-FDC77B49858D}"/>
               </a:ext>
             </a:extLst>
           </p:cNvPr>
@@ -3396,7 +3396,7 @@
           <p:cNvPr id="5" name="integrity-left-bullets">
             <a:extLst xmlns:a="http://schemas.openxmlformats.org/drawingml/2006/main">
               <a:ext uri="{FF2B5EF4-FFF2-40B4-BE49-F238E27FC236}">
-                <a16:creationId xmlns:a16="http://schemas.microsoft.com/office/drawing/2014/main" id="{0B2D74F5-19E3-45F4-B86A-A3CFD6FB919A}"/>
+                <a16:creationId xmlns:a16="http://schemas.microsoft.com/office/drawing/2014/main" id="{D276C8B3-DEE1-45B3-8147-F448815593B1}"/>
               </a:ext>
             </a:extLst>
           </p:cNvPr>
@@ -3539,7 +3539,7 @@
           <p:cNvPr id="6" name="integrity-right-title">
             <a:extLst xmlns:a="http://schemas.openxmlformats.org/drawingml/2006/main">
               <a:ext uri="{FF2B5EF4-FFF2-40B4-BE49-F238E27FC236}">
-                <a16:creationId xmlns:a16="http://schemas.microsoft.com/office/drawing/2014/main" id="{41A297B8-C088-4544-926B-1E5501719FCC}"/>
+                <a16:creationId xmlns:a16="http://schemas.microsoft.com/office/drawing/2014/main" id="{B9820A56-6508-4D78-8CFA-D163FE87D0C5}"/>
               </a:ext>
             </a:extLst>
           </p:cNvPr>
@@ -3597,7 +3597,7 @@
           <p:cNvPr id="7" name="integrity-right-bullets">
             <a:extLst xmlns:a="http://schemas.openxmlformats.org/drawingml/2006/main">
               <a:ext uri="{FF2B5EF4-FFF2-40B4-BE49-F238E27FC236}">
-                <a16:creationId xmlns:a16="http://schemas.microsoft.com/office/drawing/2014/main" id="{60433919-5471-4E80-BA2A-123C1F66EE71}"/>
+                <a16:creationId xmlns:a16="http://schemas.microsoft.com/office/drawing/2014/main" id="{E4EA4D1A-FED7-4D12-B75C-68CB47FCCFC7}"/>
               </a:ext>
             </a:extLst>
           </p:cNvPr>
@@ -3740,7 +3740,7 @@
           <p:cNvPr id="8" name="integrity-bottom">
             <a:extLst xmlns:a="http://schemas.openxmlformats.org/drawingml/2006/main">
               <a:ext uri="{FF2B5EF4-FFF2-40B4-BE49-F238E27FC236}">
-                <a16:creationId xmlns:a16="http://schemas.microsoft.com/office/drawing/2014/main" id="{E251BFE5-FB31-41A0-9F34-EA29251694C6}"/>
+                <a16:creationId xmlns:a16="http://schemas.microsoft.com/office/drawing/2014/main" id="{DFAA6CA4-887F-433B-A59F-07A6B2F6C90E}"/>
               </a:ext>
             </a:extLst>
           </p:cNvPr>
@@ -3796,7 +3796,7 @@
     </p:spTree>
     <p:extLst>
       <p:ext uri="{BB962C8B-B14F-4D97-AF65-F5344CB8AC3E}">
-        <p14:creationId xmlns:p14="http://schemas.microsoft.com/office/powerpoint/2010/main" val="1359070492"/>
+        <p14:creationId xmlns:p14="http://schemas.microsoft.com/office/powerpoint/2010/main" val="664308558"/>
       </p:ext>
     </p:extLst>
   </p:cSld>
@@ -3827,7 +3827,7 @@
           <p:cNvPr id="16" name="slide-11-title">
             <a:extLst xmlns:a="http://schemas.openxmlformats.org/drawingml/2006/main">
               <a:ext uri="{FF2B5EF4-FFF2-40B4-BE49-F238E27FC236}">
-                <a16:creationId xmlns:a16="http://schemas.microsoft.com/office/drawing/2014/main" id="{19911033-E301-438F-8F75-EE57323DCDEC}"/>
+                <a16:creationId xmlns:a16="http://schemas.microsoft.com/office/drawing/2014/main" id="{DF07B1D5-A253-44D5-BA4E-EBB5BF90AF64}"/>
               </a:ext>
             </a:extLst>
           </p:cNvPr>
@@ -3885,7 +3885,7 @@
           <p:cNvPr id="2" name="slide-11-number">
             <a:extLst xmlns:a="http://schemas.openxmlformats.org/drawingml/2006/main">
               <a:ext uri="{FF2B5EF4-FFF2-40B4-BE49-F238E27FC236}">
-                <a16:creationId xmlns:a16="http://schemas.microsoft.com/office/drawing/2014/main" id="{40C50185-B656-4234-AD5A-93C70C6FCA67}"/>
+                <a16:creationId xmlns:a16="http://schemas.microsoft.com/office/drawing/2014/main" id="{535C4BB5-0337-4CD7-97D8-67DE405DB96C}"/>
               </a:ext>
             </a:extLst>
           </p:cNvPr>
@@ -3965,7 +3965,7 @@
           <p:cNvPr id="4" name="roadmap-dot-1">
             <a:extLst xmlns:a="http://schemas.openxmlformats.org/drawingml/2006/main">
               <a:ext uri="{FF2B5EF4-FFF2-40B4-BE49-F238E27FC236}">
-                <a16:creationId xmlns:a16="http://schemas.microsoft.com/office/drawing/2014/main" id="{27D5376E-D390-4EE7-B5F1-52521BE91E11}"/>
+                <a16:creationId xmlns:a16="http://schemas.microsoft.com/office/drawing/2014/main" id="{0B8324BE-F9CF-4A3C-A239-E954DA002917}"/>
               </a:ext>
             </a:extLst>
           </p:cNvPr>
@@ -3996,7 +3996,7 @@
           <p:cNvPr id="5" name="roadmap-label-1">
             <a:extLst xmlns:a="http://schemas.openxmlformats.org/drawingml/2006/main">
               <a:ext uri="{FF2B5EF4-FFF2-40B4-BE49-F238E27FC236}">
-                <a16:creationId xmlns:a16="http://schemas.microsoft.com/office/drawing/2014/main" id="{6905F424-A8DE-411F-9B5B-64E8549DDCCF}"/>
+                <a16:creationId xmlns:a16="http://schemas.microsoft.com/office/drawing/2014/main" id="{AEF361F4-833E-472C-B66C-C1B35089024F}"/>
               </a:ext>
             </a:extLst>
           </p:cNvPr>
@@ -4054,7 +4054,7 @@
           <p:cNvPr id="6" name="roadmap-title-1">
             <a:extLst xmlns:a="http://schemas.openxmlformats.org/drawingml/2006/main">
               <a:ext uri="{FF2B5EF4-FFF2-40B4-BE49-F238E27FC236}">
-                <a16:creationId xmlns:a16="http://schemas.microsoft.com/office/drawing/2014/main" id="{C64822CB-5350-4A2A-A97E-BADCE157AB88}"/>
+                <a16:creationId xmlns:a16="http://schemas.microsoft.com/office/drawing/2014/main" id="{3475D461-0DA1-432C-B5DC-2E0F8BEF06EE}"/>
               </a:ext>
             </a:extLst>
           </p:cNvPr>
@@ -4112,7 +4112,7 @@
           <p:cNvPr id="7" name="roadmap-body-1">
             <a:extLst xmlns:a="http://schemas.openxmlformats.org/drawingml/2006/main">
               <a:ext uri="{FF2B5EF4-FFF2-40B4-BE49-F238E27FC236}">
-                <a16:creationId xmlns:a16="http://schemas.microsoft.com/office/drawing/2014/main" id="{7E18EF9D-C30C-4741-9D5A-84106644F72E}"/>
+                <a16:creationId xmlns:a16="http://schemas.microsoft.com/office/drawing/2014/main" id="{771A53F7-7F8C-4CD5-92F2-0D142B134453}"/>
               </a:ext>
             </a:extLst>
           </p:cNvPr>
@@ -4174,7 +4174,7 @@
           <p:cNvPr id="8" name="roadmap-dot-2">
             <a:extLst xmlns:a="http://schemas.openxmlformats.org/drawingml/2006/main">
               <a:ext uri="{FF2B5EF4-FFF2-40B4-BE49-F238E27FC236}">
-                <a16:creationId xmlns:a16="http://schemas.microsoft.com/office/drawing/2014/main" id="{36FCB03A-E861-4110-B482-87D3E1A6C067}"/>
+                <a16:creationId xmlns:a16="http://schemas.microsoft.com/office/drawing/2014/main" id="{42427654-C29C-4FBA-879E-843732EF2AD5}"/>
               </a:ext>
             </a:extLst>
           </p:cNvPr>
@@ -4205,7 +4205,7 @@
           <p:cNvPr id="9" name="roadmap-label-2">
             <a:extLst xmlns:a="http://schemas.openxmlformats.org/drawingml/2006/main">
               <a:ext uri="{FF2B5EF4-FFF2-40B4-BE49-F238E27FC236}">
-                <a16:creationId xmlns:a16="http://schemas.microsoft.com/office/drawing/2014/main" id="{43B19577-A168-4F74-BB61-DE4820F5C309}"/>
+                <a16:creationId xmlns:a16="http://schemas.microsoft.com/office/drawing/2014/main" id="{289E9615-A281-4BF8-A5D5-4BB1A416AF3A}"/>
               </a:ext>
             </a:extLst>
           </p:cNvPr>
@@ -4263,7 +4263,7 @@
           <p:cNvPr id="10" name="roadmap-title-2">
             <a:extLst xmlns:a="http://schemas.openxmlformats.org/drawingml/2006/main">
               <a:ext uri="{FF2B5EF4-FFF2-40B4-BE49-F238E27FC236}">
-                <a16:creationId xmlns:a16="http://schemas.microsoft.com/office/drawing/2014/main" id="{5BB27192-6ECD-44DC-9591-D158258E44B4}"/>
+                <a16:creationId xmlns:a16="http://schemas.microsoft.com/office/drawing/2014/main" id="{6B7C14B7-0514-4EBA-8BEF-F55E28ECE386}"/>
               </a:ext>
             </a:extLst>
           </p:cNvPr>
@@ -4321,7 +4321,7 @@
           <p:cNvPr id="11" name="roadmap-body-2">
             <a:extLst xmlns:a="http://schemas.openxmlformats.org/drawingml/2006/main">
               <a:ext uri="{FF2B5EF4-FFF2-40B4-BE49-F238E27FC236}">
-                <a16:creationId xmlns:a16="http://schemas.microsoft.com/office/drawing/2014/main" id="{84A65F97-A09F-4553-888B-CD2CA3457A55}"/>
+                <a16:creationId xmlns:a16="http://schemas.microsoft.com/office/drawing/2014/main" id="{F6E6D40D-F1E4-48E5-98E0-BBC6B633C4D1}"/>
               </a:ext>
             </a:extLst>
           </p:cNvPr>
@@ -4383,7 +4383,7 @@
           <p:cNvPr id="12" name="roadmap-dot-3">
             <a:extLst xmlns:a="http://schemas.openxmlformats.org/drawingml/2006/main">
               <a:ext uri="{FF2B5EF4-FFF2-40B4-BE49-F238E27FC236}">
-                <a16:creationId xmlns:a16="http://schemas.microsoft.com/office/drawing/2014/main" id="{D83B656B-8C7F-4200-87E6-A4DC7D90A7D7}"/>
+                <a16:creationId xmlns:a16="http://schemas.microsoft.com/office/drawing/2014/main" id="{BD3D5BF5-5822-4759-9EC0-662D55A996AB}"/>
               </a:ext>
             </a:extLst>
           </p:cNvPr>
@@ -4414,7 +4414,7 @@
           <p:cNvPr id="13" name="roadmap-label-3">
             <a:extLst xmlns:a="http://schemas.openxmlformats.org/drawingml/2006/main">
               <a:ext uri="{FF2B5EF4-FFF2-40B4-BE49-F238E27FC236}">
-                <a16:creationId xmlns:a16="http://schemas.microsoft.com/office/drawing/2014/main" id="{14C453C7-0D5B-437E-A75E-F0D7A8BEE3A9}"/>
+                <a16:creationId xmlns:a16="http://schemas.microsoft.com/office/drawing/2014/main" id="{5B832E04-7872-4416-96E5-276D4E6A17DD}"/>
               </a:ext>
             </a:extLst>
           </p:cNvPr>
@@ -4472,7 +4472,7 @@
           <p:cNvPr id="14" name="roadmap-title-3">
             <a:extLst xmlns:a="http://schemas.openxmlformats.org/drawingml/2006/main">
               <a:ext uri="{FF2B5EF4-FFF2-40B4-BE49-F238E27FC236}">
-                <a16:creationId xmlns:a16="http://schemas.microsoft.com/office/drawing/2014/main" id="{64714968-4BCC-4165-A370-C7B0EA91D890}"/>
+                <a16:creationId xmlns:a16="http://schemas.microsoft.com/office/drawing/2014/main" id="{894473CD-3E9E-453D-9E4F-B3F577459F40}"/>
               </a:ext>
             </a:extLst>
           </p:cNvPr>
@@ -4530,7 +4530,7 @@
           <p:cNvPr id="15" name="roadmap-body-3">
             <a:extLst xmlns:a="http://schemas.openxmlformats.org/drawingml/2006/main">
               <a:ext uri="{FF2B5EF4-FFF2-40B4-BE49-F238E27FC236}">
-                <a16:creationId xmlns:a16="http://schemas.microsoft.com/office/drawing/2014/main" id="{30490399-4FB0-45F3-8E0C-777970845AD8}"/>
+                <a16:creationId xmlns:a16="http://schemas.microsoft.com/office/drawing/2014/main" id="{1BA5B1FD-FE6D-4F4F-96A1-5292CDE83EBA}"/>
               </a:ext>
             </a:extLst>
           </p:cNvPr>
@@ -4590,7 +4590,7 @@
     </p:spTree>
     <p:extLst>
       <p:ext uri="{BB962C8B-B14F-4D97-AF65-F5344CB8AC3E}">
-        <p14:creationId xmlns:p14="http://schemas.microsoft.com/office/powerpoint/2010/main" val="1801315002"/>
+        <p14:creationId xmlns:p14="http://schemas.microsoft.com/office/powerpoint/2010/main" val="1515133605"/>
       </p:ext>
     </p:extLst>
   </p:cSld>
@@ -4621,7 +4621,7 @@
           <p:cNvPr id="5" name="conclusion-eyebrow">
             <a:extLst xmlns:a="http://schemas.openxmlformats.org/drawingml/2006/main">
               <a:ext uri="{FF2B5EF4-FFF2-40B4-BE49-F238E27FC236}">
-                <a16:creationId xmlns:a16="http://schemas.microsoft.com/office/drawing/2014/main" id="{7D26F96D-54C5-4DA6-8970-16D3CA98C3EF}"/>
+                <a16:creationId xmlns:a16="http://schemas.microsoft.com/office/drawing/2014/main" id="{4AC0083D-B2E1-425A-9EE1-81226B73BED2}"/>
               </a:ext>
             </a:extLst>
           </p:cNvPr>
@@ -4679,7 +4679,7 @@
           <p:cNvPr id="2" name="conclusion-message">
             <a:extLst xmlns:a="http://schemas.openxmlformats.org/drawingml/2006/main">
               <a:ext uri="{FF2B5EF4-FFF2-40B4-BE49-F238E27FC236}">
-                <a16:creationId xmlns:a16="http://schemas.microsoft.com/office/drawing/2014/main" id="{C05C7E81-E716-4392-AAB9-AA8485BC1258}"/>
+                <a16:creationId xmlns:a16="http://schemas.microsoft.com/office/drawing/2014/main" id="{D7FB6C27-6F57-4345-B51B-ADBFDFACE3A5}"/>
               </a:ext>
             </a:extLst>
           </p:cNvPr>
@@ -4768,7 +4768,7 @@
           <p:cNvPr id="3" name="conclusion-points">
             <a:extLst xmlns:a="http://schemas.openxmlformats.org/drawingml/2006/main">
               <a:ext uri="{FF2B5EF4-FFF2-40B4-BE49-F238E27FC236}">
-                <a16:creationId xmlns:a16="http://schemas.microsoft.com/office/drawing/2014/main" id="{57468334-8180-4ECE-841D-8347012DD487}"/>
+                <a16:creationId xmlns:a16="http://schemas.microsoft.com/office/drawing/2014/main" id="{210655AA-5992-4F8E-A601-1213FFEEF65B}"/>
               </a:ext>
             </a:extLst>
           </p:cNvPr>
@@ -4826,7 +4826,7 @@
           <p:cNvPr id="4" name="conclusion-qa">
             <a:extLst xmlns:a="http://schemas.openxmlformats.org/drawingml/2006/main">
               <a:ext uri="{FF2B5EF4-FFF2-40B4-BE49-F238E27FC236}">
-                <a16:creationId xmlns:a16="http://schemas.microsoft.com/office/drawing/2014/main" id="{EAA50C8E-0CFC-4F13-808C-DD54F784F899}"/>
+                <a16:creationId xmlns:a16="http://schemas.microsoft.com/office/drawing/2014/main" id="{2B230C0E-D706-48CC-AD9D-A4CF26587B57}"/>
               </a:ext>
             </a:extLst>
           </p:cNvPr>
@@ -4882,7 +4882,7 @@
     </p:spTree>
     <p:extLst>
       <p:ext uri="{BB962C8B-B14F-4D97-AF65-F5344CB8AC3E}">
-        <p14:creationId xmlns:p14="http://schemas.microsoft.com/office/powerpoint/2010/main" val="896047133"/>
+        <p14:creationId xmlns:p14="http://schemas.microsoft.com/office/powerpoint/2010/main" val="2146359811"/>
       </p:ext>
     </p:extLst>
   </p:cSld>
@@ -4913,7 +4913,7 @@
           <p:cNvPr id="10" name="slide-2-title">
             <a:extLst xmlns:a="http://schemas.openxmlformats.org/drawingml/2006/main">
               <a:ext uri="{FF2B5EF4-FFF2-40B4-BE49-F238E27FC236}">
-                <a16:creationId xmlns:a16="http://schemas.microsoft.com/office/drawing/2014/main" id="{07B4EAFC-6C7D-40EB-AD58-069ECA1AB960}"/>
+                <a16:creationId xmlns:a16="http://schemas.microsoft.com/office/drawing/2014/main" id="{1306DEEC-13BF-4B9C-80F4-91476B06F246}"/>
               </a:ext>
             </a:extLst>
           </p:cNvPr>
@@ -4971,7 +4971,7 @@
           <p:cNvPr id="2" name="slide-2-number">
             <a:extLst xmlns:a="http://schemas.openxmlformats.org/drawingml/2006/main">
               <a:ext uri="{FF2B5EF4-FFF2-40B4-BE49-F238E27FC236}">
-                <a16:creationId xmlns:a16="http://schemas.microsoft.com/office/drawing/2014/main" id="{697609F1-941E-43A6-B0EE-A1FD7928822B}"/>
+                <a16:creationId xmlns:a16="http://schemas.microsoft.com/office/drawing/2014/main" id="{83FBCB24-7380-4086-BF75-8B45DAFAFAFE}"/>
               </a:ext>
             </a:extLst>
           </p:cNvPr>
@@ -5029,7 +5029,7 @@
           <p:cNvPr id="3" name="problem-lead">
             <a:extLst xmlns:a="http://schemas.openxmlformats.org/drawingml/2006/main">
               <a:ext uri="{FF2B5EF4-FFF2-40B4-BE49-F238E27FC236}">
-                <a16:creationId xmlns:a16="http://schemas.microsoft.com/office/drawing/2014/main" id="{0F237E6F-DD6C-4569-9DF4-7AE96AFDA2F5}"/>
+                <a16:creationId xmlns:a16="http://schemas.microsoft.com/office/drawing/2014/main" id="{85A4E4D4-780D-4131-ACC7-6B529843CF52}"/>
               </a:ext>
             </a:extLst>
           </p:cNvPr>
@@ -5091,7 +5091,7 @@
           <p:cNvPr id="4" name="problem-panel">
             <a:extLst xmlns:a="http://schemas.openxmlformats.org/drawingml/2006/main">
               <a:ext uri="{FF2B5EF4-FFF2-40B4-BE49-F238E27FC236}">
-                <a16:creationId xmlns:a16="http://schemas.microsoft.com/office/drawing/2014/main" id="{CB308E56-DE07-44CC-9DB0-A2DB6F2F09E3}"/>
+                <a16:creationId xmlns:a16="http://schemas.microsoft.com/office/drawing/2014/main" id="{CCF37A4E-749E-4815-87B7-5B83F409966E}"/>
               </a:ext>
             </a:extLst>
           </p:cNvPr>
@@ -5124,7 +5124,7 @@
           <p:cNvPr id="5" name="solution-panel">
             <a:extLst xmlns:a="http://schemas.openxmlformats.org/drawingml/2006/main">
               <a:ext uri="{FF2B5EF4-FFF2-40B4-BE49-F238E27FC236}">
-                <a16:creationId xmlns:a16="http://schemas.microsoft.com/office/drawing/2014/main" id="{C5324F0F-CF1F-4BFF-AE7E-CDCB7EC29CDC}"/>
+                <a16:creationId xmlns:a16="http://schemas.microsoft.com/office/drawing/2014/main" id="{78DCDAC4-2CA8-4B2C-BF09-5103BC55E2F9}"/>
               </a:ext>
             </a:extLst>
           </p:cNvPr>
@@ -5159,7 +5159,7 @@
           <p:cNvPr id="6" name="problem-panel-title">
             <a:extLst xmlns:a="http://schemas.openxmlformats.org/drawingml/2006/main">
               <a:ext uri="{FF2B5EF4-FFF2-40B4-BE49-F238E27FC236}">
-                <a16:creationId xmlns:a16="http://schemas.microsoft.com/office/drawing/2014/main" id="{F50E9BE7-3A7B-44C8-9384-7E803A5A2E6A}"/>
+                <a16:creationId xmlns:a16="http://schemas.microsoft.com/office/drawing/2014/main" id="{6B644D45-88EE-466F-A807-BDEB7440AEDF}"/>
               </a:ext>
             </a:extLst>
           </p:cNvPr>
@@ -5217,7 +5217,7 @@
           <p:cNvPr id="7" name="solution-panel-title">
             <a:extLst xmlns:a="http://schemas.openxmlformats.org/drawingml/2006/main">
               <a:ext uri="{FF2B5EF4-FFF2-40B4-BE49-F238E27FC236}">
-                <a16:creationId xmlns:a16="http://schemas.microsoft.com/office/drawing/2014/main" id="{740D5384-16B7-4A22-AFEB-317805705080}"/>
+                <a16:creationId xmlns:a16="http://schemas.microsoft.com/office/drawing/2014/main" id="{C999F552-8B60-4242-BFE8-936DFA4491B2}"/>
               </a:ext>
             </a:extLst>
           </p:cNvPr>
@@ -5275,7 +5275,7 @@
           <p:cNvPr id="8" name="problem-details">
             <a:extLst xmlns:a="http://schemas.openxmlformats.org/drawingml/2006/main">
               <a:ext uri="{FF2B5EF4-FFF2-40B4-BE49-F238E27FC236}">
-                <a16:creationId xmlns:a16="http://schemas.microsoft.com/office/drawing/2014/main" id="{E736B4B7-08A0-4D5B-9929-6B7E96B2FCF2}"/>
+                <a16:creationId xmlns:a16="http://schemas.microsoft.com/office/drawing/2014/main" id="{7DF98D3B-B85E-486B-855A-A85E0BCD517E}"/>
               </a:ext>
             </a:extLst>
           </p:cNvPr>
@@ -5391,7 +5391,7 @@
           <p:cNvPr id="9" name="solution-details">
             <a:extLst xmlns:a="http://schemas.openxmlformats.org/drawingml/2006/main">
               <a:ext uri="{FF2B5EF4-FFF2-40B4-BE49-F238E27FC236}">
-                <a16:creationId xmlns:a16="http://schemas.microsoft.com/office/drawing/2014/main" id="{0441EF94-BB17-4BA5-A41D-3ECA0C16FEA8}"/>
+                <a16:creationId xmlns:a16="http://schemas.microsoft.com/office/drawing/2014/main" id="{C9FACC1D-73B3-4088-A4F9-5DB307C8370F}"/>
               </a:ext>
             </a:extLst>
           </p:cNvPr>
@@ -5505,7 +5505,7 @@
     </p:spTree>
     <p:extLst>
       <p:ext uri="{BB962C8B-B14F-4D97-AF65-F5344CB8AC3E}">
-        <p14:creationId xmlns:p14="http://schemas.microsoft.com/office/powerpoint/2010/main" val="118269969"/>
+        <p14:creationId xmlns:p14="http://schemas.microsoft.com/office/powerpoint/2010/main" val="1753244779"/>
       </p:ext>
     </p:extLst>
   </p:cSld>
@@ -5536,7 +5536,7 @@
           <p:cNvPr id="12" name="slide-3-title">
             <a:extLst xmlns:a="http://schemas.openxmlformats.org/drawingml/2006/main">
               <a:ext uri="{FF2B5EF4-FFF2-40B4-BE49-F238E27FC236}">
-                <a16:creationId xmlns:a16="http://schemas.microsoft.com/office/drawing/2014/main" id="{A4F471CD-78CE-4D51-A475-E114ADC5DAA8}"/>
+                <a16:creationId xmlns:a16="http://schemas.microsoft.com/office/drawing/2014/main" id="{FAEFE6B4-F103-41CD-A042-DAC249991346}"/>
               </a:ext>
             </a:extLst>
           </p:cNvPr>
@@ -5594,7 +5594,7 @@
           <p:cNvPr id="2" name="slide-3-number">
             <a:extLst xmlns:a="http://schemas.openxmlformats.org/drawingml/2006/main">
               <a:ext uri="{FF2B5EF4-FFF2-40B4-BE49-F238E27FC236}">
-                <a16:creationId xmlns:a16="http://schemas.microsoft.com/office/drawing/2014/main" id="{2E4AC016-D2C8-4A70-891A-7CB115A587F8}"/>
+                <a16:creationId xmlns:a16="http://schemas.microsoft.com/office/drawing/2014/main" id="{C28AF058-0BFD-4E43-8BD2-A9417924A8F2}"/>
               </a:ext>
             </a:extLst>
           </p:cNvPr>
@@ -5652,7 +5652,7 @@
           <p:cNvPr id="3" name="question-number-1">
             <a:extLst xmlns:a="http://schemas.openxmlformats.org/drawingml/2006/main">
               <a:ext uri="{FF2B5EF4-FFF2-40B4-BE49-F238E27FC236}">
-                <a16:creationId xmlns:a16="http://schemas.microsoft.com/office/drawing/2014/main" id="{6129ED53-1D23-4F73-B542-FBE6D54FEE23}"/>
+                <a16:creationId xmlns:a16="http://schemas.microsoft.com/office/drawing/2014/main" id="{374F923A-1131-4160-BD9A-18011BB2A84E}"/>
               </a:ext>
             </a:extLst>
           </p:cNvPr>
@@ -5710,7 +5710,7 @@
           <p:cNvPr id="4" name="question-title-1">
             <a:extLst xmlns:a="http://schemas.openxmlformats.org/drawingml/2006/main">
               <a:ext uri="{FF2B5EF4-FFF2-40B4-BE49-F238E27FC236}">
-                <a16:creationId xmlns:a16="http://schemas.microsoft.com/office/drawing/2014/main" id="{BC9DF134-D299-403D-8FD2-84F43EB85139}"/>
+                <a16:creationId xmlns:a16="http://schemas.microsoft.com/office/drawing/2014/main" id="{89055A3A-6014-4938-883F-40287B2B9947}"/>
               </a:ext>
             </a:extLst>
           </p:cNvPr>
@@ -5768,7 +5768,7 @@
           <p:cNvPr id="5" name="question-body-1">
             <a:extLst xmlns:a="http://schemas.openxmlformats.org/drawingml/2006/main">
               <a:ext uri="{FF2B5EF4-FFF2-40B4-BE49-F238E27FC236}">
-                <a16:creationId xmlns:a16="http://schemas.microsoft.com/office/drawing/2014/main" id="{71E966B5-D6CE-49DC-B336-077D23C3029E}"/>
+                <a16:creationId xmlns:a16="http://schemas.microsoft.com/office/drawing/2014/main" id="{7E8A94B9-8673-4DD9-91EF-2B3633A91139}"/>
               </a:ext>
             </a:extLst>
           </p:cNvPr>
@@ -5830,7 +5830,7 @@
           <p:cNvPr id="6" name="question-number-2">
             <a:extLst xmlns:a="http://schemas.openxmlformats.org/drawingml/2006/main">
               <a:ext uri="{FF2B5EF4-FFF2-40B4-BE49-F238E27FC236}">
-                <a16:creationId xmlns:a16="http://schemas.microsoft.com/office/drawing/2014/main" id="{D325B719-5C46-449B-B40B-C9DB07A345CC}"/>
+                <a16:creationId xmlns:a16="http://schemas.microsoft.com/office/drawing/2014/main" id="{DE22C14A-7D6F-40C1-954D-5CC36B968231}"/>
               </a:ext>
             </a:extLst>
           </p:cNvPr>
@@ -5888,7 +5888,7 @@
           <p:cNvPr id="7" name="question-title-2">
             <a:extLst xmlns:a="http://schemas.openxmlformats.org/drawingml/2006/main">
               <a:ext uri="{FF2B5EF4-FFF2-40B4-BE49-F238E27FC236}">
-                <a16:creationId xmlns:a16="http://schemas.microsoft.com/office/drawing/2014/main" id="{5C3E6CC6-C447-493A-A259-B6EAC14803D2}"/>
+                <a16:creationId xmlns:a16="http://schemas.microsoft.com/office/drawing/2014/main" id="{0EB9629B-C978-49D0-B7F7-6F085F1CD1D5}"/>
               </a:ext>
             </a:extLst>
           </p:cNvPr>
@@ -5946,7 +5946,7 @@
           <p:cNvPr id="8" name="question-body-2">
             <a:extLst xmlns:a="http://schemas.openxmlformats.org/drawingml/2006/main">
               <a:ext uri="{FF2B5EF4-FFF2-40B4-BE49-F238E27FC236}">
-                <a16:creationId xmlns:a16="http://schemas.microsoft.com/office/drawing/2014/main" id="{EE204F5E-90A8-4FA0-B62B-32D6B5D5D403}"/>
+                <a16:creationId xmlns:a16="http://schemas.microsoft.com/office/drawing/2014/main" id="{A8095F9E-B298-45D6-A62B-FE76590D84C8}"/>
               </a:ext>
             </a:extLst>
           </p:cNvPr>
@@ -6008,7 +6008,7 @@
           <p:cNvPr id="9" name="question-number-3">
             <a:extLst xmlns:a="http://schemas.openxmlformats.org/drawingml/2006/main">
               <a:ext uri="{FF2B5EF4-FFF2-40B4-BE49-F238E27FC236}">
-                <a16:creationId xmlns:a16="http://schemas.microsoft.com/office/drawing/2014/main" id="{3D806E6C-745A-4328-83CC-C50331D9CED0}"/>
+                <a16:creationId xmlns:a16="http://schemas.microsoft.com/office/drawing/2014/main" id="{BFEDDC9B-B50D-42CA-9D7A-1FC29BE64EE9}"/>
               </a:ext>
             </a:extLst>
           </p:cNvPr>
@@ -6066,7 +6066,7 @@
           <p:cNvPr id="10" name="question-title-3">
             <a:extLst xmlns:a="http://schemas.openxmlformats.org/drawingml/2006/main">
               <a:ext uri="{FF2B5EF4-FFF2-40B4-BE49-F238E27FC236}">
-                <a16:creationId xmlns:a16="http://schemas.microsoft.com/office/drawing/2014/main" id="{18E6C4F3-7B23-4494-BAB1-82D24CE96216}"/>
+                <a16:creationId xmlns:a16="http://schemas.microsoft.com/office/drawing/2014/main" id="{021DBD52-3931-4F72-99B5-4C813E6BA4D6}"/>
               </a:ext>
             </a:extLst>
           </p:cNvPr>
@@ -6124,7 +6124,7 @@
           <p:cNvPr id="11" name="question-body-3">
             <a:extLst xmlns:a="http://schemas.openxmlformats.org/drawingml/2006/main">
               <a:ext uri="{FF2B5EF4-FFF2-40B4-BE49-F238E27FC236}">
-                <a16:creationId xmlns:a16="http://schemas.microsoft.com/office/drawing/2014/main" id="{BF74CE72-98CE-40C7-BD08-9AF243417509}"/>
+                <a16:creationId xmlns:a16="http://schemas.microsoft.com/office/drawing/2014/main" id="{A6A79B3D-E57E-4122-AC90-28799B45953D}"/>
               </a:ext>
             </a:extLst>
           </p:cNvPr>
@@ -6184,7 +6184,7 @@
     </p:spTree>
     <p:extLst>
       <p:ext uri="{BB962C8B-B14F-4D97-AF65-F5344CB8AC3E}">
-        <p14:creationId xmlns:p14="http://schemas.microsoft.com/office/powerpoint/2010/main" val="1416306252"/>
+        <p14:creationId xmlns:p14="http://schemas.microsoft.com/office/powerpoint/2010/main" val="1240358799"/>
       </p:ext>
     </p:extLst>
   </p:cSld>
@@ -6215,7 +6215,7 @@
           <p:cNvPr id="20" name="slide-4-title">
             <a:extLst xmlns:a="http://schemas.openxmlformats.org/drawingml/2006/main">
               <a:ext uri="{FF2B5EF4-FFF2-40B4-BE49-F238E27FC236}">
-                <a16:creationId xmlns:a16="http://schemas.microsoft.com/office/drawing/2014/main" id="{86DF0074-4C39-4CE8-9E69-828ADE5FBABF}"/>
+                <a16:creationId xmlns:a16="http://schemas.microsoft.com/office/drawing/2014/main" id="{C306923B-EB1A-4D60-B03A-466C3286B2B0}"/>
               </a:ext>
             </a:extLst>
           </p:cNvPr>
@@ -6273,7 +6273,7 @@
           <p:cNvPr id="2" name="slide-4-number">
             <a:extLst xmlns:a="http://schemas.openxmlformats.org/drawingml/2006/main">
               <a:ext uri="{FF2B5EF4-FFF2-40B4-BE49-F238E27FC236}">
-                <a16:creationId xmlns:a16="http://schemas.microsoft.com/office/drawing/2014/main" id="{A4119B12-3D4C-4D8F-B5DD-034399E4DA37}"/>
+                <a16:creationId xmlns:a16="http://schemas.microsoft.com/office/drawing/2014/main" id="{A89313A3-A783-41F5-A9EA-82848F02B7F4}"/>
               </a:ext>
             </a:extLst>
           </p:cNvPr>
@@ -6331,7 +6331,7 @@
           <p:cNvPr id="3" name="architecture-lead">
             <a:extLst xmlns:a="http://schemas.openxmlformats.org/drawingml/2006/main">
               <a:ext uri="{FF2B5EF4-FFF2-40B4-BE49-F238E27FC236}">
-                <a16:creationId xmlns:a16="http://schemas.microsoft.com/office/drawing/2014/main" id="{E7BD6B29-ECCC-49C4-BB62-0BA1CB0B0761}"/>
+                <a16:creationId xmlns:a16="http://schemas.microsoft.com/office/drawing/2014/main" id="{82D5D13A-4807-46FA-8840-F7C17820D888}"/>
               </a:ext>
             </a:extLst>
           </p:cNvPr>
@@ -6393,7 +6393,7 @@
           <p:cNvPr id="4" name="architecture-points">
             <a:extLst xmlns:a="http://schemas.openxmlformats.org/drawingml/2006/main">
               <a:ext uri="{FF2B5EF4-FFF2-40B4-BE49-F238E27FC236}">
-                <a16:creationId xmlns:a16="http://schemas.microsoft.com/office/drawing/2014/main" id="{BC830A18-3EC9-4A1D-9281-B42313380E9F}"/>
+                <a16:creationId xmlns:a16="http://schemas.microsoft.com/office/drawing/2014/main" id="{8EAB318D-F861-4B83-923C-F4A05F6655BA}"/>
               </a:ext>
             </a:extLst>
           </p:cNvPr>
@@ -6536,7 +6536,7 @@
           <p:cNvPr id="5" name="architecture-field">
             <a:extLst xmlns:a="http://schemas.openxmlformats.org/drawingml/2006/main">
               <a:ext uri="{FF2B5EF4-FFF2-40B4-BE49-F238E27FC236}">
-                <a16:creationId xmlns:a16="http://schemas.microsoft.com/office/drawing/2014/main" id="{3B56E94A-DFA1-4884-8B72-A46F118A46F5}"/>
+                <a16:creationId xmlns:a16="http://schemas.microsoft.com/office/drawing/2014/main" id="{5B46B6FD-099B-4DCA-AD8E-4D1F60C110C0}"/>
               </a:ext>
             </a:extLst>
           </p:cNvPr>
@@ -6659,7 +6659,7 @@
           <p:cNvPr id="10" name="architecture-node-1">
             <a:extLst xmlns:a="http://schemas.openxmlformats.org/drawingml/2006/main">
               <a:ext uri="{FF2B5EF4-FFF2-40B4-BE49-F238E27FC236}">
-                <a16:creationId xmlns:a16="http://schemas.microsoft.com/office/drawing/2014/main" id="{F55D358F-322C-439C-97F4-8F2631BF1C04}"/>
+                <a16:creationId xmlns:a16="http://schemas.microsoft.com/office/drawing/2014/main" id="{C6AF2667-DF80-424C-99CE-7667F36B5D80}"/>
               </a:ext>
             </a:extLst>
           </p:cNvPr>
@@ -6694,7 +6694,7 @@
           <p:cNvPr id="11" name="architecture-node-text-1">
             <a:extLst xmlns:a="http://schemas.openxmlformats.org/drawingml/2006/main">
               <a:ext uri="{FF2B5EF4-FFF2-40B4-BE49-F238E27FC236}">
-                <a16:creationId xmlns:a16="http://schemas.microsoft.com/office/drawing/2014/main" id="{E6545E9E-CB28-4D14-AE22-38D4244D0443}"/>
+                <a16:creationId xmlns:a16="http://schemas.microsoft.com/office/drawing/2014/main" id="{F3F1B29C-22BD-42B9-B4CC-3C2F46F8C8AD}"/>
               </a:ext>
             </a:extLst>
           </p:cNvPr>
@@ -6752,7 +6752,7 @@
           <p:cNvPr id="12" name="architecture-node-2">
             <a:extLst xmlns:a="http://schemas.openxmlformats.org/drawingml/2006/main">
               <a:ext uri="{FF2B5EF4-FFF2-40B4-BE49-F238E27FC236}">
-                <a16:creationId xmlns:a16="http://schemas.microsoft.com/office/drawing/2014/main" id="{1B5A79FE-7387-4513-8FB6-3D489A2D65CF}"/>
+                <a16:creationId xmlns:a16="http://schemas.microsoft.com/office/drawing/2014/main" id="{2C603B0A-B011-4425-8109-E80D9FD8E0AB}"/>
               </a:ext>
             </a:extLst>
           </p:cNvPr>
@@ -6787,7 +6787,7 @@
           <p:cNvPr id="13" name="architecture-node-text-2">
             <a:extLst xmlns:a="http://schemas.openxmlformats.org/drawingml/2006/main">
               <a:ext uri="{FF2B5EF4-FFF2-40B4-BE49-F238E27FC236}">
-                <a16:creationId xmlns:a16="http://schemas.microsoft.com/office/drawing/2014/main" id="{37528928-F309-4FC1-9178-B1AC95295049}"/>
+                <a16:creationId xmlns:a16="http://schemas.microsoft.com/office/drawing/2014/main" id="{9E3898D7-B512-413B-8390-D4BB16408F56}"/>
               </a:ext>
             </a:extLst>
           </p:cNvPr>
@@ -6845,7 +6845,7 @@
           <p:cNvPr id="14" name="architecture-node-3">
             <a:extLst xmlns:a="http://schemas.openxmlformats.org/drawingml/2006/main">
               <a:ext uri="{FF2B5EF4-FFF2-40B4-BE49-F238E27FC236}">
-                <a16:creationId xmlns:a16="http://schemas.microsoft.com/office/drawing/2014/main" id="{618DBDD3-8CB3-41DD-8619-D3DB1C30FAEC}"/>
+                <a16:creationId xmlns:a16="http://schemas.microsoft.com/office/drawing/2014/main" id="{D2EA49A5-5A2F-42B6-90DA-89B1D683E7F5}"/>
               </a:ext>
             </a:extLst>
           </p:cNvPr>
@@ -6880,7 +6880,7 @@
           <p:cNvPr id="15" name="architecture-node-text-3">
             <a:extLst xmlns:a="http://schemas.openxmlformats.org/drawingml/2006/main">
               <a:ext uri="{FF2B5EF4-FFF2-40B4-BE49-F238E27FC236}">
-                <a16:creationId xmlns:a16="http://schemas.microsoft.com/office/drawing/2014/main" id="{2D364DAC-2E07-436D-9791-6BF5E4A2B04D}"/>
+                <a16:creationId xmlns:a16="http://schemas.microsoft.com/office/drawing/2014/main" id="{C39332AF-7A35-4016-8D05-FD11153615FD}"/>
               </a:ext>
             </a:extLst>
           </p:cNvPr>
@@ -6938,7 +6938,7 @@
           <p:cNvPr id="16" name="architecture-node-4">
             <a:extLst xmlns:a="http://schemas.openxmlformats.org/drawingml/2006/main">
               <a:ext uri="{FF2B5EF4-FFF2-40B4-BE49-F238E27FC236}">
-                <a16:creationId xmlns:a16="http://schemas.microsoft.com/office/drawing/2014/main" id="{C562D0A6-41D2-4163-B23F-E0216FD70D82}"/>
+                <a16:creationId xmlns:a16="http://schemas.microsoft.com/office/drawing/2014/main" id="{F36DFB7F-BE1D-4488-ADEF-4D88F0DDB0B5}"/>
               </a:ext>
             </a:extLst>
           </p:cNvPr>
@@ -6973,7 +6973,7 @@
           <p:cNvPr id="17" name="architecture-node-text-4">
             <a:extLst xmlns:a="http://schemas.openxmlformats.org/drawingml/2006/main">
               <a:ext uri="{FF2B5EF4-FFF2-40B4-BE49-F238E27FC236}">
-                <a16:creationId xmlns:a16="http://schemas.microsoft.com/office/drawing/2014/main" id="{B94E0DEF-B0A2-4CB5-8B78-BF73D13D1886}"/>
+                <a16:creationId xmlns:a16="http://schemas.microsoft.com/office/drawing/2014/main" id="{6E4B34EE-60F7-49CD-80CE-A465055FD3A2}"/>
               </a:ext>
             </a:extLst>
           </p:cNvPr>
@@ -7031,7 +7031,7 @@
           <p:cNvPr id="18" name="architecture-node-5">
             <a:extLst xmlns:a="http://schemas.openxmlformats.org/drawingml/2006/main">
               <a:ext uri="{FF2B5EF4-FFF2-40B4-BE49-F238E27FC236}">
-                <a16:creationId xmlns:a16="http://schemas.microsoft.com/office/drawing/2014/main" id="{5E35DB79-FB34-4A0D-9E7E-A33C53B3C751}"/>
+                <a16:creationId xmlns:a16="http://schemas.microsoft.com/office/drawing/2014/main" id="{168862EE-6919-4CB3-9DA5-DD0EBE0840D2}"/>
               </a:ext>
             </a:extLst>
           </p:cNvPr>
@@ -7066,7 +7066,7 @@
           <p:cNvPr id="19" name="architecture-node-text-5">
             <a:extLst xmlns:a="http://schemas.openxmlformats.org/drawingml/2006/main">
               <a:ext uri="{FF2B5EF4-FFF2-40B4-BE49-F238E27FC236}">
-                <a16:creationId xmlns:a16="http://schemas.microsoft.com/office/drawing/2014/main" id="{8A9BD809-3BFB-4C56-A375-8E5967170DB2}"/>
+                <a16:creationId xmlns:a16="http://schemas.microsoft.com/office/drawing/2014/main" id="{531D27BD-C794-436B-BED1-A45DBC790774}"/>
               </a:ext>
             </a:extLst>
           </p:cNvPr>
@@ -7122,7 +7122,7 @@
     </p:spTree>
     <p:extLst>
       <p:ext uri="{BB962C8B-B14F-4D97-AF65-F5344CB8AC3E}">
-        <p14:creationId xmlns:p14="http://schemas.microsoft.com/office/powerpoint/2010/main" val="1081932581"/>
+        <p14:creationId xmlns:p14="http://schemas.microsoft.com/office/powerpoint/2010/main" val="170277206"/>
       </p:ext>
     </p:extLst>
   </p:cSld>
@@ -7153,7 +7153,7 @@
           <p:cNvPr id="5" name="slide-5-title">
             <a:extLst xmlns:a="http://schemas.openxmlformats.org/drawingml/2006/main">
               <a:ext uri="{FF2B5EF4-FFF2-40B4-BE49-F238E27FC236}">
-                <a16:creationId xmlns:a16="http://schemas.microsoft.com/office/drawing/2014/main" id="{4B1C258B-2DCF-42E6-9C31-168631058A50}"/>
+                <a16:creationId xmlns:a16="http://schemas.microsoft.com/office/drawing/2014/main" id="{5E8476EC-E4B7-4EEB-B444-08693343C200}"/>
               </a:ext>
             </a:extLst>
           </p:cNvPr>
@@ -7211,7 +7211,7 @@
           <p:cNvPr id="2" name="slide-5-number">
             <a:extLst xmlns:a="http://schemas.openxmlformats.org/drawingml/2006/main">
               <a:ext uri="{FF2B5EF4-FFF2-40B4-BE49-F238E27FC236}">
-                <a16:creationId xmlns:a16="http://schemas.microsoft.com/office/drawing/2014/main" id="{DD5AFB87-B0EF-4311-9466-1C078EE48FB5}"/>
+                <a16:creationId xmlns:a16="http://schemas.microsoft.com/office/drawing/2014/main" id="{37893B15-3FE5-4ECE-9C5C-E2AC484C9F46}"/>
               </a:ext>
             </a:extLst>
           </p:cNvPr>
@@ -7269,7 +7269,7 @@
           <p:cNvPr id="3" name="data-table-lead">
             <a:extLst xmlns:a="http://schemas.openxmlformats.org/drawingml/2006/main">
               <a:ext uri="{FF2B5EF4-FFF2-40B4-BE49-F238E27FC236}">
-                <a16:creationId xmlns:a16="http://schemas.microsoft.com/office/drawing/2014/main" id="{5C0E75D5-3D57-4949-9E36-467F8D296B8A}"/>
+                <a16:creationId xmlns:a16="http://schemas.microsoft.com/office/drawing/2014/main" id="{979C9E09-722B-48A1-846B-E4256FFD1196}"/>
               </a:ext>
             </a:extLst>
           </p:cNvPr>
@@ -8119,7 +8119,7 @@
     </p:spTree>
     <p:extLst>
       <p:ext uri="{BB962C8B-B14F-4D97-AF65-F5344CB8AC3E}">
-        <p14:creationId xmlns:p14="http://schemas.microsoft.com/office/powerpoint/2010/main" val="1810639103"/>
+        <p14:creationId xmlns:p14="http://schemas.microsoft.com/office/powerpoint/2010/main" val="1881885286"/>
       </p:ext>
     </p:extLst>
   </p:cSld>
@@ -8150,7 +8150,7 @@
           <p:cNvPr id="14" name="slide-6-title">
             <a:extLst xmlns:a="http://schemas.openxmlformats.org/drawingml/2006/main">
               <a:ext uri="{FF2B5EF4-FFF2-40B4-BE49-F238E27FC236}">
-                <a16:creationId xmlns:a16="http://schemas.microsoft.com/office/drawing/2014/main" id="{963D84E1-9DCA-4F3F-A2F1-6349A36D8448}"/>
+                <a16:creationId xmlns:a16="http://schemas.microsoft.com/office/drawing/2014/main" id="{8C637152-C915-45FA-9FFD-E632F632168F}"/>
               </a:ext>
             </a:extLst>
           </p:cNvPr>
@@ -8208,7 +8208,7 @@
           <p:cNvPr id="2" name="slide-6-number">
             <a:extLst xmlns:a="http://schemas.openxmlformats.org/drawingml/2006/main">
               <a:ext uri="{FF2B5EF4-FFF2-40B4-BE49-F238E27FC236}">
-                <a16:creationId xmlns:a16="http://schemas.microsoft.com/office/drawing/2014/main" id="{C2730964-C815-42D5-A8B7-0374C24D9884}"/>
+                <a16:creationId xmlns:a16="http://schemas.microsoft.com/office/drawing/2014/main" id="{C96C30B4-E293-4DB6-9A52-EE352FAE220D}"/>
               </a:ext>
             </a:extLst>
           </p:cNvPr>
@@ -8273,7 +8273,7 @@
         </p:xfrm>
         <a:graphic xmlns:a="http://schemas.openxmlformats.org/drawingml/2006/main">
           <a:graphicData uri="http://schemas.openxmlformats.org/drawingml/2006/chart">
-            <c:chart xmlns:r="http://schemas.openxmlformats.org/officeDocument/2006/relationships" xmlns:c="http://schemas.openxmlformats.org/drawingml/2006/chart" r:id="Ra065da2c3f734c43"/>
+            <c:chart xmlns:r="http://schemas.openxmlformats.org/officeDocument/2006/relationships" xmlns:c="http://schemas.openxmlformats.org/drawingml/2006/chart" r:id="R5937ad12c6e043ba"/>
           </a:graphicData>
         </a:graphic>
       </p:graphicFrame>
@@ -8282,7 +8282,7 @@
           <p:cNvPr id="4" name="monthly-card-1">
             <a:extLst xmlns:a="http://schemas.openxmlformats.org/drawingml/2006/main">
               <a:ext uri="{FF2B5EF4-FFF2-40B4-BE49-F238E27FC236}">
-                <a16:creationId xmlns:a16="http://schemas.microsoft.com/office/drawing/2014/main" id="{D92486B7-3932-4A76-B9DE-310AA5DCD8B7}"/>
+                <a16:creationId xmlns:a16="http://schemas.microsoft.com/office/drawing/2014/main" id="{72078CD0-F4C6-4843-A9D2-642FC1102755}"/>
               </a:ext>
             </a:extLst>
           </p:cNvPr>
@@ -8317,7 +8317,7 @@
           <p:cNvPr id="5" name="monthly-stat-1">
             <a:extLst xmlns:a="http://schemas.openxmlformats.org/drawingml/2006/main">
               <a:ext uri="{FF2B5EF4-FFF2-40B4-BE49-F238E27FC236}">
-                <a16:creationId xmlns:a16="http://schemas.microsoft.com/office/drawing/2014/main" id="{6B4B272F-E066-444A-902E-144832C01737}"/>
+                <a16:creationId xmlns:a16="http://schemas.microsoft.com/office/drawing/2014/main" id="{68314A80-6988-4528-A148-DB558C3A6724}"/>
               </a:ext>
             </a:extLst>
           </p:cNvPr>
@@ -8375,7 +8375,7 @@
           <p:cNvPr id="6" name="monthly-label-1">
             <a:extLst xmlns:a="http://schemas.openxmlformats.org/drawingml/2006/main">
               <a:ext uri="{FF2B5EF4-FFF2-40B4-BE49-F238E27FC236}">
-                <a16:creationId xmlns:a16="http://schemas.microsoft.com/office/drawing/2014/main" id="{1E709EF8-AE61-47FE-8624-19AFE0975365}"/>
+                <a16:creationId xmlns:a16="http://schemas.microsoft.com/office/drawing/2014/main" id="{178A4461-2B7F-4171-A17F-33E77EE1B217}"/>
               </a:ext>
             </a:extLst>
           </p:cNvPr>
@@ -8433,7 +8433,7 @@
           <p:cNvPr id="7" name="monthly-card-2">
             <a:extLst xmlns:a="http://schemas.openxmlformats.org/drawingml/2006/main">
               <a:ext uri="{FF2B5EF4-FFF2-40B4-BE49-F238E27FC236}">
-                <a16:creationId xmlns:a16="http://schemas.microsoft.com/office/drawing/2014/main" id="{FF5E52BC-80AE-4387-AACE-1D0B806B2868}"/>
+                <a16:creationId xmlns:a16="http://schemas.microsoft.com/office/drawing/2014/main" id="{CC33D826-5810-4AE4-A87B-00C8A14F1C2F}"/>
               </a:ext>
             </a:extLst>
           </p:cNvPr>
@@ -8466,7 +8466,7 @@
           <p:cNvPr id="8" name="monthly-stat-2">
             <a:extLst xmlns:a="http://schemas.openxmlformats.org/drawingml/2006/main">
               <a:ext uri="{FF2B5EF4-FFF2-40B4-BE49-F238E27FC236}">
-                <a16:creationId xmlns:a16="http://schemas.microsoft.com/office/drawing/2014/main" id="{A67B3DD1-AFC8-4B1D-874D-9674E41A7870}"/>
+                <a16:creationId xmlns:a16="http://schemas.microsoft.com/office/drawing/2014/main" id="{79702E66-532B-4FBA-A624-02607D00DD69}"/>
               </a:ext>
             </a:extLst>
           </p:cNvPr>
@@ -8524,7 +8524,7 @@
           <p:cNvPr id="9" name="monthly-label-2">
             <a:extLst xmlns:a="http://schemas.openxmlformats.org/drawingml/2006/main">
               <a:ext uri="{FF2B5EF4-FFF2-40B4-BE49-F238E27FC236}">
-                <a16:creationId xmlns:a16="http://schemas.microsoft.com/office/drawing/2014/main" id="{31BB89B1-C7B3-4B5D-A6CD-D5464E6C0F74}"/>
+                <a16:creationId xmlns:a16="http://schemas.microsoft.com/office/drawing/2014/main" id="{6E81CED1-C12B-431B-9792-F5E63D8CC0E5}"/>
               </a:ext>
             </a:extLst>
           </p:cNvPr>
@@ -8582,7 +8582,7 @@
           <p:cNvPr id="10" name="monthly-card-3">
             <a:extLst xmlns:a="http://schemas.openxmlformats.org/drawingml/2006/main">
               <a:ext uri="{FF2B5EF4-FFF2-40B4-BE49-F238E27FC236}">
-                <a16:creationId xmlns:a16="http://schemas.microsoft.com/office/drawing/2014/main" id="{B11B41D1-7933-44C3-ACE2-8E152EAFF991}"/>
+                <a16:creationId xmlns:a16="http://schemas.microsoft.com/office/drawing/2014/main" id="{0505DBAA-1AC4-4DFB-A2E1-E8A3241788AE}"/>
               </a:ext>
             </a:extLst>
           </p:cNvPr>
@@ -8615,7 +8615,7 @@
           <p:cNvPr id="11" name="monthly-stat-3">
             <a:extLst xmlns:a="http://schemas.openxmlformats.org/drawingml/2006/main">
               <a:ext uri="{FF2B5EF4-FFF2-40B4-BE49-F238E27FC236}">
-                <a16:creationId xmlns:a16="http://schemas.microsoft.com/office/drawing/2014/main" id="{9DCA65D9-4F3B-423C-A3CD-DAC3B4532A43}"/>
+                <a16:creationId xmlns:a16="http://schemas.microsoft.com/office/drawing/2014/main" id="{8ED2DB25-8CB1-40AC-8770-2E86B790D26F}"/>
               </a:ext>
             </a:extLst>
           </p:cNvPr>
@@ -8673,7 +8673,7 @@
           <p:cNvPr id="12" name="monthly-label-3">
             <a:extLst xmlns:a="http://schemas.openxmlformats.org/drawingml/2006/main">
               <a:ext uri="{FF2B5EF4-FFF2-40B4-BE49-F238E27FC236}">
-                <a16:creationId xmlns:a16="http://schemas.microsoft.com/office/drawing/2014/main" id="{443BB84D-A73C-4AC1-A85A-EEA7DBC5A2DE}"/>
+                <a16:creationId xmlns:a16="http://schemas.microsoft.com/office/drawing/2014/main" id="{CC203AB2-BB1D-4BEC-97CA-096372727F8E}"/>
               </a:ext>
             </a:extLst>
           </p:cNvPr>
@@ -8731,7 +8731,7 @@
           <p:cNvPr id="13" name="demo-data-footer">
             <a:extLst xmlns:a="http://schemas.openxmlformats.org/drawingml/2006/main">
               <a:ext uri="{FF2B5EF4-FFF2-40B4-BE49-F238E27FC236}">
-                <a16:creationId xmlns:a16="http://schemas.microsoft.com/office/drawing/2014/main" id="{1B9824BB-E7D4-4E4E-BDCF-F1843FDA8338}"/>
+                <a16:creationId xmlns:a16="http://schemas.microsoft.com/office/drawing/2014/main" id="{B4CDB677-C70A-4EC8-B441-FA724A8EAB24}"/>
               </a:ext>
             </a:extLst>
           </p:cNvPr>
@@ -8787,7 +8787,7 @@
     </p:spTree>
     <p:extLst>
       <p:ext uri="{BB962C8B-B14F-4D97-AF65-F5344CB8AC3E}">
-        <p14:creationId xmlns:p14="http://schemas.microsoft.com/office/powerpoint/2010/main" val="1662288528"/>
+        <p14:creationId xmlns:p14="http://schemas.microsoft.com/office/powerpoint/2010/main" val="313045713"/>
       </p:ext>
     </p:extLst>
   </p:cSld>
@@ -8818,7 +8818,7 @@
           <p:cNvPr id="12" name="slide-7-title">
             <a:extLst xmlns:a="http://schemas.openxmlformats.org/drawingml/2006/main">
               <a:ext uri="{FF2B5EF4-FFF2-40B4-BE49-F238E27FC236}">
-                <a16:creationId xmlns:a16="http://schemas.microsoft.com/office/drawing/2014/main" id="{7D362992-BC4E-4E0E-8F3F-2DC29406085A}"/>
+                <a16:creationId xmlns:a16="http://schemas.microsoft.com/office/drawing/2014/main" id="{11903549-BC51-4392-ADF8-E81893543CAC}"/>
               </a:ext>
             </a:extLst>
           </p:cNvPr>
@@ -8876,7 +8876,7 @@
           <p:cNvPr id="2" name="slide-7-number">
             <a:extLst xmlns:a="http://schemas.openxmlformats.org/drawingml/2006/main">
               <a:ext uri="{FF2B5EF4-FFF2-40B4-BE49-F238E27FC236}">
-                <a16:creationId xmlns:a16="http://schemas.microsoft.com/office/drawing/2014/main" id="{7A949E3B-15DF-4FC6-86F7-EB0410F6F2A4}"/>
+                <a16:creationId xmlns:a16="http://schemas.microsoft.com/office/drawing/2014/main" id="{134D8420-0FE4-48BF-9D3A-98A70969DAFF}"/>
               </a:ext>
             </a:extLst>
           </p:cNvPr>
@@ -8941,7 +8941,7 @@
         </p:xfrm>
         <a:graphic xmlns:a="http://schemas.openxmlformats.org/drawingml/2006/main">
           <a:graphicData uri="http://schemas.openxmlformats.org/drawingml/2006/chart">
-            <c:chart xmlns:r="http://schemas.openxmlformats.org/officeDocument/2006/relationships" xmlns:c="http://schemas.openxmlformats.org/drawingml/2006/chart" r:id="Rc11f046723704a56"/>
+            <c:chart xmlns:r="http://schemas.openxmlformats.org/officeDocument/2006/relationships" xmlns:c="http://schemas.openxmlformats.org/drawingml/2006/chart" r:id="R5adabeb07e414dee"/>
           </a:graphicData>
         </a:graphic>
       </p:graphicFrame>
@@ -8950,7 +8950,7 @@
           <p:cNvPr id="4" name="ridge-summary">
             <a:extLst xmlns:a="http://schemas.openxmlformats.org/drawingml/2006/main">
               <a:ext uri="{FF2B5EF4-FFF2-40B4-BE49-F238E27FC236}">
-                <a16:creationId xmlns:a16="http://schemas.microsoft.com/office/drawing/2014/main" id="{41CA661A-65D8-47FF-9B07-285134E3CCDF}"/>
+                <a16:creationId xmlns:a16="http://schemas.microsoft.com/office/drawing/2014/main" id="{5565A3D9-61BE-4E31-87AF-964612147239}"/>
               </a:ext>
             </a:extLst>
           </p:cNvPr>
@@ -9039,7 +9039,7 @@
           <p:cNvPr id="5" name="ridge-r2-panel">
             <a:extLst xmlns:a="http://schemas.openxmlformats.org/drawingml/2006/main">
               <a:ext uri="{FF2B5EF4-FFF2-40B4-BE49-F238E27FC236}">
-                <a16:creationId xmlns:a16="http://schemas.microsoft.com/office/drawing/2014/main" id="{783C1762-BEF4-4882-A16D-3391BA161443}"/>
+                <a16:creationId xmlns:a16="http://schemas.microsoft.com/office/drawing/2014/main" id="{46F738D8-770A-4E3B-B0FB-2ACFDF9F847D}"/>
               </a:ext>
             </a:extLst>
           </p:cNvPr>
@@ -9074,7 +9074,7 @@
           <p:cNvPr id="6" name="ridge-baseline-panel">
             <a:extLst xmlns:a="http://schemas.openxmlformats.org/drawingml/2006/main">
               <a:ext uri="{FF2B5EF4-FFF2-40B4-BE49-F238E27FC236}">
-                <a16:creationId xmlns:a16="http://schemas.microsoft.com/office/drawing/2014/main" id="{718F1747-E88F-4B36-9F47-B34AF2575C48}"/>
+                <a16:creationId xmlns:a16="http://schemas.microsoft.com/office/drawing/2014/main" id="{D9D881E2-B0F7-45AE-888A-1340FF86901A}"/>
               </a:ext>
             </a:extLst>
           </p:cNvPr>
@@ -9107,7 +9107,7 @@
           <p:cNvPr id="7" name="ridge-r2">
             <a:extLst xmlns:a="http://schemas.openxmlformats.org/drawingml/2006/main">
               <a:ext uri="{FF2B5EF4-FFF2-40B4-BE49-F238E27FC236}">
-                <a16:creationId xmlns:a16="http://schemas.microsoft.com/office/drawing/2014/main" id="{A04DA6AD-EB94-4F5D-839A-C9FE45EC75C8}"/>
+                <a16:creationId xmlns:a16="http://schemas.microsoft.com/office/drawing/2014/main" id="{27F9ECD1-FE95-4AD4-AF6E-D99804E9DEDD}"/>
               </a:ext>
             </a:extLst>
           </p:cNvPr>
@@ -9165,7 +9165,7 @@
           <p:cNvPr id="8" name="ridge-r2-label">
             <a:extLst xmlns:a="http://schemas.openxmlformats.org/drawingml/2006/main">
               <a:ext uri="{FF2B5EF4-FFF2-40B4-BE49-F238E27FC236}">
-                <a16:creationId xmlns:a16="http://schemas.microsoft.com/office/drawing/2014/main" id="{BA641DB0-228B-463D-A784-BF6793370A31}"/>
+                <a16:creationId xmlns:a16="http://schemas.microsoft.com/office/drawing/2014/main" id="{A0BE0A6D-C2BD-476C-B87E-4963BDBC2FB1}"/>
               </a:ext>
             </a:extLst>
           </p:cNvPr>
@@ -9223,7 +9223,7 @@
           <p:cNvPr id="9" name="ridge-baseline">
             <a:extLst xmlns:a="http://schemas.openxmlformats.org/drawingml/2006/main">
               <a:ext uri="{FF2B5EF4-FFF2-40B4-BE49-F238E27FC236}">
-                <a16:creationId xmlns:a16="http://schemas.microsoft.com/office/drawing/2014/main" id="{00EB1292-7903-4B30-B094-2D8CF0686945}"/>
+                <a16:creationId xmlns:a16="http://schemas.microsoft.com/office/drawing/2014/main" id="{B03B43BF-3805-458A-89FE-9F33A66BDF1D}"/>
               </a:ext>
             </a:extLst>
           </p:cNvPr>
@@ -9281,7 +9281,7 @@
           <p:cNvPr id="10" name="ridge-baseline-label">
             <a:extLst xmlns:a="http://schemas.openxmlformats.org/drawingml/2006/main">
               <a:ext uri="{FF2B5EF4-FFF2-40B4-BE49-F238E27FC236}">
-                <a16:creationId xmlns:a16="http://schemas.microsoft.com/office/drawing/2014/main" id="{A374EAAE-A4CF-4A2A-9671-153258A9EB9D}"/>
+                <a16:creationId xmlns:a16="http://schemas.microsoft.com/office/drawing/2014/main" id="{E503F4F6-7783-44E2-97E9-CB56173E2DAA}"/>
               </a:ext>
             </a:extLst>
           </p:cNvPr>
@@ -9339,7 +9339,7 @@
           <p:cNvPr id="11" name="demo-data-footer">
             <a:extLst xmlns:a="http://schemas.openxmlformats.org/drawingml/2006/main">
               <a:ext uri="{FF2B5EF4-FFF2-40B4-BE49-F238E27FC236}">
-                <a16:creationId xmlns:a16="http://schemas.microsoft.com/office/drawing/2014/main" id="{23513CE9-910A-4190-AB29-8B1D3FB0C850}"/>
+                <a16:creationId xmlns:a16="http://schemas.microsoft.com/office/drawing/2014/main" id="{57A3C68A-5A6B-432A-83BC-E7C7817B2058}"/>
               </a:ext>
             </a:extLst>
           </p:cNvPr>
@@ -9395,7 +9395,7 @@
     </p:spTree>
     <p:extLst>
       <p:ext uri="{BB962C8B-B14F-4D97-AF65-F5344CB8AC3E}">
-        <p14:creationId xmlns:p14="http://schemas.microsoft.com/office/powerpoint/2010/main" val="1674862549"/>
+        <p14:creationId xmlns:p14="http://schemas.microsoft.com/office/powerpoint/2010/main" val="277091043"/>
       </p:ext>
     </p:extLst>
   </p:cSld>
@@ -9426,7 +9426,7 @@
           <p:cNvPr id="11" name="slide-8-title">
             <a:extLst xmlns:a="http://schemas.openxmlformats.org/drawingml/2006/main">
               <a:ext uri="{FF2B5EF4-FFF2-40B4-BE49-F238E27FC236}">
-                <a16:creationId xmlns:a16="http://schemas.microsoft.com/office/drawing/2014/main" id="{BD8E331F-3747-439A-838C-016A1A22CD26}"/>
+                <a16:creationId xmlns:a16="http://schemas.microsoft.com/office/drawing/2014/main" id="{BAF15C8B-CD72-46CD-B03B-A59223D9474A}"/>
               </a:ext>
             </a:extLst>
           </p:cNvPr>
@@ -9484,7 +9484,7 @@
           <p:cNvPr id="2" name="slide-8-number">
             <a:extLst xmlns:a="http://schemas.openxmlformats.org/drawingml/2006/main">
               <a:ext uri="{FF2B5EF4-FFF2-40B4-BE49-F238E27FC236}">
-                <a16:creationId xmlns:a16="http://schemas.microsoft.com/office/drawing/2014/main" id="{9F311D57-FA26-428D-9674-70BFC3A6167C}"/>
+                <a16:creationId xmlns:a16="http://schemas.microsoft.com/office/drawing/2014/main" id="{2826400E-3347-4DC5-9551-CE595B6F0331}"/>
               </a:ext>
             </a:extLst>
           </p:cNvPr>
@@ -9542,7 +9542,7 @@
           <p:cNvPr id="3" name="ac-chart-frame">
             <a:extLst xmlns:a="http://schemas.openxmlformats.org/drawingml/2006/main">
               <a:ext uri="{FF2B5EF4-FFF2-40B4-BE49-F238E27FC236}">
-                <a16:creationId xmlns:a16="http://schemas.microsoft.com/office/drawing/2014/main" id="{719F226E-2913-40E8-AF62-4AE8246B6DE8}"/>
+                <a16:creationId xmlns:a16="http://schemas.microsoft.com/office/drawing/2014/main" id="{380BAC0E-3C8D-4BFD-9152-0F698868CAAE}"/>
               </a:ext>
             </a:extLst>
           </p:cNvPr>
@@ -9584,7 +9584,7 @@
         </p:xfrm>
         <a:graphic xmlns:a="http://schemas.openxmlformats.org/drawingml/2006/main">
           <a:graphicData uri="http://schemas.openxmlformats.org/drawingml/2006/chart">
-            <c:chart xmlns:r="http://schemas.openxmlformats.org/officeDocument/2006/relationships" xmlns:c="http://schemas.openxmlformats.org/drawingml/2006/chart" r:id="R162ce592a5b247f8"/>
+            <c:chart xmlns:r="http://schemas.openxmlformats.org/officeDocument/2006/relationships" xmlns:c="http://schemas.openxmlformats.org/drawingml/2006/chart" r:id="R81885550242e45e0"/>
           </a:graphicData>
         </a:graphic>
       </p:graphicFrame>
@@ -9593,7 +9593,7 @@
           <p:cNvPr id="5" name="ac-summary">
             <a:extLst xmlns:a="http://schemas.openxmlformats.org/drawingml/2006/main">
               <a:ext uri="{FF2B5EF4-FFF2-40B4-BE49-F238E27FC236}">
-                <a16:creationId xmlns:a16="http://schemas.microsoft.com/office/drawing/2014/main" id="{2B75314B-2834-4C4D-BD14-39E77CA59A93}"/>
+                <a16:creationId xmlns:a16="http://schemas.microsoft.com/office/drawing/2014/main" id="{4CC2CA85-9B5A-4C76-B273-10D44DA6BC2D}"/>
               </a:ext>
             </a:extLst>
           </p:cNvPr>
@@ -9682,7 +9682,7 @@
           <p:cNvPr id="6" name="ac-energy">
             <a:extLst xmlns:a="http://schemas.openxmlformats.org/drawingml/2006/main">
               <a:ext uri="{FF2B5EF4-FFF2-40B4-BE49-F238E27FC236}">
-                <a16:creationId xmlns:a16="http://schemas.microsoft.com/office/drawing/2014/main" id="{EE042C5C-827E-4B7C-BB01-FC7333C6D693}"/>
+                <a16:creationId xmlns:a16="http://schemas.microsoft.com/office/drawing/2014/main" id="{53E0FB75-E94B-470C-AE4E-BECC6DE431B5}"/>
               </a:ext>
             </a:extLst>
           </p:cNvPr>
@@ -9740,7 +9740,7 @@
           <p:cNvPr id="7" name="ac-energy-label">
             <a:extLst xmlns:a="http://schemas.openxmlformats.org/drawingml/2006/main">
               <a:ext uri="{FF2B5EF4-FFF2-40B4-BE49-F238E27FC236}">
-                <a16:creationId xmlns:a16="http://schemas.microsoft.com/office/drawing/2014/main" id="{B7D3C78E-B12D-46AA-BB81-32E8FB54E7D0}"/>
+                <a16:creationId xmlns:a16="http://schemas.microsoft.com/office/drawing/2014/main" id="{A942A406-05A6-446A-9EB7-707CAD35F6EE}"/>
               </a:ext>
             </a:extLst>
           </p:cNvPr>
@@ -9798,7 +9798,7 @@
           <p:cNvPr id="8" name="ac-risk">
             <a:extLst xmlns:a="http://schemas.openxmlformats.org/drawingml/2006/main">
               <a:ext uri="{FF2B5EF4-FFF2-40B4-BE49-F238E27FC236}">
-                <a16:creationId xmlns:a16="http://schemas.microsoft.com/office/drawing/2014/main" id="{0A09627A-A3DB-4720-9966-9A5C0B6F2704}"/>
+                <a16:creationId xmlns:a16="http://schemas.microsoft.com/office/drawing/2014/main" id="{F9779933-5283-48F5-9161-72536660BD9B}"/>
               </a:ext>
             </a:extLst>
           </p:cNvPr>
@@ -9856,7 +9856,7 @@
           <p:cNvPr id="9" name="ac-risk-label">
             <a:extLst xmlns:a="http://schemas.openxmlformats.org/drawingml/2006/main">
               <a:ext uri="{FF2B5EF4-FFF2-40B4-BE49-F238E27FC236}">
-                <a16:creationId xmlns:a16="http://schemas.microsoft.com/office/drawing/2014/main" id="{04604EA0-2847-466E-9B17-4E4ACC05D979}"/>
+                <a16:creationId xmlns:a16="http://schemas.microsoft.com/office/drawing/2014/main" id="{7C196BAE-38B8-4D38-80E3-AD65714936A5}"/>
               </a:ext>
             </a:extLst>
           </p:cNvPr>
@@ -9914,7 +9914,7 @@
           <p:cNvPr id="10" name="demo-data-footer">
             <a:extLst xmlns:a="http://schemas.openxmlformats.org/drawingml/2006/main">
               <a:ext uri="{FF2B5EF4-FFF2-40B4-BE49-F238E27FC236}">
-                <a16:creationId xmlns:a16="http://schemas.microsoft.com/office/drawing/2014/main" id="{0A582E46-3FCD-4878-A7DF-612CB69AAF7E}"/>
+                <a16:creationId xmlns:a16="http://schemas.microsoft.com/office/drawing/2014/main" id="{943B2BB9-5BCF-48B3-ADEA-22CACF032835}"/>
               </a:ext>
             </a:extLst>
           </p:cNvPr>
@@ -9970,7 +9970,7 @@
     </p:spTree>
     <p:extLst>
       <p:ext uri="{BB962C8B-B14F-4D97-AF65-F5344CB8AC3E}">
-        <p14:creationId xmlns:p14="http://schemas.microsoft.com/office/powerpoint/2010/main" val="942599281"/>
+        <p14:creationId xmlns:p14="http://schemas.microsoft.com/office/powerpoint/2010/main" val="804515163"/>
       </p:ext>
     </p:extLst>
   </p:cSld>
@@ -10001,7 +10001,7 @@
           <p:cNvPr id="15" name="slide-9-title">
             <a:extLst xmlns:a="http://schemas.openxmlformats.org/drawingml/2006/main">
               <a:ext uri="{FF2B5EF4-FFF2-40B4-BE49-F238E27FC236}">
-                <a16:creationId xmlns:a16="http://schemas.microsoft.com/office/drawing/2014/main" id="{DD521038-C51A-4E45-AEEF-E74351E480C2}"/>
+                <a16:creationId xmlns:a16="http://schemas.microsoft.com/office/drawing/2014/main" id="{CA417017-E70C-45A8-B24D-92BF4BC54127}"/>
               </a:ext>
             </a:extLst>
           </p:cNvPr>
@@ -10059,7 +10059,7 @@
           <p:cNvPr id="2" name="slide-9-number">
             <a:extLst xmlns:a="http://schemas.openxmlformats.org/drawingml/2006/main">
               <a:ext uri="{FF2B5EF4-FFF2-40B4-BE49-F238E27FC236}">
-                <a16:creationId xmlns:a16="http://schemas.microsoft.com/office/drawing/2014/main" id="{74913487-A4C4-4A6E-BC6D-3D1A7AD2DCDB}"/>
+                <a16:creationId xmlns:a16="http://schemas.microsoft.com/office/drawing/2014/main" id="{A954FD73-4B23-4685-A4B9-C08F252F439F}"/>
               </a:ext>
             </a:extLst>
           </p:cNvPr>
@@ -10139,7 +10139,7 @@
           <p:cNvPr id="4" name="capability-title-1">
             <a:extLst xmlns:a="http://schemas.openxmlformats.org/drawingml/2006/main">
               <a:ext uri="{FF2B5EF4-FFF2-40B4-BE49-F238E27FC236}">
-                <a16:creationId xmlns:a16="http://schemas.microsoft.com/office/drawing/2014/main" id="{BD23668A-5826-41BE-83C3-5EC4D581C99C}"/>
+                <a16:creationId xmlns:a16="http://schemas.microsoft.com/office/drawing/2014/main" id="{86167A77-BA78-4431-B614-5542160FC94C}"/>
               </a:ext>
             </a:extLst>
           </p:cNvPr>
@@ -10197,7 +10197,7 @@
           <p:cNvPr id="5" name="capability-body-1">
             <a:extLst xmlns:a="http://schemas.openxmlformats.org/drawingml/2006/main">
               <a:ext uri="{FF2B5EF4-FFF2-40B4-BE49-F238E27FC236}">
-                <a16:creationId xmlns:a16="http://schemas.microsoft.com/office/drawing/2014/main" id="{ADFEA73B-557B-4246-A667-082B68720C4E}"/>
+                <a16:creationId xmlns:a16="http://schemas.microsoft.com/office/drawing/2014/main" id="{36433385-1B95-4063-AAEB-F9BBA8590E27}"/>
               </a:ext>
             </a:extLst>
           </p:cNvPr>
@@ -10281,7 +10281,7 @@
           <p:cNvPr id="7" name="capability-title-2">
             <a:extLst xmlns:a="http://schemas.openxmlformats.org/drawingml/2006/main">
               <a:ext uri="{FF2B5EF4-FFF2-40B4-BE49-F238E27FC236}">
-                <a16:creationId xmlns:a16="http://schemas.microsoft.com/office/drawing/2014/main" id="{CD2980CF-A4CF-42C6-AAF4-4EBB78A276CC}"/>
+                <a16:creationId xmlns:a16="http://schemas.microsoft.com/office/drawing/2014/main" id="{025D53CD-0C69-482C-8F43-500C94C1F8D8}"/>
               </a:ext>
             </a:extLst>
           </p:cNvPr>
@@ -10339,7 +10339,7 @@
           <p:cNvPr id="8" name="capability-body-2">
             <a:extLst xmlns:a="http://schemas.openxmlformats.org/drawingml/2006/main">
               <a:ext uri="{FF2B5EF4-FFF2-40B4-BE49-F238E27FC236}">
-                <a16:creationId xmlns:a16="http://schemas.microsoft.com/office/drawing/2014/main" id="{FA4ECD0B-81AC-420E-A7FA-EAD1D9B30AB5}"/>
+                <a16:creationId xmlns:a16="http://schemas.microsoft.com/office/drawing/2014/main" id="{7108555F-1A5B-44BF-9B54-0425671151EC}"/>
               </a:ext>
             </a:extLst>
           </p:cNvPr>
@@ -10423,7 +10423,7 @@
           <p:cNvPr id="10" name="capability-title-3">
             <a:extLst xmlns:a="http://schemas.openxmlformats.org/drawingml/2006/main">
               <a:ext uri="{FF2B5EF4-FFF2-40B4-BE49-F238E27FC236}">
-                <a16:creationId xmlns:a16="http://schemas.microsoft.com/office/drawing/2014/main" id="{11BFFAEF-9121-4577-B0C6-6BAA023140E2}"/>
+                <a16:creationId xmlns:a16="http://schemas.microsoft.com/office/drawing/2014/main" id="{844A09E9-5BB4-4F85-9556-3F5247EEBA2B}"/>
               </a:ext>
             </a:extLst>
           </p:cNvPr>
@@ -10481,7 +10481,7 @@
           <p:cNvPr id="11" name="capability-body-3">
             <a:extLst xmlns:a="http://schemas.openxmlformats.org/drawingml/2006/main">
               <a:ext uri="{FF2B5EF4-FFF2-40B4-BE49-F238E27FC236}">
-                <a16:creationId xmlns:a16="http://schemas.microsoft.com/office/drawing/2014/main" id="{9D253B49-C17D-4FA3-9E1C-69D174F6DF7E}"/>
+                <a16:creationId xmlns:a16="http://schemas.microsoft.com/office/drawing/2014/main" id="{95B81F34-5D34-4A82-89BD-DC4EBAB0F34F}"/>
               </a:ext>
             </a:extLst>
           </p:cNvPr>
@@ -10565,7 +10565,7 @@
           <p:cNvPr id="13" name="capability-title-4">
             <a:extLst xmlns:a="http://schemas.openxmlformats.org/drawingml/2006/main">
               <a:ext uri="{FF2B5EF4-FFF2-40B4-BE49-F238E27FC236}">
-                <a16:creationId xmlns:a16="http://schemas.microsoft.com/office/drawing/2014/main" id="{9556B47C-A3A5-49B6-BE3E-F26D9B2B3573}"/>
+                <a16:creationId xmlns:a16="http://schemas.microsoft.com/office/drawing/2014/main" id="{2C10CF80-526B-4EE7-9170-C367720886CF}"/>
               </a:ext>
             </a:extLst>
           </p:cNvPr>
@@ -10623,7 +10623,7 @@
           <p:cNvPr id="14" name="capability-body-4">
             <a:extLst xmlns:a="http://schemas.openxmlformats.org/drawingml/2006/main">
               <a:ext uri="{FF2B5EF4-FFF2-40B4-BE49-F238E27FC236}">
-                <a16:creationId xmlns:a16="http://schemas.microsoft.com/office/drawing/2014/main" id="{DC21A7B6-28D6-4A0A-ADFD-7E0EFB454752}"/>
+                <a16:creationId xmlns:a16="http://schemas.microsoft.com/office/drawing/2014/main" id="{57A69C03-AE85-45DF-8CF4-5F0E85FD5EF3}"/>
               </a:ext>
             </a:extLst>
           </p:cNvPr>
@@ -10683,7 +10683,7 @@
     </p:spTree>
     <p:extLst>
       <p:ext uri="{BB962C8B-B14F-4D97-AF65-F5344CB8AC3E}">
-        <p14:creationId xmlns:p14="http://schemas.microsoft.com/office/powerpoint/2010/main" val="1739912823"/>
+        <p14:creationId xmlns:p14="http://schemas.microsoft.com/office/powerpoint/2010/main" val="789268768"/>
       </p:ext>
     </p:extLst>
   </p:cSld>

--- a/大四專題口試簡報.pptx
+++ b/大四專題口試簡報.pptx
@@ -2,24 +2,24 @@
 <file path=ppt/presentation.xml><?xml version="1.0" encoding="utf-8"?>
 <p:presentation xmlns:p="http://schemas.openxmlformats.org/presentationml/2006/main">
   <p:sldMasterIdLst>
-    <p:sldMasterId xmlns:r="http://schemas.openxmlformats.org/officeDocument/2006/relationships" id="2147483648" r:id="R4b3994b312254d68"/>
+    <p:sldMasterId xmlns:r="http://schemas.openxmlformats.org/officeDocument/2006/relationships" id="2147483648" r:id="R15630749e6e64518"/>
   </p:sldMasterIdLst>
   <p:notesMasterIdLst>
-    <p:notesMasterId xmlns:r="http://schemas.openxmlformats.org/officeDocument/2006/relationships" r:id="R412fb8ba438449b0"/>
+    <p:notesMasterId xmlns:r="http://schemas.openxmlformats.org/officeDocument/2006/relationships" r:id="R645a0b8be0534185"/>
   </p:notesMasterIdLst>
   <p:sldIdLst>
-    <p:sldId xmlns:r="http://schemas.openxmlformats.org/officeDocument/2006/relationships" id="256" r:id="R3cb4d549de3f49e4"/>
-    <p:sldId xmlns:r="http://schemas.openxmlformats.org/officeDocument/2006/relationships" id="257" r:id="R595fde09f79644f1"/>
-    <p:sldId xmlns:r="http://schemas.openxmlformats.org/officeDocument/2006/relationships" id="258" r:id="Rd00e074ee1594d39"/>
-    <p:sldId xmlns:r="http://schemas.openxmlformats.org/officeDocument/2006/relationships" id="259" r:id="R5f807c93fc614ce9"/>
-    <p:sldId xmlns:r="http://schemas.openxmlformats.org/officeDocument/2006/relationships" id="260" r:id="R5830d256f5c148d3"/>
-    <p:sldId xmlns:r="http://schemas.openxmlformats.org/officeDocument/2006/relationships" id="261" r:id="Rbbe919931528431a"/>
-    <p:sldId xmlns:r="http://schemas.openxmlformats.org/officeDocument/2006/relationships" id="262" r:id="R0e796cf06fe14c9f"/>
-    <p:sldId xmlns:r="http://schemas.openxmlformats.org/officeDocument/2006/relationships" id="263" r:id="Rd2a70292dc814117"/>
-    <p:sldId xmlns:r="http://schemas.openxmlformats.org/officeDocument/2006/relationships" id="264" r:id="R3e8d4d1bff554d84"/>
-    <p:sldId xmlns:r="http://schemas.openxmlformats.org/officeDocument/2006/relationships" id="265" r:id="Rcd7c9b079ca5434f"/>
-    <p:sldId xmlns:r="http://schemas.openxmlformats.org/officeDocument/2006/relationships" id="266" r:id="R75e1a9dc3c814265"/>
-    <p:sldId xmlns:r="http://schemas.openxmlformats.org/officeDocument/2006/relationships" id="267" r:id="R9a51c78737874956"/>
+    <p:sldId xmlns:r="http://schemas.openxmlformats.org/officeDocument/2006/relationships" id="256" r:id="Re33347b214a946da"/>
+    <p:sldId xmlns:r="http://schemas.openxmlformats.org/officeDocument/2006/relationships" id="257" r:id="Rb27acf72154e4646"/>
+    <p:sldId xmlns:r="http://schemas.openxmlformats.org/officeDocument/2006/relationships" id="258" r:id="R2be7a0570ed846e3"/>
+    <p:sldId xmlns:r="http://schemas.openxmlformats.org/officeDocument/2006/relationships" id="259" r:id="Re10da2da7d144559"/>
+    <p:sldId xmlns:r="http://schemas.openxmlformats.org/officeDocument/2006/relationships" id="260" r:id="Re6c6403f63cd4716"/>
+    <p:sldId xmlns:r="http://schemas.openxmlformats.org/officeDocument/2006/relationships" id="261" r:id="R1b4f5bd99d6c4a26"/>
+    <p:sldId xmlns:r="http://schemas.openxmlformats.org/officeDocument/2006/relationships" id="262" r:id="R1a920e9220fc44bc"/>
+    <p:sldId xmlns:r="http://schemas.openxmlformats.org/officeDocument/2006/relationships" id="263" r:id="R3dae90ac99404722"/>
+    <p:sldId xmlns:r="http://schemas.openxmlformats.org/officeDocument/2006/relationships" id="264" r:id="R47f8fd282d3f45ad"/>
+    <p:sldId xmlns:r="http://schemas.openxmlformats.org/officeDocument/2006/relationships" id="265" r:id="Ra4dfcbefadd14462"/>
+    <p:sldId xmlns:r="http://schemas.openxmlformats.org/officeDocument/2006/relationships" id="266" r:id="R61c8ffe3ea324d3f"/>
+    <p:sldId xmlns:r="http://schemas.openxmlformats.org/officeDocument/2006/relationships" id="267" r:id="R0f0e80f733134328"/>
   </p:sldIdLst>
   <p:sldSz cx="12192000" cy="6858000"/>
   <p:notesSz cx="6858000" cy="9144000"/>
@@ -1453,7 +1453,7 @@
           <a:lstStyle xmlns:a="http://schemas.openxmlformats.org/drawingml/2006/main"/>
           <a:p xmlns:a="http://schemas.openxmlformats.org/drawingml/2006/main">
             <a:r>
-              <a:t>展示網站時依序點過四個核心輸出即可，不必逐一解釋所有圖表。冷氣頁最後展示設備清冊批次排名。</a:t>
+              <a:t>先指出這三張都是線上部署版本的實際畫面。由左至右說明：首頁先建立用電全貌；預測頁同時揭露樣本外指標與不確定性；冷氣頁把分時耗電與故障風險轉成維護排序。若現場網路不穩，可直接使用本頁完成展示。</a:t>
             </a:r>
           </a:p>
           <a:p xmlns:a="http://schemas.openxmlformats.org/drawingml/2006/main">
@@ -1473,7 +1473,17 @@
           </a:p>
           <a:p xmlns:a="http://schemas.openxmlformats.org/drawingml/2006/main">
             <a:r>
-              <a:t>- outputs/app.py，六個功能頁</a:t>
+              <a:t>- outputs/預覽-首頁.png</a:t>
+            </a:r>
+          </a:p>
+          <a:p xmlns:a="http://schemas.openxmlformats.org/drawingml/2006/main">
+            <a:r>
+              <a:t>- outputs/預覽-用電預測.png</a:t>
+            </a:r>
+          </a:p>
+          <a:p xmlns:a="http://schemas.openxmlformats.org/drawingml/2006/main">
+            <a:r>
+              <a:t>- outputs/預覽-冷氣風險.png</a:t>
             </a:r>
           </a:p>
         </p:txBody>
@@ -1541,7 +1551,7 @@
   </p:cSld>
   <p:clrMap bg1="lt1" tx1="dk1" bg2="lt2" tx2="dk2" accent1="accent1" accent2="accent2" accent3="accent3" accent4="accent4" accent5="accent5" accent6="accent6" hlink="hlink" folHlink="folHlink"/>
   <p:sldLayoutIdLst>
-    <p:sldLayoutId xmlns:r="http://schemas.openxmlformats.org/officeDocument/2006/relationships" id="2147483649" r:id="R64a99e7dc33549e9"/>
+    <p:sldLayoutId xmlns:r="http://schemas.openxmlformats.org/officeDocument/2006/relationships" id="2147483649" r:id="R6833aa1ebdf34670"/>
   </p:sldLayoutIdLst>
   <p:txStyles>
     <p:titleStyle>
@@ -2916,7 +2926,7 @@
           <p:cNvPr id="5" name="cover-eyebrow">
             <a:extLst xmlns:a="http://schemas.openxmlformats.org/drawingml/2006/main">
               <a:ext uri="{FF2B5EF4-FFF2-40B4-BE49-F238E27FC236}">
-                <a16:creationId xmlns:a16="http://schemas.microsoft.com/office/drawing/2014/main" id="{F03ACB04-CBE8-44D9-B29D-EC645056450A}"/>
+                <a16:creationId xmlns:a16="http://schemas.microsoft.com/office/drawing/2014/main" id="{FA024B30-C0B7-4384-81E5-8EC0BBFA7A23}"/>
               </a:ext>
             </a:extLst>
           </p:cNvPr>
@@ -2974,7 +2984,7 @@
           <p:cNvPr id="2" name="cover-year">
             <a:extLst xmlns:a="http://schemas.openxmlformats.org/drawingml/2006/main">
               <a:ext uri="{FF2B5EF4-FFF2-40B4-BE49-F238E27FC236}">
-                <a16:creationId xmlns:a16="http://schemas.microsoft.com/office/drawing/2014/main" id="{018E47E3-B0A5-498E-AC06-43CC4DD51619}"/>
+                <a16:creationId xmlns:a16="http://schemas.microsoft.com/office/drawing/2014/main" id="{1B6E97B0-FE4E-4B37-BF24-1C96B66DC592}"/>
               </a:ext>
             </a:extLst>
           </p:cNvPr>
@@ -3032,7 +3042,7 @@
           <p:cNvPr id="3" name="cover-title">
             <a:extLst xmlns:a="http://schemas.openxmlformats.org/drawingml/2006/main">
               <a:ext uri="{FF2B5EF4-FFF2-40B4-BE49-F238E27FC236}">
-                <a16:creationId xmlns:a16="http://schemas.microsoft.com/office/drawing/2014/main" id="{BD0CD481-A7F3-4ECE-9647-93D6919E3242}"/>
+                <a16:creationId xmlns:a16="http://schemas.microsoft.com/office/drawing/2014/main" id="{D056D88F-59AD-48AC-896E-6C957D101790}"/>
               </a:ext>
             </a:extLst>
           </p:cNvPr>
@@ -3113,7 +3123,7 @@
           <p:cNvPr id="4" name="cover-meta">
             <a:extLst xmlns:a="http://schemas.openxmlformats.org/drawingml/2006/main">
               <a:ext uri="{FF2B5EF4-FFF2-40B4-BE49-F238E27FC236}">
-                <a16:creationId xmlns:a16="http://schemas.microsoft.com/office/drawing/2014/main" id="{C78BA342-D793-4F9C-80B9-46E230956B62}"/>
+                <a16:creationId xmlns:a16="http://schemas.microsoft.com/office/drawing/2014/main" id="{33FEBEF5-9C6F-4618-9107-2D1C9C07CEC0}"/>
               </a:ext>
             </a:extLst>
           </p:cNvPr>
@@ -3169,7 +3179,7 @@
     </p:spTree>
     <p:extLst>
       <p:ext uri="{BB962C8B-B14F-4D97-AF65-F5344CB8AC3E}">
-        <p14:creationId xmlns:p14="http://schemas.microsoft.com/office/powerpoint/2010/main" val="1767639932"/>
+        <p14:creationId xmlns:p14="http://schemas.microsoft.com/office/powerpoint/2010/main" val="414091921"/>
       </p:ext>
     </p:extLst>
   </p:cSld>
@@ -3200,7 +3210,7 @@
           <p:cNvPr id="9" name="slide-10-title">
             <a:extLst xmlns:a="http://schemas.openxmlformats.org/drawingml/2006/main">
               <a:ext uri="{FF2B5EF4-FFF2-40B4-BE49-F238E27FC236}">
-                <a16:creationId xmlns:a16="http://schemas.microsoft.com/office/drawing/2014/main" id="{202C08DB-FA06-471D-AB46-61F6B9F4B4BF}"/>
+                <a16:creationId xmlns:a16="http://schemas.microsoft.com/office/drawing/2014/main" id="{B0D8A772-1D0B-461C-BDD6-659251FD0AD4}"/>
               </a:ext>
             </a:extLst>
           </p:cNvPr>
@@ -3258,7 +3268,7 @@
           <p:cNvPr id="2" name="slide-10-number">
             <a:extLst xmlns:a="http://schemas.openxmlformats.org/drawingml/2006/main">
               <a:ext uri="{FF2B5EF4-FFF2-40B4-BE49-F238E27FC236}">
-                <a16:creationId xmlns:a16="http://schemas.microsoft.com/office/drawing/2014/main" id="{CBECD501-2003-45CE-92EC-21ED809A30F5}"/>
+                <a16:creationId xmlns:a16="http://schemas.microsoft.com/office/drawing/2014/main" id="{3255DBBF-4488-4FD4-B8F5-2F5082A87E73}"/>
               </a:ext>
             </a:extLst>
           </p:cNvPr>
@@ -3338,7 +3348,7 @@
           <p:cNvPr id="4" name="integrity-left-title">
             <a:extLst xmlns:a="http://schemas.openxmlformats.org/drawingml/2006/main">
               <a:ext uri="{FF2B5EF4-FFF2-40B4-BE49-F238E27FC236}">
-                <a16:creationId xmlns:a16="http://schemas.microsoft.com/office/drawing/2014/main" id="{CA4F5558-D000-46E9-9CA4-FDC77B49858D}"/>
+                <a16:creationId xmlns:a16="http://schemas.microsoft.com/office/drawing/2014/main" id="{92EC2CF2-1627-4F55-AC0E-F8708EE074A9}"/>
               </a:ext>
             </a:extLst>
           </p:cNvPr>
@@ -3396,7 +3406,7 @@
           <p:cNvPr id="5" name="integrity-left-bullets">
             <a:extLst xmlns:a="http://schemas.openxmlformats.org/drawingml/2006/main">
               <a:ext uri="{FF2B5EF4-FFF2-40B4-BE49-F238E27FC236}">
-                <a16:creationId xmlns:a16="http://schemas.microsoft.com/office/drawing/2014/main" id="{D276C8B3-DEE1-45B3-8147-F448815593B1}"/>
+                <a16:creationId xmlns:a16="http://schemas.microsoft.com/office/drawing/2014/main" id="{B16E4D6C-7B8F-4DED-83A2-A55AF4958BD1}"/>
               </a:ext>
             </a:extLst>
           </p:cNvPr>
@@ -3539,7 +3549,7 @@
           <p:cNvPr id="6" name="integrity-right-title">
             <a:extLst xmlns:a="http://schemas.openxmlformats.org/drawingml/2006/main">
               <a:ext uri="{FF2B5EF4-FFF2-40B4-BE49-F238E27FC236}">
-                <a16:creationId xmlns:a16="http://schemas.microsoft.com/office/drawing/2014/main" id="{B9820A56-6508-4D78-8CFA-D163FE87D0C5}"/>
+                <a16:creationId xmlns:a16="http://schemas.microsoft.com/office/drawing/2014/main" id="{FBE72EFB-A47A-4C74-9BDC-337D893D7C3D}"/>
               </a:ext>
             </a:extLst>
           </p:cNvPr>
@@ -3597,7 +3607,7 @@
           <p:cNvPr id="7" name="integrity-right-bullets">
             <a:extLst xmlns:a="http://schemas.openxmlformats.org/drawingml/2006/main">
               <a:ext uri="{FF2B5EF4-FFF2-40B4-BE49-F238E27FC236}">
-                <a16:creationId xmlns:a16="http://schemas.microsoft.com/office/drawing/2014/main" id="{E4EA4D1A-FED7-4D12-B75C-68CB47FCCFC7}"/>
+                <a16:creationId xmlns:a16="http://schemas.microsoft.com/office/drawing/2014/main" id="{49338B33-6D0B-4238-8DF4-0C707994E977}"/>
               </a:ext>
             </a:extLst>
           </p:cNvPr>
@@ -3740,7 +3750,7 @@
           <p:cNvPr id="8" name="integrity-bottom">
             <a:extLst xmlns:a="http://schemas.openxmlformats.org/drawingml/2006/main">
               <a:ext uri="{FF2B5EF4-FFF2-40B4-BE49-F238E27FC236}">
-                <a16:creationId xmlns:a16="http://schemas.microsoft.com/office/drawing/2014/main" id="{DFAA6CA4-887F-433B-A59F-07A6B2F6C90E}"/>
+                <a16:creationId xmlns:a16="http://schemas.microsoft.com/office/drawing/2014/main" id="{9EF1E829-1DC6-4200-AFF5-8CD0AA7CD430}"/>
               </a:ext>
             </a:extLst>
           </p:cNvPr>
@@ -3796,7 +3806,7 @@
     </p:spTree>
     <p:extLst>
       <p:ext uri="{BB962C8B-B14F-4D97-AF65-F5344CB8AC3E}">
-        <p14:creationId xmlns:p14="http://schemas.microsoft.com/office/powerpoint/2010/main" val="664308558"/>
+        <p14:creationId xmlns:p14="http://schemas.microsoft.com/office/powerpoint/2010/main" val="798461386"/>
       </p:ext>
     </p:extLst>
   </p:cSld>
@@ -3827,7 +3837,7 @@
           <p:cNvPr id="16" name="slide-11-title">
             <a:extLst xmlns:a="http://schemas.openxmlformats.org/drawingml/2006/main">
               <a:ext uri="{FF2B5EF4-FFF2-40B4-BE49-F238E27FC236}">
-                <a16:creationId xmlns:a16="http://schemas.microsoft.com/office/drawing/2014/main" id="{DF07B1D5-A253-44D5-BA4E-EBB5BF90AF64}"/>
+                <a16:creationId xmlns:a16="http://schemas.microsoft.com/office/drawing/2014/main" id="{C5B02410-29F3-4F0A-A490-A30AD3761F01}"/>
               </a:ext>
             </a:extLst>
           </p:cNvPr>
@@ -3885,7 +3895,7 @@
           <p:cNvPr id="2" name="slide-11-number">
             <a:extLst xmlns:a="http://schemas.openxmlformats.org/drawingml/2006/main">
               <a:ext uri="{FF2B5EF4-FFF2-40B4-BE49-F238E27FC236}">
-                <a16:creationId xmlns:a16="http://schemas.microsoft.com/office/drawing/2014/main" id="{535C4BB5-0337-4CD7-97D8-67DE405DB96C}"/>
+                <a16:creationId xmlns:a16="http://schemas.microsoft.com/office/drawing/2014/main" id="{F05CEA8D-3ADD-42FF-870C-5C61A54D83C4}"/>
               </a:ext>
             </a:extLst>
           </p:cNvPr>
@@ -3965,7 +3975,7 @@
           <p:cNvPr id="4" name="roadmap-dot-1">
             <a:extLst xmlns:a="http://schemas.openxmlformats.org/drawingml/2006/main">
               <a:ext uri="{FF2B5EF4-FFF2-40B4-BE49-F238E27FC236}">
-                <a16:creationId xmlns:a16="http://schemas.microsoft.com/office/drawing/2014/main" id="{0B8324BE-F9CF-4A3C-A239-E954DA002917}"/>
+                <a16:creationId xmlns:a16="http://schemas.microsoft.com/office/drawing/2014/main" id="{3D00DD53-DD4B-4699-B53F-033186955DE2}"/>
               </a:ext>
             </a:extLst>
           </p:cNvPr>
@@ -3996,7 +4006,7 @@
           <p:cNvPr id="5" name="roadmap-label-1">
             <a:extLst xmlns:a="http://schemas.openxmlformats.org/drawingml/2006/main">
               <a:ext uri="{FF2B5EF4-FFF2-40B4-BE49-F238E27FC236}">
-                <a16:creationId xmlns:a16="http://schemas.microsoft.com/office/drawing/2014/main" id="{AEF361F4-833E-472C-B66C-C1B35089024F}"/>
+                <a16:creationId xmlns:a16="http://schemas.microsoft.com/office/drawing/2014/main" id="{53E8B43A-4808-40C1-B340-38A96015BC62}"/>
               </a:ext>
             </a:extLst>
           </p:cNvPr>
@@ -4054,7 +4064,7 @@
           <p:cNvPr id="6" name="roadmap-title-1">
             <a:extLst xmlns:a="http://schemas.openxmlformats.org/drawingml/2006/main">
               <a:ext uri="{FF2B5EF4-FFF2-40B4-BE49-F238E27FC236}">
-                <a16:creationId xmlns:a16="http://schemas.microsoft.com/office/drawing/2014/main" id="{3475D461-0DA1-432C-B5DC-2E0F8BEF06EE}"/>
+                <a16:creationId xmlns:a16="http://schemas.microsoft.com/office/drawing/2014/main" id="{2A4F206A-FBE0-4D81-9ED1-4C60DE35B25E}"/>
               </a:ext>
             </a:extLst>
           </p:cNvPr>
@@ -4112,7 +4122,7 @@
           <p:cNvPr id="7" name="roadmap-body-1">
             <a:extLst xmlns:a="http://schemas.openxmlformats.org/drawingml/2006/main">
               <a:ext uri="{FF2B5EF4-FFF2-40B4-BE49-F238E27FC236}">
-                <a16:creationId xmlns:a16="http://schemas.microsoft.com/office/drawing/2014/main" id="{771A53F7-7F8C-4CD5-92F2-0D142B134453}"/>
+                <a16:creationId xmlns:a16="http://schemas.microsoft.com/office/drawing/2014/main" id="{EEEEC0B8-0284-44FF-82E4-3315E7C0E3EB}"/>
               </a:ext>
             </a:extLst>
           </p:cNvPr>
@@ -4174,7 +4184,7 @@
           <p:cNvPr id="8" name="roadmap-dot-2">
             <a:extLst xmlns:a="http://schemas.openxmlformats.org/drawingml/2006/main">
               <a:ext uri="{FF2B5EF4-FFF2-40B4-BE49-F238E27FC236}">
-                <a16:creationId xmlns:a16="http://schemas.microsoft.com/office/drawing/2014/main" id="{42427654-C29C-4FBA-879E-843732EF2AD5}"/>
+                <a16:creationId xmlns:a16="http://schemas.microsoft.com/office/drawing/2014/main" id="{DDC46930-FACB-45F1-BC94-AA23BC842AE8}"/>
               </a:ext>
             </a:extLst>
           </p:cNvPr>
@@ -4205,7 +4215,7 @@
           <p:cNvPr id="9" name="roadmap-label-2">
             <a:extLst xmlns:a="http://schemas.openxmlformats.org/drawingml/2006/main">
               <a:ext uri="{FF2B5EF4-FFF2-40B4-BE49-F238E27FC236}">
-                <a16:creationId xmlns:a16="http://schemas.microsoft.com/office/drawing/2014/main" id="{289E9615-A281-4BF8-A5D5-4BB1A416AF3A}"/>
+                <a16:creationId xmlns:a16="http://schemas.microsoft.com/office/drawing/2014/main" id="{A95345D8-CCE0-457B-96F9-DF75277E5E29}"/>
               </a:ext>
             </a:extLst>
           </p:cNvPr>
@@ -4263,7 +4273,7 @@
           <p:cNvPr id="10" name="roadmap-title-2">
             <a:extLst xmlns:a="http://schemas.openxmlformats.org/drawingml/2006/main">
               <a:ext uri="{FF2B5EF4-FFF2-40B4-BE49-F238E27FC236}">
-                <a16:creationId xmlns:a16="http://schemas.microsoft.com/office/drawing/2014/main" id="{6B7C14B7-0514-4EBA-8BEF-F55E28ECE386}"/>
+                <a16:creationId xmlns:a16="http://schemas.microsoft.com/office/drawing/2014/main" id="{F878C487-851A-4F8E-897C-1FADDC2FAEB2}"/>
               </a:ext>
             </a:extLst>
           </p:cNvPr>
@@ -4321,7 +4331,7 @@
           <p:cNvPr id="11" name="roadmap-body-2">
             <a:extLst xmlns:a="http://schemas.openxmlformats.org/drawingml/2006/main">
               <a:ext uri="{FF2B5EF4-FFF2-40B4-BE49-F238E27FC236}">
-                <a16:creationId xmlns:a16="http://schemas.microsoft.com/office/drawing/2014/main" id="{F6E6D40D-F1E4-48E5-98E0-BBC6B633C4D1}"/>
+                <a16:creationId xmlns:a16="http://schemas.microsoft.com/office/drawing/2014/main" id="{56360361-E358-4C56-A528-1DE2D2DA6D2B}"/>
               </a:ext>
             </a:extLst>
           </p:cNvPr>
@@ -4383,7 +4393,7 @@
           <p:cNvPr id="12" name="roadmap-dot-3">
             <a:extLst xmlns:a="http://schemas.openxmlformats.org/drawingml/2006/main">
               <a:ext uri="{FF2B5EF4-FFF2-40B4-BE49-F238E27FC236}">
-                <a16:creationId xmlns:a16="http://schemas.microsoft.com/office/drawing/2014/main" id="{BD3D5BF5-5822-4759-9EC0-662D55A996AB}"/>
+                <a16:creationId xmlns:a16="http://schemas.microsoft.com/office/drawing/2014/main" id="{DCD7E2ED-196D-4DD0-87DA-BD69DF95D23D}"/>
               </a:ext>
             </a:extLst>
           </p:cNvPr>
@@ -4414,7 +4424,7 @@
           <p:cNvPr id="13" name="roadmap-label-3">
             <a:extLst xmlns:a="http://schemas.openxmlformats.org/drawingml/2006/main">
               <a:ext uri="{FF2B5EF4-FFF2-40B4-BE49-F238E27FC236}">
-                <a16:creationId xmlns:a16="http://schemas.microsoft.com/office/drawing/2014/main" id="{5B832E04-7872-4416-96E5-276D4E6A17DD}"/>
+                <a16:creationId xmlns:a16="http://schemas.microsoft.com/office/drawing/2014/main" id="{AD754F04-635E-481A-9755-210AE51BCACE}"/>
               </a:ext>
             </a:extLst>
           </p:cNvPr>
@@ -4472,7 +4482,7 @@
           <p:cNvPr id="14" name="roadmap-title-3">
             <a:extLst xmlns:a="http://schemas.openxmlformats.org/drawingml/2006/main">
               <a:ext uri="{FF2B5EF4-FFF2-40B4-BE49-F238E27FC236}">
-                <a16:creationId xmlns:a16="http://schemas.microsoft.com/office/drawing/2014/main" id="{894473CD-3E9E-453D-9E4F-B3F577459F40}"/>
+                <a16:creationId xmlns:a16="http://schemas.microsoft.com/office/drawing/2014/main" id="{07918485-EC3B-4D86-A153-3C5FE5EC9EDF}"/>
               </a:ext>
             </a:extLst>
           </p:cNvPr>
@@ -4530,7 +4540,7 @@
           <p:cNvPr id="15" name="roadmap-body-3">
             <a:extLst xmlns:a="http://schemas.openxmlformats.org/drawingml/2006/main">
               <a:ext uri="{FF2B5EF4-FFF2-40B4-BE49-F238E27FC236}">
-                <a16:creationId xmlns:a16="http://schemas.microsoft.com/office/drawing/2014/main" id="{1BA5B1FD-FE6D-4F4F-96A1-5292CDE83EBA}"/>
+                <a16:creationId xmlns:a16="http://schemas.microsoft.com/office/drawing/2014/main" id="{32465A92-2BDA-467A-ACE7-0C0AE0CE0BAC}"/>
               </a:ext>
             </a:extLst>
           </p:cNvPr>
@@ -4590,7 +4600,7 @@
     </p:spTree>
     <p:extLst>
       <p:ext uri="{BB962C8B-B14F-4D97-AF65-F5344CB8AC3E}">
-        <p14:creationId xmlns:p14="http://schemas.microsoft.com/office/powerpoint/2010/main" val="1515133605"/>
+        <p14:creationId xmlns:p14="http://schemas.microsoft.com/office/powerpoint/2010/main" val="776103247"/>
       </p:ext>
     </p:extLst>
   </p:cSld>
@@ -4621,7 +4631,7 @@
           <p:cNvPr id="5" name="conclusion-eyebrow">
             <a:extLst xmlns:a="http://schemas.openxmlformats.org/drawingml/2006/main">
               <a:ext uri="{FF2B5EF4-FFF2-40B4-BE49-F238E27FC236}">
-                <a16:creationId xmlns:a16="http://schemas.microsoft.com/office/drawing/2014/main" id="{4AC0083D-B2E1-425A-9EE1-81226B73BED2}"/>
+                <a16:creationId xmlns:a16="http://schemas.microsoft.com/office/drawing/2014/main" id="{2061E90E-7BAE-4C17-9FE2-7D72F55FFE26}"/>
               </a:ext>
             </a:extLst>
           </p:cNvPr>
@@ -4679,7 +4689,7 @@
           <p:cNvPr id="2" name="conclusion-message">
             <a:extLst xmlns:a="http://schemas.openxmlformats.org/drawingml/2006/main">
               <a:ext uri="{FF2B5EF4-FFF2-40B4-BE49-F238E27FC236}">
-                <a16:creationId xmlns:a16="http://schemas.microsoft.com/office/drawing/2014/main" id="{D7FB6C27-6F57-4345-B51B-ADBFDFACE3A5}"/>
+                <a16:creationId xmlns:a16="http://schemas.microsoft.com/office/drawing/2014/main" id="{D6DF6A53-B53C-47DC-8992-420C800EFE5E}"/>
               </a:ext>
             </a:extLst>
           </p:cNvPr>
@@ -4768,7 +4778,7 @@
           <p:cNvPr id="3" name="conclusion-points">
             <a:extLst xmlns:a="http://schemas.openxmlformats.org/drawingml/2006/main">
               <a:ext uri="{FF2B5EF4-FFF2-40B4-BE49-F238E27FC236}">
-                <a16:creationId xmlns:a16="http://schemas.microsoft.com/office/drawing/2014/main" id="{210655AA-5992-4F8E-A601-1213FFEEF65B}"/>
+                <a16:creationId xmlns:a16="http://schemas.microsoft.com/office/drawing/2014/main" id="{3A661D2B-370D-4A53-AB53-793A0AA7370A}"/>
               </a:ext>
             </a:extLst>
           </p:cNvPr>
@@ -4826,7 +4836,7 @@
           <p:cNvPr id="4" name="conclusion-qa">
             <a:extLst xmlns:a="http://schemas.openxmlformats.org/drawingml/2006/main">
               <a:ext uri="{FF2B5EF4-FFF2-40B4-BE49-F238E27FC236}">
-                <a16:creationId xmlns:a16="http://schemas.microsoft.com/office/drawing/2014/main" id="{2B230C0E-D706-48CC-AD9D-A4CF26587B57}"/>
+                <a16:creationId xmlns:a16="http://schemas.microsoft.com/office/drawing/2014/main" id="{E8BAB122-2B4A-484C-93DD-F8FD833245D7}"/>
               </a:ext>
             </a:extLst>
           </p:cNvPr>
@@ -4882,7 +4892,7 @@
     </p:spTree>
     <p:extLst>
       <p:ext uri="{BB962C8B-B14F-4D97-AF65-F5344CB8AC3E}">
-        <p14:creationId xmlns:p14="http://schemas.microsoft.com/office/powerpoint/2010/main" val="2146359811"/>
+        <p14:creationId xmlns:p14="http://schemas.microsoft.com/office/powerpoint/2010/main" val="88460809"/>
       </p:ext>
     </p:extLst>
   </p:cSld>
@@ -4913,7 +4923,7 @@
           <p:cNvPr id="10" name="slide-2-title">
             <a:extLst xmlns:a="http://schemas.openxmlformats.org/drawingml/2006/main">
               <a:ext uri="{FF2B5EF4-FFF2-40B4-BE49-F238E27FC236}">
-                <a16:creationId xmlns:a16="http://schemas.microsoft.com/office/drawing/2014/main" id="{1306DEEC-13BF-4B9C-80F4-91476B06F246}"/>
+                <a16:creationId xmlns:a16="http://schemas.microsoft.com/office/drawing/2014/main" id="{583A3E48-1971-4A4D-A830-1D4E67F9152F}"/>
               </a:ext>
             </a:extLst>
           </p:cNvPr>
@@ -4971,7 +4981,7 @@
           <p:cNvPr id="2" name="slide-2-number">
             <a:extLst xmlns:a="http://schemas.openxmlformats.org/drawingml/2006/main">
               <a:ext uri="{FF2B5EF4-FFF2-40B4-BE49-F238E27FC236}">
-                <a16:creationId xmlns:a16="http://schemas.microsoft.com/office/drawing/2014/main" id="{83FBCB24-7380-4086-BF75-8B45DAFAFAFE}"/>
+                <a16:creationId xmlns:a16="http://schemas.microsoft.com/office/drawing/2014/main" id="{E807193F-8155-4A18-9B75-D68F9E302313}"/>
               </a:ext>
             </a:extLst>
           </p:cNvPr>
@@ -5029,7 +5039,7 @@
           <p:cNvPr id="3" name="problem-lead">
             <a:extLst xmlns:a="http://schemas.openxmlformats.org/drawingml/2006/main">
               <a:ext uri="{FF2B5EF4-FFF2-40B4-BE49-F238E27FC236}">
-                <a16:creationId xmlns:a16="http://schemas.microsoft.com/office/drawing/2014/main" id="{85A4E4D4-780D-4131-ACC7-6B529843CF52}"/>
+                <a16:creationId xmlns:a16="http://schemas.microsoft.com/office/drawing/2014/main" id="{ADEE26ED-2AB1-49BD-8B63-B24F3CFF1944}"/>
               </a:ext>
             </a:extLst>
           </p:cNvPr>
@@ -5091,7 +5101,7 @@
           <p:cNvPr id="4" name="problem-panel">
             <a:extLst xmlns:a="http://schemas.openxmlformats.org/drawingml/2006/main">
               <a:ext uri="{FF2B5EF4-FFF2-40B4-BE49-F238E27FC236}">
-                <a16:creationId xmlns:a16="http://schemas.microsoft.com/office/drawing/2014/main" id="{CCF37A4E-749E-4815-87B7-5B83F409966E}"/>
+                <a16:creationId xmlns:a16="http://schemas.microsoft.com/office/drawing/2014/main" id="{67FC50FC-264C-4F5B-8C9B-8F36D5FDB5C7}"/>
               </a:ext>
             </a:extLst>
           </p:cNvPr>
@@ -5124,7 +5134,7 @@
           <p:cNvPr id="5" name="solution-panel">
             <a:extLst xmlns:a="http://schemas.openxmlformats.org/drawingml/2006/main">
               <a:ext uri="{FF2B5EF4-FFF2-40B4-BE49-F238E27FC236}">
-                <a16:creationId xmlns:a16="http://schemas.microsoft.com/office/drawing/2014/main" id="{78DCDAC4-2CA8-4B2C-BF09-5103BC55E2F9}"/>
+                <a16:creationId xmlns:a16="http://schemas.microsoft.com/office/drawing/2014/main" id="{DAF2B3F9-3754-437F-893A-D97273073878}"/>
               </a:ext>
             </a:extLst>
           </p:cNvPr>
@@ -5159,7 +5169,7 @@
           <p:cNvPr id="6" name="problem-panel-title">
             <a:extLst xmlns:a="http://schemas.openxmlformats.org/drawingml/2006/main">
               <a:ext uri="{FF2B5EF4-FFF2-40B4-BE49-F238E27FC236}">
-                <a16:creationId xmlns:a16="http://schemas.microsoft.com/office/drawing/2014/main" id="{6B644D45-88EE-466F-A807-BDEB7440AEDF}"/>
+                <a16:creationId xmlns:a16="http://schemas.microsoft.com/office/drawing/2014/main" id="{84153141-B5DC-4C1C-825E-FB20F9E7A3B2}"/>
               </a:ext>
             </a:extLst>
           </p:cNvPr>
@@ -5217,7 +5227,7 @@
           <p:cNvPr id="7" name="solution-panel-title">
             <a:extLst xmlns:a="http://schemas.openxmlformats.org/drawingml/2006/main">
               <a:ext uri="{FF2B5EF4-FFF2-40B4-BE49-F238E27FC236}">
-                <a16:creationId xmlns:a16="http://schemas.microsoft.com/office/drawing/2014/main" id="{C999F552-8B60-4242-BFE8-936DFA4491B2}"/>
+                <a16:creationId xmlns:a16="http://schemas.microsoft.com/office/drawing/2014/main" id="{EC75C4BE-622C-4808-AB16-6E489145D822}"/>
               </a:ext>
             </a:extLst>
           </p:cNvPr>
@@ -5275,7 +5285,7 @@
           <p:cNvPr id="8" name="problem-details">
             <a:extLst xmlns:a="http://schemas.openxmlformats.org/drawingml/2006/main">
               <a:ext uri="{FF2B5EF4-FFF2-40B4-BE49-F238E27FC236}">
-                <a16:creationId xmlns:a16="http://schemas.microsoft.com/office/drawing/2014/main" id="{7DF98D3B-B85E-486B-855A-A85E0BCD517E}"/>
+                <a16:creationId xmlns:a16="http://schemas.microsoft.com/office/drawing/2014/main" id="{B7A2C8C3-8E27-4016-A3E1-76D35BE95597}"/>
               </a:ext>
             </a:extLst>
           </p:cNvPr>
@@ -5391,7 +5401,7 @@
           <p:cNvPr id="9" name="solution-details">
             <a:extLst xmlns:a="http://schemas.openxmlformats.org/drawingml/2006/main">
               <a:ext uri="{FF2B5EF4-FFF2-40B4-BE49-F238E27FC236}">
-                <a16:creationId xmlns:a16="http://schemas.microsoft.com/office/drawing/2014/main" id="{C9FACC1D-73B3-4088-A4F9-5DB307C8370F}"/>
+                <a16:creationId xmlns:a16="http://schemas.microsoft.com/office/drawing/2014/main" id="{E3893B0C-86E9-484C-8945-B8333125A7A4}"/>
               </a:ext>
             </a:extLst>
           </p:cNvPr>
@@ -5505,7 +5515,7 @@
     </p:spTree>
     <p:extLst>
       <p:ext uri="{BB962C8B-B14F-4D97-AF65-F5344CB8AC3E}">
-        <p14:creationId xmlns:p14="http://schemas.microsoft.com/office/powerpoint/2010/main" val="1753244779"/>
+        <p14:creationId xmlns:p14="http://schemas.microsoft.com/office/powerpoint/2010/main" val="1570646650"/>
       </p:ext>
     </p:extLst>
   </p:cSld>
@@ -5536,7 +5546,7 @@
           <p:cNvPr id="12" name="slide-3-title">
             <a:extLst xmlns:a="http://schemas.openxmlformats.org/drawingml/2006/main">
               <a:ext uri="{FF2B5EF4-FFF2-40B4-BE49-F238E27FC236}">
-                <a16:creationId xmlns:a16="http://schemas.microsoft.com/office/drawing/2014/main" id="{FAEFE6B4-F103-41CD-A042-DAC249991346}"/>
+                <a16:creationId xmlns:a16="http://schemas.microsoft.com/office/drawing/2014/main" id="{FDA7054A-8F7B-46AC-891B-3619771DD931}"/>
               </a:ext>
             </a:extLst>
           </p:cNvPr>
@@ -5594,7 +5604,7 @@
           <p:cNvPr id="2" name="slide-3-number">
             <a:extLst xmlns:a="http://schemas.openxmlformats.org/drawingml/2006/main">
               <a:ext uri="{FF2B5EF4-FFF2-40B4-BE49-F238E27FC236}">
-                <a16:creationId xmlns:a16="http://schemas.microsoft.com/office/drawing/2014/main" id="{C28AF058-0BFD-4E43-8BD2-A9417924A8F2}"/>
+                <a16:creationId xmlns:a16="http://schemas.microsoft.com/office/drawing/2014/main" id="{22D6684B-6686-4E50-955B-F98E9A9E6DB8}"/>
               </a:ext>
             </a:extLst>
           </p:cNvPr>
@@ -5652,7 +5662,7 @@
           <p:cNvPr id="3" name="question-number-1">
             <a:extLst xmlns:a="http://schemas.openxmlformats.org/drawingml/2006/main">
               <a:ext uri="{FF2B5EF4-FFF2-40B4-BE49-F238E27FC236}">
-                <a16:creationId xmlns:a16="http://schemas.microsoft.com/office/drawing/2014/main" id="{374F923A-1131-4160-BD9A-18011BB2A84E}"/>
+                <a16:creationId xmlns:a16="http://schemas.microsoft.com/office/drawing/2014/main" id="{8A5CD859-71F9-49B4-A669-E2745BF9D42D}"/>
               </a:ext>
             </a:extLst>
           </p:cNvPr>
@@ -5710,7 +5720,7 @@
           <p:cNvPr id="4" name="question-title-1">
             <a:extLst xmlns:a="http://schemas.openxmlformats.org/drawingml/2006/main">
               <a:ext uri="{FF2B5EF4-FFF2-40B4-BE49-F238E27FC236}">
-                <a16:creationId xmlns:a16="http://schemas.microsoft.com/office/drawing/2014/main" id="{89055A3A-6014-4938-883F-40287B2B9947}"/>
+                <a16:creationId xmlns:a16="http://schemas.microsoft.com/office/drawing/2014/main" id="{76E4544D-FC40-4E73-9D11-0028638D1D1A}"/>
               </a:ext>
             </a:extLst>
           </p:cNvPr>
@@ -5768,7 +5778,7 @@
           <p:cNvPr id="5" name="question-body-1">
             <a:extLst xmlns:a="http://schemas.openxmlformats.org/drawingml/2006/main">
               <a:ext uri="{FF2B5EF4-FFF2-40B4-BE49-F238E27FC236}">
-                <a16:creationId xmlns:a16="http://schemas.microsoft.com/office/drawing/2014/main" id="{7E8A94B9-8673-4DD9-91EF-2B3633A91139}"/>
+                <a16:creationId xmlns:a16="http://schemas.microsoft.com/office/drawing/2014/main" id="{A22F486A-28B0-460A-AB38-556FD56A31D7}"/>
               </a:ext>
             </a:extLst>
           </p:cNvPr>
@@ -5830,7 +5840,7 @@
           <p:cNvPr id="6" name="question-number-2">
             <a:extLst xmlns:a="http://schemas.openxmlformats.org/drawingml/2006/main">
               <a:ext uri="{FF2B5EF4-FFF2-40B4-BE49-F238E27FC236}">
-                <a16:creationId xmlns:a16="http://schemas.microsoft.com/office/drawing/2014/main" id="{DE22C14A-7D6F-40C1-954D-5CC36B968231}"/>
+                <a16:creationId xmlns:a16="http://schemas.microsoft.com/office/drawing/2014/main" id="{999CDB20-C3BA-464E-A889-FBE114297D5E}"/>
               </a:ext>
             </a:extLst>
           </p:cNvPr>
@@ -5888,7 +5898,7 @@
           <p:cNvPr id="7" name="question-title-2">
             <a:extLst xmlns:a="http://schemas.openxmlformats.org/drawingml/2006/main">
               <a:ext uri="{FF2B5EF4-FFF2-40B4-BE49-F238E27FC236}">
-                <a16:creationId xmlns:a16="http://schemas.microsoft.com/office/drawing/2014/main" id="{0EB9629B-C978-49D0-B7F7-6F085F1CD1D5}"/>
+                <a16:creationId xmlns:a16="http://schemas.microsoft.com/office/drawing/2014/main" id="{6AF419BB-58C3-4661-BC96-B5B4E67752E1}"/>
               </a:ext>
             </a:extLst>
           </p:cNvPr>
@@ -5946,7 +5956,7 @@
           <p:cNvPr id="8" name="question-body-2">
             <a:extLst xmlns:a="http://schemas.openxmlformats.org/drawingml/2006/main">
               <a:ext uri="{FF2B5EF4-FFF2-40B4-BE49-F238E27FC236}">
-                <a16:creationId xmlns:a16="http://schemas.microsoft.com/office/drawing/2014/main" id="{A8095F9E-B298-45D6-A62B-FE76590D84C8}"/>
+                <a16:creationId xmlns:a16="http://schemas.microsoft.com/office/drawing/2014/main" id="{B3C72728-104F-4326-9430-333B4E1B7CFB}"/>
               </a:ext>
             </a:extLst>
           </p:cNvPr>
@@ -6008,7 +6018,7 @@
           <p:cNvPr id="9" name="question-number-3">
             <a:extLst xmlns:a="http://schemas.openxmlformats.org/drawingml/2006/main">
               <a:ext uri="{FF2B5EF4-FFF2-40B4-BE49-F238E27FC236}">
-                <a16:creationId xmlns:a16="http://schemas.microsoft.com/office/drawing/2014/main" id="{BFEDDC9B-B50D-42CA-9D7A-1FC29BE64EE9}"/>
+                <a16:creationId xmlns:a16="http://schemas.microsoft.com/office/drawing/2014/main" id="{520A7010-43DD-44BA-95B2-832C29F8FCF2}"/>
               </a:ext>
             </a:extLst>
           </p:cNvPr>
@@ -6066,7 +6076,7 @@
           <p:cNvPr id="10" name="question-title-3">
             <a:extLst xmlns:a="http://schemas.openxmlformats.org/drawingml/2006/main">
               <a:ext uri="{FF2B5EF4-FFF2-40B4-BE49-F238E27FC236}">
-                <a16:creationId xmlns:a16="http://schemas.microsoft.com/office/drawing/2014/main" id="{021DBD52-3931-4F72-99B5-4C813E6BA4D6}"/>
+                <a16:creationId xmlns:a16="http://schemas.microsoft.com/office/drawing/2014/main" id="{3FC02652-98D0-4DB8-B360-59A764DCAEAC}"/>
               </a:ext>
             </a:extLst>
           </p:cNvPr>
@@ -6124,7 +6134,7 @@
           <p:cNvPr id="11" name="question-body-3">
             <a:extLst xmlns:a="http://schemas.openxmlformats.org/drawingml/2006/main">
               <a:ext uri="{FF2B5EF4-FFF2-40B4-BE49-F238E27FC236}">
-                <a16:creationId xmlns:a16="http://schemas.microsoft.com/office/drawing/2014/main" id="{A6A79B3D-E57E-4122-AC90-28799B45953D}"/>
+                <a16:creationId xmlns:a16="http://schemas.microsoft.com/office/drawing/2014/main" id="{BD038408-8F7F-424E-B8A3-C974C4B8350F}"/>
               </a:ext>
             </a:extLst>
           </p:cNvPr>
@@ -6184,7 +6194,7 @@
     </p:spTree>
     <p:extLst>
       <p:ext uri="{BB962C8B-B14F-4D97-AF65-F5344CB8AC3E}">
-        <p14:creationId xmlns:p14="http://schemas.microsoft.com/office/powerpoint/2010/main" val="1240358799"/>
+        <p14:creationId xmlns:p14="http://schemas.microsoft.com/office/powerpoint/2010/main" val="2088918386"/>
       </p:ext>
     </p:extLst>
   </p:cSld>
@@ -6215,7 +6225,7 @@
           <p:cNvPr id="20" name="slide-4-title">
             <a:extLst xmlns:a="http://schemas.openxmlformats.org/drawingml/2006/main">
               <a:ext uri="{FF2B5EF4-FFF2-40B4-BE49-F238E27FC236}">
-                <a16:creationId xmlns:a16="http://schemas.microsoft.com/office/drawing/2014/main" id="{C306923B-EB1A-4D60-B03A-466C3286B2B0}"/>
+                <a16:creationId xmlns:a16="http://schemas.microsoft.com/office/drawing/2014/main" id="{41013571-420F-465B-B12E-6395D408868F}"/>
               </a:ext>
             </a:extLst>
           </p:cNvPr>
@@ -6273,7 +6283,7 @@
           <p:cNvPr id="2" name="slide-4-number">
             <a:extLst xmlns:a="http://schemas.openxmlformats.org/drawingml/2006/main">
               <a:ext uri="{FF2B5EF4-FFF2-40B4-BE49-F238E27FC236}">
-                <a16:creationId xmlns:a16="http://schemas.microsoft.com/office/drawing/2014/main" id="{A89313A3-A783-41F5-A9EA-82848F02B7F4}"/>
+                <a16:creationId xmlns:a16="http://schemas.microsoft.com/office/drawing/2014/main" id="{6221A0D1-9C92-45A5-B0EA-36426E365663}"/>
               </a:ext>
             </a:extLst>
           </p:cNvPr>
@@ -6331,7 +6341,7 @@
           <p:cNvPr id="3" name="architecture-lead">
             <a:extLst xmlns:a="http://schemas.openxmlformats.org/drawingml/2006/main">
               <a:ext uri="{FF2B5EF4-FFF2-40B4-BE49-F238E27FC236}">
-                <a16:creationId xmlns:a16="http://schemas.microsoft.com/office/drawing/2014/main" id="{82D5D13A-4807-46FA-8840-F7C17820D888}"/>
+                <a16:creationId xmlns:a16="http://schemas.microsoft.com/office/drawing/2014/main" id="{7C6B72E6-CAAD-4386-A5B9-C36C9EF1C0D3}"/>
               </a:ext>
             </a:extLst>
           </p:cNvPr>
@@ -6393,7 +6403,7 @@
           <p:cNvPr id="4" name="architecture-points">
             <a:extLst xmlns:a="http://schemas.openxmlformats.org/drawingml/2006/main">
               <a:ext uri="{FF2B5EF4-FFF2-40B4-BE49-F238E27FC236}">
-                <a16:creationId xmlns:a16="http://schemas.microsoft.com/office/drawing/2014/main" id="{8EAB318D-F861-4B83-923C-F4A05F6655BA}"/>
+                <a16:creationId xmlns:a16="http://schemas.microsoft.com/office/drawing/2014/main" id="{3431071E-D72D-4596-83CE-D7840C5D5888}"/>
               </a:ext>
             </a:extLst>
           </p:cNvPr>
@@ -6536,7 +6546,7 @@
           <p:cNvPr id="5" name="architecture-field">
             <a:extLst xmlns:a="http://schemas.openxmlformats.org/drawingml/2006/main">
               <a:ext uri="{FF2B5EF4-FFF2-40B4-BE49-F238E27FC236}">
-                <a16:creationId xmlns:a16="http://schemas.microsoft.com/office/drawing/2014/main" id="{5B46B6FD-099B-4DCA-AD8E-4D1F60C110C0}"/>
+                <a16:creationId xmlns:a16="http://schemas.microsoft.com/office/drawing/2014/main" id="{59F50D79-A05B-4527-87CC-FC0D8670F51E}"/>
               </a:ext>
             </a:extLst>
           </p:cNvPr>
@@ -6659,7 +6669,7 @@
           <p:cNvPr id="10" name="architecture-node-1">
             <a:extLst xmlns:a="http://schemas.openxmlformats.org/drawingml/2006/main">
               <a:ext uri="{FF2B5EF4-FFF2-40B4-BE49-F238E27FC236}">
-                <a16:creationId xmlns:a16="http://schemas.microsoft.com/office/drawing/2014/main" id="{C6AF2667-DF80-424C-99CE-7667F36B5D80}"/>
+                <a16:creationId xmlns:a16="http://schemas.microsoft.com/office/drawing/2014/main" id="{76BC7DC0-FBA5-47D9-910E-7049E394625A}"/>
               </a:ext>
             </a:extLst>
           </p:cNvPr>
@@ -6694,7 +6704,7 @@
           <p:cNvPr id="11" name="architecture-node-text-1">
             <a:extLst xmlns:a="http://schemas.openxmlformats.org/drawingml/2006/main">
               <a:ext uri="{FF2B5EF4-FFF2-40B4-BE49-F238E27FC236}">
-                <a16:creationId xmlns:a16="http://schemas.microsoft.com/office/drawing/2014/main" id="{F3F1B29C-22BD-42B9-B4CC-3C2F46F8C8AD}"/>
+                <a16:creationId xmlns:a16="http://schemas.microsoft.com/office/drawing/2014/main" id="{974A563A-2DCA-431D-8A0E-08FBA9377ED0}"/>
               </a:ext>
             </a:extLst>
           </p:cNvPr>
@@ -6752,7 +6762,7 @@
           <p:cNvPr id="12" name="architecture-node-2">
             <a:extLst xmlns:a="http://schemas.openxmlformats.org/drawingml/2006/main">
               <a:ext uri="{FF2B5EF4-FFF2-40B4-BE49-F238E27FC236}">
-                <a16:creationId xmlns:a16="http://schemas.microsoft.com/office/drawing/2014/main" id="{2C603B0A-B011-4425-8109-E80D9FD8E0AB}"/>
+                <a16:creationId xmlns:a16="http://schemas.microsoft.com/office/drawing/2014/main" id="{C0126C8B-D095-4654-8FFF-496C3ACA5889}"/>
               </a:ext>
             </a:extLst>
           </p:cNvPr>
@@ -6787,7 +6797,7 @@
           <p:cNvPr id="13" name="architecture-node-text-2">
             <a:extLst xmlns:a="http://schemas.openxmlformats.org/drawingml/2006/main">
               <a:ext uri="{FF2B5EF4-FFF2-40B4-BE49-F238E27FC236}">
-                <a16:creationId xmlns:a16="http://schemas.microsoft.com/office/drawing/2014/main" id="{9E3898D7-B512-413B-8390-D4BB16408F56}"/>
+                <a16:creationId xmlns:a16="http://schemas.microsoft.com/office/drawing/2014/main" id="{CBF12130-34D4-4215-979A-2BD5815FE4AB}"/>
               </a:ext>
             </a:extLst>
           </p:cNvPr>
@@ -6845,7 +6855,7 @@
           <p:cNvPr id="14" name="architecture-node-3">
             <a:extLst xmlns:a="http://schemas.openxmlformats.org/drawingml/2006/main">
               <a:ext uri="{FF2B5EF4-FFF2-40B4-BE49-F238E27FC236}">
-                <a16:creationId xmlns:a16="http://schemas.microsoft.com/office/drawing/2014/main" id="{D2EA49A5-5A2F-42B6-90DA-89B1D683E7F5}"/>
+                <a16:creationId xmlns:a16="http://schemas.microsoft.com/office/drawing/2014/main" id="{DA88A486-ADC9-47F7-822F-C6345E3C1593}"/>
               </a:ext>
             </a:extLst>
           </p:cNvPr>
@@ -6880,7 +6890,7 @@
           <p:cNvPr id="15" name="architecture-node-text-3">
             <a:extLst xmlns:a="http://schemas.openxmlformats.org/drawingml/2006/main">
               <a:ext uri="{FF2B5EF4-FFF2-40B4-BE49-F238E27FC236}">
-                <a16:creationId xmlns:a16="http://schemas.microsoft.com/office/drawing/2014/main" id="{C39332AF-7A35-4016-8D05-FD11153615FD}"/>
+                <a16:creationId xmlns:a16="http://schemas.microsoft.com/office/drawing/2014/main" id="{8DB5BB5C-826E-46B0-9041-DD9E7E41B76E}"/>
               </a:ext>
             </a:extLst>
           </p:cNvPr>
@@ -6938,7 +6948,7 @@
           <p:cNvPr id="16" name="architecture-node-4">
             <a:extLst xmlns:a="http://schemas.openxmlformats.org/drawingml/2006/main">
               <a:ext uri="{FF2B5EF4-FFF2-40B4-BE49-F238E27FC236}">
-                <a16:creationId xmlns:a16="http://schemas.microsoft.com/office/drawing/2014/main" id="{F36DFB7F-BE1D-4488-ADEF-4D88F0DDB0B5}"/>
+                <a16:creationId xmlns:a16="http://schemas.microsoft.com/office/drawing/2014/main" id="{B5C93101-9500-4BB7-88AE-381DE6D32B1D}"/>
               </a:ext>
             </a:extLst>
           </p:cNvPr>
@@ -6973,7 +6983,7 @@
           <p:cNvPr id="17" name="architecture-node-text-4">
             <a:extLst xmlns:a="http://schemas.openxmlformats.org/drawingml/2006/main">
               <a:ext uri="{FF2B5EF4-FFF2-40B4-BE49-F238E27FC236}">
-                <a16:creationId xmlns:a16="http://schemas.microsoft.com/office/drawing/2014/main" id="{6E4B34EE-60F7-49CD-80CE-A465055FD3A2}"/>
+                <a16:creationId xmlns:a16="http://schemas.microsoft.com/office/drawing/2014/main" id="{85256338-3B82-4EC7-ACC0-ACB8627669D9}"/>
               </a:ext>
             </a:extLst>
           </p:cNvPr>
@@ -7031,7 +7041,7 @@
           <p:cNvPr id="18" name="architecture-node-5">
             <a:extLst xmlns:a="http://schemas.openxmlformats.org/drawingml/2006/main">
               <a:ext uri="{FF2B5EF4-FFF2-40B4-BE49-F238E27FC236}">
-                <a16:creationId xmlns:a16="http://schemas.microsoft.com/office/drawing/2014/main" id="{168862EE-6919-4CB3-9DA5-DD0EBE0840D2}"/>
+                <a16:creationId xmlns:a16="http://schemas.microsoft.com/office/drawing/2014/main" id="{5E10D4BB-B910-4534-80BD-106EC6935D2B}"/>
               </a:ext>
             </a:extLst>
           </p:cNvPr>
@@ -7066,7 +7076,7 @@
           <p:cNvPr id="19" name="architecture-node-text-5">
             <a:extLst xmlns:a="http://schemas.openxmlformats.org/drawingml/2006/main">
               <a:ext uri="{FF2B5EF4-FFF2-40B4-BE49-F238E27FC236}">
-                <a16:creationId xmlns:a16="http://schemas.microsoft.com/office/drawing/2014/main" id="{531D27BD-C794-436B-BED1-A45DBC790774}"/>
+                <a16:creationId xmlns:a16="http://schemas.microsoft.com/office/drawing/2014/main" id="{B14455B3-15EB-4AE2-B52F-D1C2353D6A83}"/>
               </a:ext>
             </a:extLst>
           </p:cNvPr>
@@ -7122,7 +7132,7 @@
     </p:spTree>
     <p:extLst>
       <p:ext uri="{BB962C8B-B14F-4D97-AF65-F5344CB8AC3E}">
-        <p14:creationId xmlns:p14="http://schemas.microsoft.com/office/powerpoint/2010/main" val="170277206"/>
+        <p14:creationId xmlns:p14="http://schemas.microsoft.com/office/powerpoint/2010/main" val="1070085693"/>
       </p:ext>
     </p:extLst>
   </p:cSld>
@@ -7153,7 +7163,7 @@
           <p:cNvPr id="5" name="slide-5-title">
             <a:extLst xmlns:a="http://schemas.openxmlformats.org/drawingml/2006/main">
               <a:ext uri="{FF2B5EF4-FFF2-40B4-BE49-F238E27FC236}">
-                <a16:creationId xmlns:a16="http://schemas.microsoft.com/office/drawing/2014/main" id="{5E8476EC-E4B7-4EEB-B444-08693343C200}"/>
+                <a16:creationId xmlns:a16="http://schemas.microsoft.com/office/drawing/2014/main" id="{A4A4144D-72FE-4645-8049-C6E036BAA0F0}"/>
               </a:ext>
             </a:extLst>
           </p:cNvPr>
@@ -7211,7 +7221,7 @@
           <p:cNvPr id="2" name="slide-5-number">
             <a:extLst xmlns:a="http://schemas.openxmlformats.org/drawingml/2006/main">
               <a:ext uri="{FF2B5EF4-FFF2-40B4-BE49-F238E27FC236}">
-                <a16:creationId xmlns:a16="http://schemas.microsoft.com/office/drawing/2014/main" id="{37893B15-3FE5-4ECE-9C5C-E2AC484C9F46}"/>
+                <a16:creationId xmlns:a16="http://schemas.microsoft.com/office/drawing/2014/main" id="{00B150DC-50CA-484D-8285-8FBFDD29C5F0}"/>
               </a:ext>
             </a:extLst>
           </p:cNvPr>
@@ -7269,7 +7279,7 @@
           <p:cNvPr id="3" name="data-table-lead">
             <a:extLst xmlns:a="http://schemas.openxmlformats.org/drawingml/2006/main">
               <a:ext uri="{FF2B5EF4-FFF2-40B4-BE49-F238E27FC236}">
-                <a16:creationId xmlns:a16="http://schemas.microsoft.com/office/drawing/2014/main" id="{979C9E09-722B-48A1-846B-E4256FFD1196}"/>
+                <a16:creationId xmlns:a16="http://schemas.microsoft.com/office/drawing/2014/main" id="{5BC6993D-650F-4F28-8868-6237DB5B6409}"/>
               </a:ext>
             </a:extLst>
           </p:cNvPr>
@@ -8119,7 +8129,7 @@
     </p:spTree>
     <p:extLst>
       <p:ext uri="{BB962C8B-B14F-4D97-AF65-F5344CB8AC3E}">
-        <p14:creationId xmlns:p14="http://schemas.microsoft.com/office/powerpoint/2010/main" val="1881885286"/>
+        <p14:creationId xmlns:p14="http://schemas.microsoft.com/office/powerpoint/2010/main" val="151608212"/>
       </p:ext>
     </p:extLst>
   </p:cSld>
@@ -8150,7 +8160,7 @@
           <p:cNvPr id="14" name="slide-6-title">
             <a:extLst xmlns:a="http://schemas.openxmlformats.org/drawingml/2006/main">
               <a:ext uri="{FF2B5EF4-FFF2-40B4-BE49-F238E27FC236}">
-                <a16:creationId xmlns:a16="http://schemas.microsoft.com/office/drawing/2014/main" id="{8C637152-C915-45FA-9FFD-E632F632168F}"/>
+                <a16:creationId xmlns:a16="http://schemas.microsoft.com/office/drawing/2014/main" id="{31991F3E-88D5-4B0E-ACFE-FDC8F43C153F}"/>
               </a:ext>
             </a:extLst>
           </p:cNvPr>
@@ -8208,7 +8218,7 @@
           <p:cNvPr id="2" name="slide-6-number">
             <a:extLst xmlns:a="http://schemas.openxmlformats.org/drawingml/2006/main">
               <a:ext uri="{FF2B5EF4-FFF2-40B4-BE49-F238E27FC236}">
-                <a16:creationId xmlns:a16="http://schemas.microsoft.com/office/drawing/2014/main" id="{C96C30B4-E293-4DB6-9A52-EE352FAE220D}"/>
+                <a16:creationId xmlns:a16="http://schemas.microsoft.com/office/drawing/2014/main" id="{07F3863F-ACD3-4518-AB42-8A105FA40A2D}"/>
               </a:ext>
             </a:extLst>
           </p:cNvPr>
@@ -8273,7 +8283,7 @@
         </p:xfrm>
         <a:graphic xmlns:a="http://schemas.openxmlformats.org/drawingml/2006/main">
           <a:graphicData uri="http://schemas.openxmlformats.org/drawingml/2006/chart">
-            <c:chart xmlns:r="http://schemas.openxmlformats.org/officeDocument/2006/relationships" xmlns:c="http://schemas.openxmlformats.org/drawingml/2006/chart" r:id="R5937ad12c6e043ba"/>
+            <c:chart xmlns:r="http://schemas.openxmlformats.org/officeDocument/2006/relationships" xmlns:c="http://schemas.openxmlformats.org/drawingml/2006/chart" r:id="R277fec8e07d34775"/>
           </a:graphicData>
         </a:graphic>
       </p:graphicFrame>
@@ -8282,7 +8292,7 @@
           <p:cNvPr id="4" name="monthly-card-1">
             <a:extLst xmlns:a="http://schemas.openxmlformats.org/drawingml/2006/main">
               <a:ext uri="{FF2B5EF4-FFF2-40B4-BE49-F238E27FC236}">
-                <a16:creationId xmlns:a16="http://schemas.microsoft.com/office/drawing/2014/main" id="{72078CD0-F4C6-4843-A9D2-642FC1102755}"/>
+                <a16:creationId xmlns:a16="http://schemas.microsoft.com/office/drawing/2014/main" id="{5E2CCD80-6C62-4CE2-A591-32962BA66B7D}"/>
               </a:ext>
             </a:extLst>
           </p:cNvPr>
@@ -8317,7 +8327,7 @@
           <p:cNvPr id="5" name="monthly-stat-1">
             <a:extLst xmlns:a="http://schemas.openxmlformats.org/drawingml/2006/main">
               <a:ext uri="{FF2B5EF4-FFF2-40B4-BE49-F238E27FC236}">
-                <a16:creationId xmlns:a16="http://schemas.microsoft.com/office/drawing/2014/main" id="{68314A80-6988-4528-A148-DB558C3A6724}"/>
+                <a16:creationId xmlns:a16="http://schemas.microsoft.com/office/drawing/2014/main" id="{E35ADE25-A516-4C21-8AB3-EB3BECECEC59}"/>
               </a:ext>
             </a:extLst>
           </p:cNvPr>
@@ -8375,7 +8385,7 @@
           <p:cNvPr id="6" name="monthly-label-1">
             <a:extLst xmlns:a="http://schemas.openxmlformats.org/drawingml/2006/main">
               <a:ext uri="{FF2B5EF4-FFF2-40B4-BE49-F238E27FC236}">
-                <a16:creationId xmlns:a16="http://schemas.microsoft.com/office/drawing/2014/main" id="{178A4461-2B7F-4171-A17F-33E77EE1B217}"/>
+                <a16:creationId xmlns:a16="http://schemas.microsoft.com/office/drawing/2014/main" id="{35B91ACF-0934-4B78-8E5B-21A7CDB55AE7}"/>
               </a:ext>
             </a:extLst>
           </p:cNvPr>
@@ -8433,7 +8443,7 @@
           <p:cNvPr id="7" name="monthly-card-2">
             <a:extLst xmlns:a="http://schemas.openxmlformats.org/drawingml/2006/main">
               <a:ext uri="{FF2B5EF4-FFF2-40B4-BE49-F238E27FC236}">
-                <a16:creationId xmlns:a16="http://schemas.microsoft.com/office/drawing/2014/main" id="{CC33D826-5810-4AE4-A87B-00C8A14F1C2F}"/>
+                <a16:creationId xmlns:a16="http://schemas.microsoft.com/office/drawing/2014/main" id="{DD6F041A-D009-4513-A74D-1409FCFCAA0C}"/>
               </a:ext>
             </a:extLst>
           </p:cNvPr>
@@ -8466,7 +8476,7 @@
           <p:cNvPr id="8" name="monthly-stat-2">
             <a:extLst xmlns:a="http://schemas.openxmlformats.org/drawingml/2006/main">
               <a:ext uri="{FF2B5EF4-FFF2-40B4-BE49-F238E27FC236}">
-                <a16:creationId xmlns:a16="http://schemas.microsoft.com/office/drawing/2014/main" id="{79702E66-532B-4FBA-A624-02607D00DD69}"/>
+                <a16:creationId xmlns:a16="http://schemas.microsoft.com/office/drawing/2014/main" id="{53AAEBB9-EDF1-468D-9DA3-B8860CFB681D}"/>
               </a:ext>
             </a:extLst>
           </p:cNvPr>
@@ -8524,7 +8534,7 @@
           <p:cNvPr id="9" name="monthly-label-2">
             <a:extLst xmlns:a="http://schemas.openxmlformats.org/drawingml/2006/main">
               <a:ext uri="{FF2B5EF4-FFF2-40B4-BE49-F238E27FC236}">
-                <a16:creationId xmlns:a16="http://schemas.microsoft.com/office/drawing/2014/main" id="{6E81CED1-C12B-431B-9792-F5E63D8CC0E5}"/>
+                <a16:creationId xmlns:a16="http://schemas.microsoft.com/office/drawing/2014/main" id="{D055AA78-34B9-4010-A113-461EEEC40CCB}"/>
               </a:ext>
             </a:extLst>
           </p:cNvPr>
@@ -8582,7 +8592,7 @@
           <p:cNvPr id="10" name="monthly-card-3">
             <a:extLst xmlns:a="http://schemas.openxmlformats.org/drawingml/2006/main">
               <a:ext uri="{FF2B5EF4-FFF2-40B4-BE49-F238E27FC236}">
-                <a16:creationId xmlns:a16="http://schemas.microsoft.com/office/drawing/2014/main" id="{0505DBAA-1AC4-4DFB-A2E1-E8A3241788AE}"/>
+                <a16:creationId xmlns:a16="http://schemas.microsoft.com/office/drawing/2014/main" id="{6646255E-25FE-4254-8BE8-891F1EDA0389}"/>
               </a:ext>
             </a:extLst>
           </p:cNvPr>
@@ -8615,7 +8625,7 @@
           <p:cNvPr id="11" name="monthly-stat-3">
             <a:extLst xmlns:a="http://schemas.openxmlformats.org/drawingml/2006/main">
               <a:ext uri="{FF2B5EF4-FFF2-40B4-BE49-F238E27FC236}">
-                <a16:creationId xmlns:a16="http://schemas.microsoft.com/office/drawing/2014/main" id="{8ED2DB25-8CB1-40AC-8770-2E86B790D26F}"/>
+                <a16:creationId xmlns:a16="http://schemas.microsoft.com/office/drawing/2014/main" id="{E2A5F99E-6B53-45E6-9EDA-EBF7BE2825DB}"/>
               </a:ext>
             </a:extLst>
           </p:cNvPr>
@@ -8673,7 +8683,7 @@
           <p:cNvPr id="12" name="monthly-label-3">
             <a:extLst xmlns:a="http://schemas.openxmlformats.org/drawingml/2006/main">
               <a:ext uri="{FF2B5EF4-FFF2-40B4-BE49-F238E27FC236}">
-                <a16:creationId xmlns:a16="http://schemas.microsoft.com/office/drawing/2014/main" id="{CC203AB2-BB1D-4BEC-97CA-096372727F8E}"/>
+                <a16:creationId xmlns:a16="http://schemas.microsoft.com/office/drawing/2014/main" id="{0C73A1AC-D0DF-4091-89E7-32B6684CCAE6}"/>
               </a:ext>
             </a:extLst>
           </p:cNvPr>
@@ -8731,7 +8741,7 @@
           <p:cNvPr id="13" name="demo-data-footer">
             <a:extLst xmlns:a="http://schemas.openxmlformats.org/drawingml/2006/main">
               <a:ext uri="{FF2B5EF4-FFF2-40B4-BE49-F238E27FC236}">
-                <a16:creationId xmlns:a16="http://schemas.microsoft.com/office/drawing/2014/main" id="{B4CDB677-C70A-4EC8-B441-FA724A8EAB24}"/>
+                <a16:creationId xmlns:a16="http://schemas.microsoft.com/office/drawing/2014/main" id="{CBF22169-D514-427A-8967-11047B399562}"/>
               </a:ext>
             </a:extLst>
           </p:cNvPr>
@@ -8787,7 +8797,7 @@
     </p:spTree>
     <p:extLst>
       <p:ext uri="{BB962C8B-B14F-4D97-AF65-F5344CB8AC3E}">
-        <p14:creationId xmlns:p14="http://schemas.microsoft.com/office/powerpoint/2010/main" val="313045713"/>
+        <p14:creationId xmlns:p14="http://schemas.microsoft.com/office/powerpoint/2010/main" val="2058588055"/>
       </p:ext>
     </p:extLst>
   </p:cSld>
@@ -8818,7 +8828,7 @@
           <p:cNvPr id="12" name="slide-7-title">
             <a:extLst xmlns:a="http://schemas.openxmlformats.org/drawingml/2006/main">
               <a:ext uri="{FF2B5EF4-FFF2-40B4-BE49-F238E27FC236}">
-                <a16:creationId xmlns:a16="http://schemas.microsoft.com/office/drawing/2014/main" id="{11903549-BC51-4392-ADF8-E81893543CAC}"/>
+                <a16:creationId xmlns:a16="http://schemas.microsoft.com/office/drawing/2014/main" id="{9A7CDCF1-B5B0-487C-8FDD-8EA58B71777D}"/>
               </a:ext>
             </a:extLst>
           </p:cNvPr>
@@ -8876,7 +8886,7 @@
           <p:cNvPr id="2" name="slide-7-number">
             <a:extLst xmlns:a="http://schemas.openxmlformats.org/drawingml/2006/main">
               <a:ext uri="{FF2B5EF4-FFF2-40B4-BE49-F238E27FC236}">
-                <a16:creationId xmlns:a16="http://schemas.microsoft.com/office/drawing/2014/main" id="{134D8420-0FE4-48BF-9D3A-98A70969DAFF}"/>
+                <a16:creationId xmlns:a16="http://schemas.microsoft.com/office/drawing/2014/main" id="{616FB469-88FB-4AD7-9147-938C3840CF35}"/>
               </a:ext>
             </a:extLst>
           </p:cNvPr>
@@ -8941,7 +8951,7 @@
         </p:xfrm>
         <a:graphic xmlns:a="http://schemas.openxmlformats.org/drawingml/2006/main">
           <a:graphicData uri="http://schemas.openxmlformats.org/drawingml/2006/chart">
-            <c:chart xmlns:r="http://schemas.openxmlformats.org/officeDocument/2006/relationships" xmlns:c="http://schemas.openxmlformats.org/drawingml/2006/chart" r:id="R5adabeb07e414dee"/>
+            <c:chart xmlns:r="http://schemas.openxmlformats.org/officeDocument/2006/relationships" xmlns:c="http://schemas.openxmlformats.org/drawingml/2006/chart" r:id="R56276e89d9bf4ce7"/>
           </a:graphicData>
         </a:graphic>
       </p:graphicFrame>
@@ -8950,7 +8960,7 @@
           <p:cNvPr id="4" name="ridge-summary">
             <a:extLst xmlns:a="http://schemas.openxmlformats.org/drawingml/2006/main">
               <a:ext uri="{FF2B5EF4-FFF2-40B4-BE49-F238E27FC236}">
-                <a16:creationId xmlns:a16="http://schemas.microsoft.com/office/drawing/2014/main" id="{5565A3D9-61BE-4E31-87AF-964612147239}"/>
+                <a16:creationId xmlns:a16="http://schemas.microsoft.com/office/drawing/2014/main" id="{B1C015A1-EE9B-44AC-BA34-907BDDB1A2B4}"/>
               </a:ext>
             </a:extLst>
           </p:cNvPr>
@@ -9039,7 +9049,7 @@
           <p:cNvPr id="5" name="ridge-r2-panel">
             <a:extLst xmlns:a="http://schemas.openxmlformats.org/drawingml/2006/main">
               <a:ext uri="{FF2B5EF4-FFF2-40B4-BE49-F238E27FC236}">
-                <a16:creationId xmlns:a16="http://schemas.microsoft.com/office/drawing/2014/main" id="{46F738D8-770A-4E3B-B0FB-2ACFDF9F847D}"/>
+                <a16:creationId xmlns:a16="http://schemas.microsoft.com/office/drawing/2014/main" id="{195394C0-A8E7-4B01-BF5B-00DBFF456802}"/>
               </a:ext>
             </a:extLst>
           </p:cNvPr>
@@ -9074,7 +9084,7 @@
           <p:cNvPr id="6" name="ridge-baseline-panel">
             <a:extLst xmlns:a="http://schemas.openxmlformats.org/drawingml/2006/main">
               <a:ext uri="{FF2B5EF4-FFF2-40B4-BE49-F238E27FC236}">
-                <a16:creationId xmlns:a16="http://schemas.microsoft.com/office/drawing/2014/main" id="{D9D881E2-B0F7-45AE-888A-1340FF86901A}"/>
+                <a16:creationId xmlns:a16="http://schemas.microsoft.com/office/drawing/2014/main" id="{E3827560-3687-4B32-96C8-0D9089AF2F56}"/>
               </a:ext>
             </a:extLst>
           </p:cNvPr>
@@ -9107,7 +9117,7 @@
           <p:cNvPr id="7" name="ridge-r2">
             <a:extLst xmlns:a="http://schemas.openxmlformats.org/drawingml/2006/main">
               <a:ext uri="{FF2B5EF4-FFF2-40B4-BE49-F238E27FC236}">
-                <a16:creationId xmlns:a16="http://schemas.microsoft.com/office/drawing/2014/main" id="{27F9ECD1-FE95-4AD4-AF6E-D99804E9DEDD}"/>
+                <a16:creationId xmlns:a16="http://schemas.microsoft.com/office/drawing/2014/main" id="{BF913CD1-47F1-46E6-9DFB-39932C03D4CA}"/>
               </a:ext>
             </a:extLst>
           </p:cNvPr>
@@ -9165,7 +9175,7 @@
           <p:cNvPr id="8" name="ridge-r2-label">
             <a:extLst xmlns:a="http://schemas.openxmlformats.org/drawingml/2006/main">
               <a:ext uri="{FF2B5EF4-FFF2-40B4-BE49-F238E27FC236}">
-                <a16:creationId xmlns:a16="http://schemas.microsoft.com/office/drawing/2014/main" id="{A0BE0A6D-C2BD-476C-B87E-4963BDBC2FB1}"/>
+                <a16:creationId xmlns:a16="http://schemas.microsoft.com/office/drawing/2014/main" id="{00F2E774-6E4E-4CCE-8F44-8374EAF0550B}"/>
               </a:ext>
             </a:extLst>
           </p:cNvPr>
@@ -9223,7 +9233,7 @@
           <p:cNvPr id="9" name="ridge-baseline">
             <a:extLst xmlns:a="http://schemas.openxmlformats.org/drawingml/2006/main">
               <a:ext uri="{FF2B5EF4-FFF2-40B4-BE49-F238E27FC236}">
-                <a16:creationId xmlns:a16="http://schemas.microsoft.com/office/drawing/2014/main" id="{B03B43BF-3805-458A-89FE-9F33A66BDF1D}"/>
+                <a16:creationId xmlns:a16="http://schemas.microsoft.com/office/drawing/2014/main" id="{E718F9B8-E9B3-490C-9FC0-FA0695A39232}"/>
               </a:ext>
             </a:extLst>
           </p:cNvPr>
@@ -9281,7 +9291,7 @@
           <p:cNvPr id="10" name="ridge-baseline-label">
             <a:extLst xmlns:a="http://schemas.openxmlformats.org/drawingml/2006/main">
               <a:ext uri="{FF2B5EF4-FFF2-40B4-BE49-F238E27FC236}">
-                <a16:creationId xmlns:a16="http://schemas.microsoft.com/office/drawing/2014/main" id="{E503F4F6-7783-44E2-97E9-CB56173E2DAA}"/>
+                <a16:creationId xmlns:a16="http://schemas.microsoft.com/office/drawing/2014/main" id="{89A55F2D-3296-409D-88AC-5CC7870D0A8D}"/>
               </a:ext>
             </a:extLst>
           </p:cNvPr>
@@ -9339,7 +9349,7 @@
           <p:cNvPr id="11" name="demo-data-footer">
             <a:extLst xmlns:a="http://schemas.openxmlformats.org/drawingml/2006/main">
               <a:ext uri="{FF2B5EF4-FFF2-40B4-BE49-F238E27FC236}">
-                <a16:creationId xmlns:a16="http://schemas.microsoft.com/office/drawing/2014/main" id="{57A3C68A-5A6B-432A-83BC-E7C7817B2058}"/>
+                <a16:creationId xmlns:a16="http://schemas.microsoft.com/office/drawing/2014/main" id="{A82B2D16-7973-4342-81AF-F46B328AFC98}"/>
               </a:ext>
             </a:extLst>
           </p:cNvPr>
@@ -9395,7 +9405,7 @@
     </p:spTree>
     <p:extLst>
       <p:ext uri="{BB962C8B-B14F-4D97-AF65-F5344CB8AC3E}">
-        <p14:creationId xmlns:p14="http://schemas.microsoft.com/office/powerpoint/2010/main" val="277091043"/>
+        <p14:creationId xmlns:p14="http://schemas.microsoft.com/office/powerpoint/2010/main" val="184928241"/>
       </p:ext>
     </p:extLst>
   </p:cSld>
@@ -9426,7 +9436,7 @@
           <p:cNvPr id="11" name="slide-8-title">
             <a:extLst xmlns:a="http://schemas.openxmlformats.org/drawingml/2006/main">
               <a:ext uri="{FF2B5EF4-FFF2-40B4-BE49-F238E27FC236}">
-                <a16:creationId xmlns:a16="http://schemas.microsoft.com/office/drawing/2014/main" id="{BAF15C8B-CD72-46CD-B03B-A59223D9474A}"/>
+                <a16:creationId xmlns:a16="http://schemas.microsoft.com/office/drawing/2014/main" id="{A92E675C-AF5F-4505-A797-5E3C2D4E7F7F}"/>
               </a:ext>
             </a:extLst>
           </p:cNvPr>
@@ -9484,7 +9494,7 @@
           <p:cNvPr id="2" name="slide-8-number">
             <a:extLst xmlns:a="http://schemas.openxmlformats.org/drawingml/2006/main">
               <a:ext uri="{FF2B5EF4-FFF2-40B4-BE49-F238E27FC236}">
-                <a16:creationId xmlns:a16="http://schemas.microsoft.com/office/drawing/2014/main" id="{2826400E-3347-4DC5-9551-CE595B6F0331}"/>
+                <a16:creationId xmlns:a16="http://schemas.microsoft.com/office/drawing/2014/main" id="{CD95ABE0-2A42-498D-89DB-3507ECE6AD01}"/>
               </a:ext>
             </a:extLst>
           </p:cNvPr>
@@ -9542,7 +9552,7 @@
           <p:cNvPr id="3" name="ac-chart-frame">
             <a:extLst xmlns:a="http://schemas.openxmlformats.org/drawingml/2006/main">
               <a:ext uri="{FF2B5EF4-FFF2-40B4-BE49-F238E27FC236}">
-                <a16:creationId xmlns:a16="http://schemas.microsoft.com/office/drawing/2014/main" id="{380BAC0E-3C8D-4BFD-9152-0F698868CAAE}"/>
+                <a16:creationId xmlns:a16="http://schemas.microsoft.com/office/drawing/2014/main" id="{665812EA-5366-4461-BC54-70D92DDCC36A}"/>
               </a:ext>
             </a:extLst>
           </p:cNvPr>
@@ -9584,7 +9594,7 @@
         </p:xfrm>
         <a:graphic xmlns:a="http://schemas.openxmlformats.org/drawingml/2006/main">
           <a:graphicData uri="http://schemas.openxmlformats.org/drawingml/2006/chart">
-            <c:chart xmlns:r="http://schemas.openxmlformats.org/officeDocument/2006/relationships" xmlns:c="http://schemas.openxmlformats.org/drawingml/2006/chart" r:id="R81885550242e45e0"/>
+            <c:chart xmlns:r="http://schemas.openxmlformats.org/officeDocument/2006/relationships" xmlns:c="http://schemas.openxmlformats.org/drawingml/2006/chart" r:id="R2f7cdcb0760c447a"/>
           </a:graphicData>
         </a:graphic>
       </p:graphicFrame>
@@ -9593,7 +9603,7 @@
           <p:cNvPr id="5" name="ac-summary">
             <a:extLst xmlns:a="http://schemas.openxmlformats.org/drawingml/2006/main">
               <a:ext uri="{FF2B5EF4-FFF2-40B4-BE49-F238E27FC236}">
-                <a16:creationId xmlns:a16="http://schemas.microsoft.com/office/drawing/2014/main" id="{4CC2CA85-9B5A-4C76-B273-10D44DA6BC2D}"/>
+                <a16:creationId xmlns:a16="http://schemas.microsoft.com/office/drawing/2014/main" id="{1A9A2E32-ED2A-4E29-8957-82749DAF094D}"/>
               </a:ext>
             </a:extLst>
           </p:cNvPr>
@@ -9682,7 +9692,7 @@
           <p:cNvPr id="6" name="ac-energy">
             <a:extLst xmlns:a="http://schemas.openxmlformats.org/drawingml/2006/main">
               <a:ext uri="{FF2B5EF4-FFF2-40B4-BE49-F238E27FC236}">
-                <a16:creationId xmlns:a16="http://schemas.microsoft.com/office/drawing/2014/main" id="{53E0FB75-E94B-470C-AE4E-BECC6DE431B5}"/>
+                <a16:creationId xmlns:a16="http://schemas.microsoft.com/office/drawing/2014/main" id="{CC67D3CC-F643-4AA3-9DC4-5C41C07E06E7}"/>
               </a:ext>
             </a:extLst>
           </p:cNvPr>
@@ -9740,7 +9750,7 @@
           <p:cNvPr id="7" name="ac-energy-label">
             <a:extLst xmlns:a="http://schemas.openxmlformats.org/drawingml/2006/main">
               <a:ext uri="{FF2B5EF4-FFF2-40B4-BE49-F238E27FC236}">
-                <a16:creationId xmlns:a16="http://schemas.microsoft.com/office/drawing/2014/main" id="{A942A406-05A6-446A-9EB7-707CAD35F6EE}"/>
+                <a16:creationId xmlns:a16="http://schemas.microsoft.com/office/drawing/2014/main" id="{23033366-17FA-4513-B865-292EEB942DA8}"/>
               </a:ext>
             </a:extLst>
           </p:cNvPr>
@@ -9798,7 +9808,7 @@
           <p:cNvPr id="8" name="ac-risk">
             <a:extLst xmlns:a="http://schemas.openxmlformats.org/drawingml/2006/main">
               <a:ext uri="{FF2B5EF4-FFF2-40B4-BE49-F238E27FC236}">
-                <a16:creationId xmlns:a16="http://schemas.microsoft.com/office/drawing/2014/main" id="{F9779933-5283-48F5-9161-72536660BD9B}"/>
+                <a16:creationId xmlns:a16="http://schemas.microsoft.com/office/drawing/2014/main" id="{D7E70B77-9444-4A5E-9D77-E19AA1BEC0CA}"/>
               </a:ext>
             </a:extLst>
           </p:cNvPr>
@@ -9856,7 +9866,7 @@
           <p:cNvPr id="9" name="ac-risk-label">
             <a:extLst xmlns:a="http://schemas.openxmlformats.org/drawingml/2006/main">
               <a:ext uri="{FF2B5EF4-FFF2-40B4-BE49-F238E27FC236}">
-                <a16:creationId xmlns:a16="http://schemas.microsoft.com/office/drawing/2014/main" id="{7C196BAE-38B8-4D38-80E3-AD65714936A5}"/>
+                <a16:creationId xmlns:a16="http://schemas.microsoft.com/office/drawing/2014/main" id="{2D8BBDA9-4926-496D-9D38-FC8B77C61B7E}"/>
               </a:ext>
             </a:extLst>
           </p:cNvPr>
@@ -9914,7 +9924,7 @@
           <p:cNvPr id="10" name="demo-data-footer">
             <a:extLst xmlns:a="http://schemas.openxmlformats.org/drawingml/2006/main">
               <a:ext uri="{FF2B5EF4-FFF2-40B4-BE49-F238E27FC236}">
-                <a16:creationId xmlns:a16="http://schemas.microsoft.com/office/drawing/2014/main" id="{943B2BB9-5BCF-48B3-ADEA-22CACF032835}"/>
+                <a16:creationId xmlns:a16="http://schemas.microsoft.com/office/drawing/2014/main" id="{CCF25CBE-EF1D-4E11-8F0D-7FF3BDACEC58}"/>
               </a:ext>
             </a:extLst>
           </p:cNvPr>
@@ -9970,7 +9980,7 @@
     </p:spTree>
     <p:extLst>
       <p:ext uri="{BB962C8B-B14F-4D97-AF65-F5344CB8AC3E}">
-        <p14:creationId xmlns:p14="http://schemas.microsoft.com/office/powerpoint/2010/main" val="804515163"/>
+        <p14:creationId xmlns:p14="http://schemas.microsoft.com/office/powerpoint/2010/main" val="1815861050"/>
       </p:ext>
     </p:extLst>
   </p:cSld>
@@ -9998,10 +10008,10 @@
       </p:grpSpPr>
       <p:sp>
         <p:nvSpPr>
-          <p:cNvPr id="15" name="slide-9-title">
+          <p:cNvPr id="19" name="slide-9-title">
             <a:extLst xmlns:a="http://schemas.openxmlformats.org/drawingml/2006/main">
               <a:ext uri="{FF2B5EF4-FFF2-40B4-BE49-F238E27FC236}">
-                <a16:creationId xmlns:a16="http://schemas.microsoft.com/office/drawing/2014/main" id="{CA417017-E70C-45A8-B24D-92BF4BC54127}"/>
+                <a16:creationId xmlns:a16="http://schemas.microsoft.com/office/drawing/2014/main" id="{C25ABB3D-624D-48E6-AEEB-D5D055A9BEB6}"/>
               </a:ext>
             </a:extLst>
           </p:cNvPr>
@@ -10049,7 +10059,7 @@
                 <a:ea typeface="Microsoft JhengHei"/>
                 <a:cs typeface="Microsoft JhengHei"/>
               </a:rPr>
-              <a:t>網站把分析結果轉成四種可操作輸出</a:t>
+              <a:t>三張實際畫面串起分析、預測與維護</a:t>
             </a:r>
           </a:p>
         </p:txBody>
@@ -10059,7 +10069,7 @@
           <p:cNvPr id="2" name="slide-9-number">
             <a:extLst xmlns:a="http://schemas.openxmlformats.org/drawingml/2006/main">
               <a:ext uri="{FF2B5EF4-FFF2-40B4-BE49-F238E27FC236}">
-                <a16:creationId xmlns:a16="http://schemas.microsoft.com/office/drawing/2014/main" id="{A954FD73-4B23-4685-A4B9-C08F252F439F}"/>
+                <a16:creationId xmlns:a16="http://schemas.microsoft.com/office/drawing/2014/main" id="{0E810716-4861-4546-B2D0-8F2F228763DE}"/>
               </a:ext>
             </a:extLst>
           </p:cNvPr>
@@ -10112,16 +10122,75 @@
           </a:p>
         </p:txBody>
       </p:sp>
+      <p:sp>
+        <p:nvSpPr>
+          <p:cNvPr id="3" name="screen-frame-1">
+            <a:extLst xmlns:a="http://schemas.openxmlformats.org/drawingml/2006/main">
+              <a:ext uri="{FF2B5EF4-FFF2-40B4-BE49-F238E27FC236}">
+                <a16:creationId xmlns:a16="http://schemas.microsoft.com/office/drawing/2014/main" id="{FE4D6059-907E-4CBB-BEFF-DC7B7D609D3A}"/>
+              </a:ext>
+            </a:extLst>
+          </p:cNvPr>
+          <p:cNvSpPr>
+            <a:spLocks xmlns:a="http://schemas.openxmlformats.org/drawingml/2006/main" noGrp="1"/>
+          </p:cNvSpPr>
+          <p:nvPr/>
+        </p:nvSpPr>
+        <p:spPr>
+          <a:xfrm xmlns:a="http://schemas.openxmlformats.org/drawingml/2006/main">
+            <a:off x="352425" y="1381125"/>
+            <a:ext cx="3733800" cy="2152650"/>
+          </a:xfrm>
+          <a:prstGeom xmlns:a="http://schemas.openxmlformats.org/drawingml/2006/main" prst="roundRect">
+            <a:avLst>
+              <a:gd name="adj" fmla="val 3540"/>
+            </a:avLst>
+          </a:prstGeom>
+          <a:solidFill xmlns:a="http://schemas.openxmlformats.org/drawingml/2006/main">
+            <a:srgbClr val="FFFFFF"/>
+          </a:solidFill>
+          <a:ln xmlns:a="http://schemas.openxmlformats.org/drawingml/2006/main" w="9525">
+            <a:solidFill>
+              <a:srgbClr val="B8BCC4"/>
+            </a:solidFill>
+            <a:prstDash val="solid"/>
+          </a:ln>
+        </p:spPr>
+      </p:sp>
+      <p:pic>
+        <p:nvPicPr>
+          <p:cNvPr id="22" name=""/>
+          <p:cNvPicPr>
+            <a:picLocks xmlns:a="http://schemas.openxmlformats.org/drawingml/2006/main" noChangeAspect="1"/>
+          </p:cNvPicPr>
+          <p:nvPr/>
+        </p:nvPicPr>
+        <p:blipFill>
+          <a:blip xmlns:r="http://schemas.openxmlformats.org/officeDocument/2006/relationships" xmlns:a="http://schemas.openxmlformats.org/drawingml/2006/main" r:embed="Rf8a7a8f747d14587"/>
+          <a:stretch xmlns:a="http://schemas.openxmlformats.org/drawingml/2006/main"/>
+        </p:blipFill>
+        <p:spPr>
+          <a:xfrm xmlns:a="http://schemas.openxmlformats.org/drawingml/2006/main">
+            <a:off x="400050" y="1434108"/>
+            <a:ext cx="3638550" cy="2046684"/>
+          </a:xfrm>
+          <a:prstGeom xmlns:a="http://schemas.openxmlformats.org/drawingml/2006/main" prst="roundRect">
+            <a:avLst>
+              <a:gd name="adj" fmla="val 2315"/>
+            </a:avLst>
+          </a:prstGeom>
+        </p:spPr>
+      </p:pic>
       <p:cxnSp>
         <p:nvCxnSpPr>
-          <p:cNvPr id="17" name="capability-rule-1"/>
+          <p:cNvPr id="23" name="screen-rule-1"/>
           <p:cNvCxnSpPr/>
           <p:nvPr/>
         </p:nvCxnSpPr>
         <p:spPr>
           <a:xfrm xmlns:a="http://schemas.openxmlformats.org/drawingml/2006/main">
-            <a:off x="400050" y="1905000"/>
-            <a:ext cx="857250" cy="0"/>
+            <a:off x="400050" y="3810000"/>
+            <a:ext cx="819150" cy="0"/>
           </a:xfrm>
           <a:prstGeom xmlns:a="http://schemas.openxmlformats.org/drawingml/2006/main" prst="straightConnector1">
             <a:avLst/>
@@ -10136,10 +10205,10 @@
       </p:cxnSp>
       <p:sp>
         <p:nvSpPr>
-          <p:cNvPr id="4" name="capability-title-1">
+          <p:cNvPr id="6" name="screen-title-1">
             <a:extLst xmlns:a="http://schemas.openxmlformats.org/drawingml/2006/main">
               <a:ext uri="{FF2B5EF4-FFF2-40B4-BE49-F238E27FC236}">
-                <a16:creationId xmlns:a16="http://schemas.microsoft.com/office/drawing/2014/main" id="{86167A77-BA78-4431-B614-5542160FC94C}"/>
+                <a16:creationId xmlns:a16="http://schemas.microsoft.com/office/drawing/2014/main" id="{B85BC23E-70EC-49B5-9E60-19D8FC00DDF5}"/>
               </a:ext>
             </a:extLst>
           </p:cNvPr>
@@ -10150,8 +10219,8 @@
         </p:nvSpPr>
         <p:spPr>
           <a:xfrm xmlns:a="http://schemas.openxmlformats.org/drawingml/2006/main">
-            <a:off x="400050" y="2171700"/>
-            <a:ext cx="5334000" cy="666750"/>
+            <a:off x="400050" y="4019550"/>
+            <a:ext cx="3638550" cy="495300"/>
           </a:xfrm>
           <a:prstGeom xmlns:a="http://schemas.openxmlformats.org/drawingml/2006/main" prst="rect">
             <a:avLst/>
@@ -10169,17 +10238,17 @@
           <a:lstStyle xmlns:a="http://schemas.openxmlformats.org/drawingml/2006/main"/>
           <a:p xmlns:a="http://schemas.openxmlformats.org/drawingml/2006/main">
             <a:pPr algn="l">
-              <a:defRPr sz="2325" b="1">
-                <a:solidFill>
-                  <a:srgbClr val="111111"/>
-                </a:solidFill>
-                <a:latin typeface="Microsoft JhengHei"/>
-                <a:ea typeface="Microsoft JhengHei"/>
-                <a:cs typeface="Microsoft JhengHei"/>
-              </a:defRPr>
-            </a:pPr>
-            <a:r>
-              <a:rPr sz="2325" b="1">
+              <a:defRPr sz="2175" b="1">
+                <a:solidFill>
+                  <a:srgbClr val="111111"/>
+                </a:solidFill>
+                <a:latin typeface="Microsoft JhengHei"/>
+                <a:ea typeface="Microsoft JhengHei"/>
+                <a:cs typeface="Microsoft JhengHei"/>
+              </a:defRPr>
+            </a:pPr>
+            <a:r>
+              <a:rPr sz="2175" b="1">
                 <a:solidFill>
                   <a:srgbClr val="111111"/>
                 </a:solidFill>
@@ -10187,17 +10256,17 @@
                 <a:ea typeface="Microsoft JhengHei"/>
                 <a:cs typeface="Microsoft JhengHei"/>
               </a:rPr>
-              <a:t>跨年度趨勢</a:t>
-            </a:r>
-          </a:p>
-        </p:txBody>
-      </p:sp>
-      <p:sp>
-        <p:nvSpPr>
-          <p:cNvPr id="5" name="capability-body-1">
+              <a:t>系統首頁</a:t>
+            </a:r>
+          </a:p>
+        </p:txBody>
+      </p:sp>
+      <p:sp>
+        <p:nvSpPr>
+          <p:cNvPr id="7" name="screen-body-1">
             <a:extLst xmlns:a="http://schemas.openxmlformats.org/drawingml/2006/main">
               <a:ext uri="{FF2B5EF4-FFF2-40B4-BE49-F238E27FC236}">
-                <a16:creationId xmlns:a16="http://schemas.microsoft.com/office/drawing/2014/main" id="{36433385-1B95-4063-AAEB-F9BBA8590E27}"/>
+                <a16:creationId xmlns:a16="http://schemas.microsoft.com/office/drawing/2014/main" id="{19D52756-6EAD-480D-8612-668A28B67EDD}"/>
               </a:ext>
             </a:extLst>
           </p:cNvPr>
@@ -10208,8 +10277,8 @@
         </p:nvSpPr>
         <p:spPr>
           <a:xfrm xmlns:a="http://schemas.openxmlformats.org/drawingml/2006/main">
-            <a:off x="400050" y="2876550"/>
-            <a:ext cx="5238750" cy="1066800"/>
+            <a:off x="400050" y="4648200"/>
+            <a:ext cx="3638550" cy="1047750"/>
           </a:xfrm>
           <a:prstGeom xmlns:a="http://schemas.openxmlformats.org/drawingml/2006/main" prst="rect">
             <a:avLst/>
@@ -10231,7 +10300,7 @@
                 <a:spcPct val="112000"/>
               </a:lnSpc>
               <a:buNone/>
-              <a:defRPr sz="1725">
+              <a:defRPr sz="1575">
                 <a:solidFill>
                   <a:srgbClr val="596273"/>
                 </a:solidFill>
@@ -10241,7 +10310,7 @@
               </a:defRPr>
             </a:pPr>
             <a:r>
-              <a:rPr sz="1725">
+              <a:rPr sz="1575">
                 <a:solidFill>
                   <a:srgbClr val="596273"/>
                 </a:solidFill>
@@ -10249,39 +10318,17 @@
                 <a:ea typeface="Microsoft JhengHei"/>
                 <a:cs typeface="Microsoft JhengHei"/>
               </a:rPr>
-              <a:t>以年份＋月份排序，查看高低用電、住房率、溫度與開館日。</a:t>
-            </a:r>
-          </a:p>
-        </p:txBody>
-      </p:sp>
-      <p:cxnSp>
-        <p:nvCxnSpPr>
-          <p:cNvPr id="20" name="capability-rule-2"/>
-          <p:cNvCxnSpPr/>
-          <p:nvPr/>
-        </p:nvCxnSpPr>
-        <p:spPr>
-          <a:xfrm xmlns:a="http://schemas.openxmlformats.org/drawingml/2006/main">
-            <a:off x="6267450" y="1905000"/>
-            <a:ext cx="857250" cy="0"/>
-          </a:xfrm>
-          <a:prstGeom xmlns:a="http://schemas.openxmlformats.org/drawingml/2006/main" prst="straightConnector1">
-            <a:avLst/>
-          </a:prstGeom>
-          <a:ln xmlns:a="http://schemas.openxmlformats.org/drawingml/2006/main" w="47625">
-            <a:solidFill>
-              <a:srgbClr val="B8BCC4"/>
-            </a:solidFill>
-            <a:prstDash val="solid"/>
-          </a:ln>
-        </p:spPr>
-      </p:cxnSp>
-      <p:sp>
-        <p:nvSpPr>
-          <p:cNvPr id="7" name="capability-title-2">
+              <a:t>先看年度總量、最高與最低月份，再進入跨年度趨勢。</a:t>
+            </a:r>
+          </a:p>
+        </p:txBody>
+      </p:sp>
+      <p:sp>
+        <p:nvSpPr>
+          <p:cNvPr id="8" name="screen-frame-2">
             <a:extLst xmlns:a="http://schemas.openxmlformats.org/drawingml/2006/main">
               <a:ext uri="{FF2B5EF4-FFF2-40B4-BE49-F238E27FC236}">
-                <a16:creationId xmlns:a16="http://schemas.microsoft.com/office/drawing/2014/main" id="{025D53CD-0C69-482C-8F43-500C94C1F8D8}"/>
+                <a16:creationId xmlns:a16="http://schemas.microsoft.com/office/drawing/2014/main" id="{89C01384-B921-4DA4-87C4-D04024D1A342}"/>
               </a:ext>
             </a:extLst>
           </p:cNvPr>
@@ -10292,8 +10339,89 @@
         </p:nvSpPr>
         <p:spPr>
           <a:xfrm xmlns:a="http://schemas.openxmlformats.org/drawingml/2006/main">
-            <a:off x="6267450" y="2171700"/>
-            <a:ext cx="5334000" cy="666750"/>
+            <a:off x="4229100" y="1381125"/>
+            <a:ext cx="3733800" cy="2152650"/>
+          </a:xfrm>
+          <a:prstGeom xmlns:a="http://schemas.openxmlformats.org/drawingml/2006/main" prst="roundRect">
+            <a:avLst>
+              <a:gd name="adj" fmla="val 3540"/>
+            </a:avLst>
+          </a:prstGeom>
+          <a:solidFill xmlns:a="http://schemas.openxmlformats.org/drawingml/2006/main">
+            <a:srgbClr val="FFFFFF"/>
+          </a:solidFill>
+          <a:ln xmlns:a="http://schemas.openxmlformats.org/drawingml/2006/main" w="9525">
+            <a:solidFill>
+              <a:srgbClr val="D8E9FF"/>
+            </a:solidFill>
+            <a:prstDash val="solid"/>
+          </a:ln>
+        </p:spPr>
+      </p:sp>
+      <p:pic>
+        <p:nvPicPr>
+          <p:cNvPr id="27" name=""/>
+          <p:cNvPicPr>
+            <a:picLocks xmlns:a="http://schemas.openxmlformats.org/drawingml/2006/main" noChangeAspect="1"/>
+          </p:cNvPicPr>
+          <p:nvPr/>
+        </p:nvPicPr>
+        <p:blipFill>
+          <a:blip xmlns:r="http://schemas.openxmlformats.org/officeDocument/2006/relationships" xmlns:a="http://schemas.openxmlformats.org/drawingml/2006/main" r:embed="R88f653f08bc24b2e"/>
+          <a:stretch xmlns:a="http://schemas.openxmlformats.org/drawingml/2006/main"/>
+        </p:blipFill>
+        <p:spPr>
+          <a:xfrm xmlns:a="http://schemas.openxmlformats.org/drawingml/2006/main">
+            <a:off x="4276725" y="1434108"/>
+            <a:ext cx="3638550" cy="2046684"/>
+          </a:xfrm>
+          <a:prstGeom xmlns:a="http://schemas.openxmlformats.org/drawingml/2006/main" prst="roundRect">
+            <a:avLst>
+              <a:gd name="adj" fmla="val 2315"/>
+            </a:avLst>
+          </a:prstGeom>
+        </p:spPr>
+      </p:pic>
+      <p:cxnSp>
+        <p:nvCxnSpPr>
+          <p:cNvPr id="28" name="screen-rule-2"/>
+          <p:cNvCxnSpPr/>
+          <p:nvPr/>
+        </p:nvCxnSpPr>
+        <p:spPr>
+          <a:xfrm xmlns:a="http://schemas.openxmlformats.org/drawingml/2006/main">
+            <a:off x="4276725" y="3810000"/>
+            <a:ext cx="819150" cy="0"/>
+          </a:xfrm>
+          <a:prstGeom xmlns:a="http://schemas.openxmlformats.org/drawingml/2006/main" prst="straightConnector1">
+            <a:avLst/>
+          </a:prstGeom>
+          <a:ln xmlns:a="http://schemas.openxmlformats.org/drawingml/2006/main" w="47625">
+            <a:solidFill>
+              <a:srgbClr val="0757A6"/>
+            </a:solidFill>
+            <a:prstDash val="solid"/>
+          </a:ln>
+        </p:spPr>
+      </p:cxnSp>
+      <p:sp>
+        <p:nvSpPr>
+          <p:cNvPr id="11" name="screen-title-2">
+            <a:extLst xmlns:a="http://schemas.openxmlformats.org/drawingml/2006/main">
+              <a:ext uri="{FF2B5EF4-FFF2-40B4-BE49-F238E27FC236}">
+                <a16:creationId xmlns:a16="http://schemas.microsoft.com/office/drawing/2014/main" id="{3688ED36-9059-48FF-B7A4-30E6BB4AFDDB}"/>
+              </a:ext>
+            </a:extLst>
+          </p:cNvPr>
+          <p:cNvSpPr>
+            <a:spLocks xmlns:a="http://schemas.openxmlformats.org/drawingml/2006/main" noGrp="1"/>
+          </p:cNvSpPr>
+          <p:nvPr/>
+        </p:nvSpPr>
+        <p:spPr>
+          <a:xfrm xmlns:a="http://schemas.openxmlformats.org/drawingml/2006/main">
+            <a:off x="4276725" y="4019550"/>
+            <a:ext cx="3638550" cy="495300"/>
           </a:xfrm>
           <a:prstGeom xmlns:a="http://schemas.openxmlformats.org/drawingml/2006/main" prst="rect">
             <a:avLst/>
@@ -10311,35 +10439,35 @@
           <a:lstStyle xmlns:a="http://schemas.openxmlformats.org/drawingml/2006/main"/>
           <a:p xmlns:a="http://schemas.openxmlformats.org/drawingml/2006/main">
             <a:pPr algn="l">
-              <a:defRPr sz="2325" b="1">
-                <a:solidFill>
-                  <a:srgbClr val="111111"/>
-                </a:solidFill>
-                <a:latin typeface="Microsoft JhengHei"/>
-                <a:ea typeface="Microsoft JhengHei"/>
-                <a:cs typeface="Microsoft JhengHei"/>
-              </a:defRPr>
-            </a:pPr>
-            <a:r>
-              <a:rPr sz="2325" b="1">
-                <a:solidFill>
-                  <a:srgbClr val="111111"/>
+              <a:defRPr sz="2175" b="1">
+                <a:solidFill>
+                  <a:srgbClr val="0757A6"/>
+                </a:solidFill>
+                <a:latin typeface="Microsoft JhengHei"/>
+                <a:ea typeface="Microsoft JhengHei"/>
+                <a:cs typeface="Microsoft JhengHei"/>
+              </a:defRPr>
+            </a:pPr>
+            <a:r>
+              <a:rPr sz="2175" b="1">
+                <a:solidFill>
+                  <a:srgbClr val="0757A6"/>
                 </a:solidFill>
                 <a:latin typeface="Microsoft JhengHei"/>
                 <a:ea typeface="Microsoft JhengHei"/>
                 <a:cs typeface="Microsoft JhengHei"/>
               </a:rPr>
-              <a:t>用途與節能情境</a:t>
-            </a:r>
-          </a:p>
-        </p:txBody>
-      </p:sp>
-      <p:sp>
-        <p:nvSpPr>
-          <p:cNvPr id="8" name="capability-body-2">
+              <a:t>用電預測</a:t>
+            </a:r>
+          </a:p>
+        </p:txBody>
+      </p:sp>
+      <p:sp>
+        <p:nvSpPr>
+          <p:cNvPr id="12" name="screen-body-2">
             <a:extLst xmlns:a="http://schemas.openxmlformats.org/drawingml/2006/main">
               <a:ext uri="{FF2B5EF4-FFF2-40B4-BE49-F238E27FC236}">
-                <a16:creationId xmlns:a16="http://schemas.microsoft.com/office/drawing/2014/main" id="{7108555F-1A5B-44BF-9B54-0425671151EC}"/>
+                <a16:creationId xmlns:a16="http://schemas.microsoft.com/office/drawing/2014/main" id="{7D8E4589-CC2D-4C50-A402-9BF09B4983FB}"/>
               </a:ext>
             </a:extLst>
           </p:cNvPr>
@@ -10350,8 +10478,8 @@
         </p:nvSpPr>
         <p:spPr>
           <a:xfrm xmlns:a="http://schemas.openxmlformats.org/drawingml/2006/main">
-            <a:off x="6267450" y="2876550"/>
-            <a:ext cx="5238750" cy="1066800"/>
+            <a:off x="4276725" y="4648200"/>
+            <a:ext cx="3638550" cy="1047750"/>
           </a:xfrm>
           <a:prstGeom xmlns:a="http://schemas.openxmlformats.org/drawingml/2006/main" prst="rect">
             <a:avLst/>
@@ -10373,7 +10501,7 @@
                 <a:spcPct val="112000"/>
               </a:lnSpc>
               <a:buNone/>
-              <a:defRPr sz="1725">
+              <a:defRPr sz="1575">
                 <a:solidFill>
                   <a:srgbClr val="596273"/>
                 </a:solidFill>
@@ -10383,7 +10511,7 @@
               </a:defRPr>
             </a:pPr>
             <a:r>
-              <a:rPr sz="1725">
+              <a:rPr sz="1575">
                 <a:solidFill>
                   <a:srgbClr val="596273"/>
                 </a:solidFill>
@@ -10391,21 +10519,80 @@
                 <a:ea typeface="Microsoft JhengHei"/>
                 <a:cs typeface="Microsoft JhengHei"/>
               </a:rPr>
-              <a:t>拆解基礎、照明、熱水、冷氣與其他用電，估算節電、節費及減碳。</a:t>
-            </a:r>
-          </a:p>
-        </p:txBody>
-      </p:sp>
+              <a:t>同頁呈現留一法指標、基準比較、預測範圍與外插提醒。</a:t>
+            </a:r>
+          </a:p>
+        </p:txBody>
+      </p:sp>
+      <p:sp>
+        <p:nvSpPr>
+          <p:cNvPr id="13" name="screen-frame-3">
+            <a:extLst xmlns:a="http://schemas.openxmlformats.org/drawingml/2006/main">
+              <a:ext uri="{FF2B5EF4-FFF2-40B4-BE49-F238E27FC236}">
+                <a16:creationId xmlns:a16="http://schemas.microsoft.com/office/drawing/2014/main" id="{77EC1C46-8E09-4940-B5AF-9AD68B524A44}"/>
+              </a:ext>
+            </a:extLst>
+          </p:cNvPr>
+          <p:cNvSpPr>
+            <a:spLocks xmlns:a="http://schemas.openxmlformats.org/drawingml/2006/main" noGrp="1"/>
+          </p:cNvSpPr>
+          <p:nvPr/>
+        </p:nvSpPr>
+        <p:spPr>
+          <a:xfrm xmlns:a="http://schemas.openxmlformats.org/drawingml/2006/main">
+            <a:off x="8105775" y="1381125"/>
+            <a:ext cx="3733800" cy="2152650"/>
+          </a:xfrm>
+          <a:prstGeom xmlns:a="http://schemas.openxmlformats.org/drawingml/2006/main" prst="roundRect">
+            <a:avLst>
+              <a:gd name="adj" fmla="val 3540"/>
+            </a:avLst>
+          </a:prstGeom>
+          <a:solidFill xmlns:a="http://schemas.openxmlformats.org/drawingml/2006/main">
+            <a:srgbClr val="FFFFFF"/>
+          </a:solidFill>
+          <a:ln xmlns:a="http://schemas.openxmlformats.org/drawingml/2006/main" w="9525">
+            <a:solidFill>
+              <a:srgbClr val="B8BCC4"/>
+            </a:solidFill>
+            <a:prstDash val="solid"/>
+          </a:ln>
+        </p:spPr>
+      </p:sp>
+      <p:pic>
+        <p:nvPicPr>
+          <p:cNvPr id="32" name=""/>
+          <p:cNvPicPr>
+            <a:picLocks xmlns:a="http://schemas.openxmlformats.org/drawingml/2006/main" noChangeAspect="1"/>
+          </p:cNvPicPr>
+          <p:nvPr/>
+        </p:nvPicPr>
+        <p:blipFill>
+          <a:blip xmlns:r="http://schemas.openxmlformats.org/officeDocument/2006/relationships" xmlns:a="http://schemas.openxmlformats.org/drawingml/2006/main" r:embed="R4556f32779944192"/>
+          <a:stretch xmlns:a="http://schemas.openxmlformats.org/drawingml/2006/main"/>
+        </p:blipFill>
+        <p:spPr>
+          <a:xfrm xmlns:a="http://schemas.openxmlformats.org/drawingml/2006/main">
+            <a:off x="8153400" y="1434108"/>
+            <a:ext cx="3638550" cy="2046684"/>
+          </a:xfrm>
+          <a:prstGeom xmlns:a="http://schemas.openxmlformats.org/drawingml/2006/main" prst="roundRect">
+            <a:avLst>
+              <a:gd name="adj" fmla="val 2315"/>
+            </a:avLst>
+          </a:prstGeom>
+        </p:spPr>
+      </p:pic>
       <p:cxnSp>
         <p:nvCxnSpPr>
-          <p:cNvPr id="23" name="capability-rule-3"/>
+          <p:cNvPr id="33" name="screen-rule-3"/>
           <p:cNvCxnSpPr/>
           <p:nvPr/>
         </p:nvCxnSpPr>
         <p:spPr>
           <a:xfrm xmlns:a="http://schemas.openxmlformats.org/drawingml/2006/main">
-            <a:off x="400050" y="4048125"/>
-            <a:ext cx="857250" cy="0"/>
+            <a:off x="8153400" y="3810000"/>
+            <a:ext cx="819150" cy="0"/>
           </a:xfrm>
           <a:prstGeom xmlns:a="http://schemas.openxmlformats.org/drawingml/2006/main" prst="straightConnector1">
             <a:avLst/>
@@ -10420,10 +10607,10 @@
       </p:cxnSp>
       <p:sp>
         <p:nvSpPr>
-          <p:cNvPr id="10" name="capability-title-3">
+          <p:cNvPr id="16" name="screen-title-3">
             <a:extLst xmlns:a="http://schemas.openxmlformats.org/drawingml/2006/main">
               <a:ext uri="{FF2B5EF4-FFF2-40B4-BE49-F238E27FC236}">
-                <a16:creationId xmlns:a16="http://schemas.microsoft.com/office/drawing/2014/main" id="{844A09E9-5BB4-4F85-9556-3F5247EEBA2B}"/>
+                <a16:creationId xmlns:a16="http://schemas.microsoft.com/office/drawing/2014/main" id="{7B2E4CE4-C202-431B-B219-8AAAD67929F1}"/>
               </a:ext>
             </a:extLst>
           </p:cNvPr>
@@ -10434,8 +10621,8 @@
         </p:nvSpPr>
         <p:spPr>
           <a:xfrm xmlns:a="http://schemas.openxmlformats.org/drawingml/2006/main">
-            <a:off x="400050" y="4314825"/>
-            <a:ext cx="5334000" cy="666750"/>
+            <a:off x="8153400" y="4019550"/>
+            <a:ext cx="3638550" cy="495300"/>
           </a:xfrm>
           <a:prstGeom xmlns:a="http://schemas.openxmlformats.org/drawingml/2006/main" prst="rect">
             <a:avLst/>
@@ -10453,17 +10640,17 @@
           <a:lstStyle xmlns:a="http://schemas.openxmlformats.org/drawingml/2006/main"/>
           <a:p xmlns:a="http://schemas.openxmlformats.org/drawingml/2006/main">
             <a:pPr algn="l">
-              <a:defRPr sz="2325" b="1">
-                <a:solidFill>
-                  <a:srgbClr val="111111"/>
-                </a:solidFill>
-                <a:latin typeface="Microsoft JhengHei"/>
-                <a:ea typeface="Microsoft JhengHei"/>
-                <a:cs typeface="Microsoft JhengHei"/>
-              </a:defRPr>
-            </a:pPr>
-            <a:r>
-              <a:rPr sz="2325" b="1">
+              <a:defRPr sz="2175" b="1">
+                <a:solidFill>
+                  <a:srgbClr val="111111"/>
+                </a:solidFill>
+                <a:latin typeface="Microsoft JhengHei"/>
+                <a:ea typeface="Microsoft JhengHei"/>
+                <a:cs typeface="Microsoft JhengHei"/>
+              </a:defRPr>
+            </a:pPr>
+            <a:r>
+              <a:rPr sz="2175" b="1">
                 <a:solidFill>
                   <a:srgbClr val="111111"/>
                 </a:solidFill>
@@ -10471,17 +10658,17 @@
                 <a:ea typeface="Microsoft JhengHei"/>
                 <a:cs typeface="Microsoft JhengHei"/>
               </a:rPr>
-              <a:t>下月用電預測</a:t>
-            </a:r>
-          </a:p>
-        </p:txBody>
-      </p:sp>
-      <p:sp>
-        <p:nvSpPr>
-          <p:cNvPr id="11" name="capability-body-3">
+              <a:t>冷氣風險</a:t>
+            </a:r>
+          </a:p>
+        </p:txBody>
+      </p:sp>
+      <p:sp>
+        <p:nvSpPr>
+          <p:cNvPr id="17" name="screen-body-3">
             <a:extLst xmlns:a="http://schemas.openxmlformats.org/drawingml/2006/main">
               <a:ext uri="{FF2B5EF4-FFF2-40B4-BE49-F238E27FC236}">
-                <a16:creationId xmlns:a16="http://schemas.microsoft.com/office/drawing/2014/main" id="{95B81F34-5D34-4A82-89BD-DC4EBAB0F34F}"/>
+                <a16:creationId xmlns:a16="http://schemas.microsoft.com/office/drawing/2014/main" id="{E27C6435-B435-4CE3-BB43-02FADB6DB017}"/>
               </a:ext>
             </a:extLst>
           </p:cNvPr>
@@ -10492,8 +10679,8 @@
         </p:nvSpPr>
         <p:spPr>
           <a:xfrm xmlns:a="http://schemas.openxmlformats.org/drawingml/2006/main">
-            <a:off x="400050" y="5019675"/>
-            <a:ext cx="5238750" cy="1066800"/>
+            <a:off x="8153400" y="4648200"/>
+            <a:ext cx="3638550" cy="1047750"/>
           </a:xfrm>
           <a:prstGeom xmlns:a="http://schemas.openxmlformats.org/drawingml/2006/main" prst="rect">
             <a:avLst/>
@@ -10515,7 +10702,7 @@
                 <a:spcPct val="112000"/>
               </a:lnSpc>
               <a:buNone/>
-              <a:defRPr sz="1725">
+              <a:defRPr sz="1575">
                 <a:solidFill>
                   <a:srgbClr val="596273"/>
                 </a:solidFill>
@@ -10525,7 +10712,7 @@
               </a:defRPr>
             </a:pPr>
             <a:r>
-              <a:rPr sz="1725">
+              <a:rPr sz="1575">
                 <a:solidFill>
                   <a:srgbClr val="596273"/>
                 </a:solidFill>
@@ -10533,39 +10720,17 @@
                 <a:ea typeface="Microsoft JhengHei"/>
                 <a:cs typeface="Microsoft JhengHei"/>
               </a:rPr>
-              <a:t>呈現留一法指標、模型基準、預測參考範圍與外插提醒。</a:t>
-            </a:r>
-          </a:p>
-        </p:txBody>
-      </p:sp>
-      <p:cxnSp>
-        <p:nvCxnSpPr>
-          <p:cNvPr id="26" name="capability-rule-4"/>
-          <p:cNvCxnSpPr/>
-          <p:nvPr/>
-        </p:nvCxnSpPr>
-        <p:spPr>
-          <a:xfrm xmlns:a="http://schemas.openxmlformats.org/drawingml/2006/main">
-            <a:off x="6267450" y="4048125"/>
-            <a:ext cx="857250" cy="0"/>
-          </a:xfrm>
-          <a:prstGeom xmlns:a="http://schemas.openxmlformats.org/drawingml/2006/main" prst="straightConnector1">
-            <a:avLst/>
-          </a:prstGeom>
-          <a:ln xmlns:a="http://schemas.openxmlformats.org/drawingml/2006/main" w="47625">
-            <a:solidFill>
-              <a:srgbClr val="0757A6"/>
-            </a:solidFill>
-            <a:prstDash val="solid"/>
-          </a:ln>
-        </p:spPr>
-      </p:cxnSp>
-      <p:sp>
-        <p:nvSpPr>
-          <p:cNvPr id="13" name="capability-title-4">
+              <a:t>依時段估耗電，並把機齡、負載與保養轉成維護排序。</a:t>
+            </a:r>
+          </a:p>
+        </p:txBody>
+      </p:sp>
+      <p:sp>
+        <p:nvSpPr>
+          <p:cNvPr id="18" name="screen-backup-note">
             <a:extLst xmlns:a="http://schemas.openxmlformats.org/drawingml/2006/main">
               <a:ext uri="{FF2B5EF4-FFF2-40B4-BE49-F238E27FC236}">
-                <a16:creationId xmlns:a16="http://schemas.microsoft.com/office/drawing/2014/main" id="{2C10CF80-526B-4EE7-9170-C367720886CF}"/>
+                <a16:creationId xmlns:a16="http://schemas.microsoft.com/office/drawing/2014/main" id="{98BD144C-B291-484C-AA84-6769997D7093}"/>
               </a:ext>
             </a:extLst>
           </p:cNvPr>
@@ -10576,8 +10741,8 @@
         </p:nvSpPr>
         <p:spPr>
           <a:xfrm xmlns:a="http://schemas.openxmlformats.org/drawingml/2006/main">
-            <a:off x="6267450" y="4314825"/>
-            <a:ext cx="5334000" cy="666750"/>
+            <a:off x="400050" y="5953125"/>
+            <a:ext cx="10001250" cy="266700"/>
           </a:xfrm>
           <a:prstGeom xmlns:a="http://schemas.openxmlformats.org/drawingml/2006/main" prst="rect">
             <a:avLst/>
@@ -10595,87 +10760,25 @@
           <a:lstStyle xmlns:a="http://schemas.openxmlformats.org/drawingml/2006/main"/>
           <a:p xmlns:a="http://schemas.openxmlformats.org/drawingml/2006/main">
             <a:pPr algn="l">
-              <a:defRPr sz="2325" b="1">
-                <a:solidFill>
-                  <a:srgbClr val="0757A6"/>
-                </a:solidFill>
-                <a:latin typeface="Microsoft JhengHei"/>
-                <a:ea typeface="Microsoft JhengHei"/>
-                <a:cs typeface="Microsoft JhengHei"/>
-              </a:defRPr>
-            </a:pPr>
-            <a:r>
-              <a:rPr sz="2325" b="1">
-                <a:solidFill>
-                  <a:srgbClr val="0757A6"/>
+              <a:defRPr sz="1200">
+                <a:solidFill>
+                  <a:srgbClr val="B42318"/>
+                </a:solidFill>
+                <a:latin typeface="Microsoft JhengHei"/>
+                <a:ea typeface="Microsoft JhengHei"/>
+                <a:cs typeface="Microsoft JhengHei"/>
+              </a:defRPr>
+            </a:pPr>
+            <a:r>
+              <a:rPr sz="1200">
+                <a:solidFill>
+                  <a:srgbClr val="B42318"/>
                 </a:solidFill>
                 <a:latin typeface="Microsoft JhengHei"/>
                 <a:ea typeface="Microsoft JhengHei"/>
                 <a:cs typeface="Microsoft JhengHei"/>
               </a:rPr>
-              <a:t>冷氣清冊排名</a:t>
-            </a:r>
-          </a:p>
-        </p:txBody>
-      </p:sp>
-      <p:sp>
-        <p:nvSpPr>
-          <p:cNvPr id="14" name="capability-body-4">
-            <a:extLst xmlns:a="http://schemas.openxmlformats.org/drawingml/2006/main">
-              <a:ext uri="{FF2B5EF4-FFF2-40B4-BE49-F238E27FC236}">
-                <a16:creationId xmlns:a16="http://schemas.microsoft.com/office/drawing/2014/main" id="{57A69C03-AE85-45DF-8CF4-5F0E85FD5EF3}"/>
-              </a:ext>
-            </a:extLst>
-          </p:cNvPr>
-          <p:cNvSpPr>
-            <a:spLocks xmlns:a="http://schemas.openxmlformats.org/drawingml/2006/main" noGrp="1"/>
-          </p:cNvSpPr>
-          <p:nvPr/>
-        </p:nvSpPr>
-        <p:spPr>
-          <a:xfrm xmlns:a="http://schemas.openxmlformats.org/drawingml/2006/main">
-            <a:off x="6267450" y="5019675"/>
-            <a:ext cx="5238750" cy="1066800"/>
-          </a:xfrm>
-          <a:prstGeom xmlns:a="http://schemas.openxmlformats.org/drawingml/2006/main" prst="rect">
-            <a:avLst/>
-          </a:prstGeom>
-          <a:noFill xmlns:a="http://schemas.openxmlformats.org/drawingml/2006/main"/>
-          <a:ln xmlns:a="http://schemas.openxmlformats.org/drawingml/2006/main" w="0">
-            <a:noFill/>
-            <a:prstDash val="solid"/>
-          </a:ln>
-        </p:spPr>
-        <p:txBody>
-          <a:bodyPr xmlns:a="http://schemas.openxmlformats.org/drawingml/2006/main" lIns="0" tIns="0" rIns="0" bIns="0" anchor="t">
-            <a:normAutofit fontScale="100000"/>
-          </a:bodyPr>
-          <a:lstStyle xmlns:a="http://schemas.openxmlformats.org/drawingml/2006/main"/>
-          <a:p xmlns:a="http://schemas.openxmlformats.org/drawingml/2006/main">
-            <a:pPr algn="l">
-              <a:lnSpc>
-                <a:spcPct val="112000"/>
-              </a:lnSpc>
-              <a:buNone/>
-              <a:defRPr sz="1725">
-                <a:solidFill>
-                  <a:srgbClr val="596273"/>
-                </a:solidFill>
-                <a:latin typeface="Microsoft JhengHei"/>
-                <a:ea typeface="Microsoft JhengHei"/>
-                <a:cs typeface="Microsoft JhengHei"/>
-              </a:defRPr>
-            </a:pPr>
-            <a:r>
-              <a:rPr sz="1725">
-                <a:solidFill>
-                  <a:srgbClr val="596273"/>
-                </a:solidFill>
-                <a:latin typeface="Microsoft JhengHei"/>
-                <a:ea typeface="Microsoft JhengHei"/>
-                <a:cs typeface="Microsoft JhengHei"/>
-              </a:rPr>
-              <a:t>批次輸出每組月耗電、故障機率、預期故障台數及維護建議。</a:t>
+              <a:t>實際部署畫面｜現場網路不穩時，本頁可直接作為口試展示備援</a:t>
             </a:r>
           </a:p>
         </p:txBody>
@@ -10683,7 +10786,7 @@
     </p:spTree>
     <p:extLst>
       <p:ext uri="{BB962C8B-B14F-4D97-AF65-F5344CB8AC3E}">
-        <p14:creationId xmlns:p14="http://schemas.microsoft.com/office/powerpoint/2010/main" val="789268768"/>
+        <p14:creationId xmlns:p14="http://schemas.microsoft.com/office/powerpoint/2010/main" val="639936385"/>
       </p:ext>
     </p:extLst>
   </p:cSld>
